--- a/CatLingo_Defense_Template_Style.pptx
+++ b/CatLingo_Defense_Template_Style.pptx
@@ -5,7 +5,7 @@
     <p:sldMasterId id="2147483648" r:id="rId1"/>
   </p:sldMasterIdLst>
   <p:notesMasterIdLst>
-    <p:notesMasterId r:id="rId12"/>
+    <p:notesMasterId r:id="rId14"/>
   </p:notesMasterIdLst>
   <p:sldIdLst>
     <p:sldId id="256" r:id="rId2"/>
@@ -14,10 +14,12 @@
     <p:sldId id="259" r:id="rId5"/>
     <p:sldId id="260" r:id="rId6"/>
     <p:sldId id="261" r:id="rId7"/>
-    <p:sldId id="262" r:id="rId8"/>
-    <p:sldId id="263" r:id="rId9"/>
-    <p:sldId id="264" r:id="rId10"/>
-    <p:sldId id="265" r:id="rId11"/>
+    <p:sldId id="266" r:id="rId8"/>
+    <p:sldId id="262" r:id="rId9"/>
+    <p:sldId id="267" r:id="rId10"/>
+    <p:sldId id="263" r:id="rId11"/>
+    <p:sldId id="264" r:id="rId12"/>
+    <p:sldId id="265" r:id="rId13"/>
   </p:sldIdLst>
   <p:sldSz cx="12192000" cy="6858000"/>
   <p:notesSz cx="6858000" cy="12192000"/>
@@ -384,7 +386,9 @@
             <a:r>
               <a:rPr lang="en-US" dirty="0"/>
               <a:t>[Sources]
-- Visual style based on the uploaded PowerPoint template closing slide and Queen Mary branding from Copyright PDFs Ally.pptx.
+- Uploaded thesis PDF: Results and Discussion chapter (pp. 37–43) for system effectiveness and objective comparison.
+- Uploaded thesis PDF: Conclusion section 6.2 and 6.3 (pp. 44–45) for achievement of objectives and remaining limitations.
+- Profile screenshot is cropped from uploaded PDF p. 41 as evidence of progress tracking.
 [/Sources]</a:t>
             </a:r>
           </a:p>
@@ -408,6 +412,186 @@
             <a:fld id="{F7021451-1387-4CA6-816F-3879F97B5CBC}" type="slidenum">
               <a:rPr lang="en-US"/>
               <a:t>10</a:t>
+            </a:fld>
+            <a:endParaRPr lang="en-US"/>
+          </a:p>
+        </p:txBody>
+      </p:sp>
+    </p:spTree>
+    <p:extLst>
+      <p:ext uri="{BB962C8B-B14F-4D97-AF65-F5344CB8AC3E}">
+        <p14:creationId xmlns:p14="http://schemas.microsoft.com/office/powerpoint/2010/main" val="1024086991"/>
+      </p:ext>
+    </p:extLst>
+  </p:cSld>
+  <p:clrMapOvr>
+    <a:masterClrMapping/>
+  </p:clrMapOvr>
+</p:notes>
+</file>
+
+<file path=ppt/notesSlides/notesSlide11.xml><?xml version="1.0" encoding="utf-8"?>
+<p:notes xmlns:a="http://schemas.openxmlformats.org/drawingml/2006/main" xmlns:r="http://schemas.openxmlformats.org/officeDocument/2006/relationships" xmlns:p="http://schemas.openxmlformats.org/presentationml/2006/main">
+  <p:cSld>
+    <p:spTree>
+      <p:nvGrpSpPr>
+        <p:cNvPr id="1" name=""/>
+        <p:cNvGrpSpPr/>
+        <p:nvPr/>
+      </p:nvGrpSpPr>
+      <p:grpSpPr>
+        <a:xfrm>
+          <a:off x="0" y="0"/>
+          <a:ext cx="0" cy="0"/>
+          <a:chOff x="0" y="0"/>
+          <a:chExt cx="0" cy="0"/>
+        </a:xfrm>
+      </p:grpSpPr>
+      <p:sp>
+        <p:nvSpPr>
+          <p:cNvPr id="2" name="Slide Image Placeholder 1"/>
+          <p:cNvSpPr>
+            <a:spLocks noGrp="1" noRot="1" noChangeAspect="1"/>
+          </p:cNvSpPr>
+          <p:nvPr>
+            <p:ph type="sldImg"/>
+          </p:nvPr>
+        </p:nvSpPr>
+        <p:spPr/>
+      </p:sp>
+      <p:sp>
+        <p:nvSpPr>
+          <p:cNvPr id="3" name="Notes Placeholder 2"/>
+          <p:cNvSpPr>
+            <a:spLocks noGrp="1"/>
+          </p:cNvSpPr>
+          <p:nvPr>
+            <p:ph type="body" idx="1"/>
+          </p:nvPr>
+        </p:nvSpPr>
+        <p:spPr/>
+        <p:txBody>
+          <a:bodyPr/>
+          <a:lstStyle/>
+          <a:p>
+            <a:r>
+              <a:rPr lang="en-US" dirty="0"/>
+              <a:t>[Sources]
+- Uploaded thesis PDF: Discussion of limitations (p. 42) and conclusion/future work (pp. 44–45).
+- Uploaded DOCX initial draft: Risk and Environmental Impact Assessment appendix for privacy, fairness, and deployment-related constraints.
+- Limitations reflect both the dissertation discussion and the current GitHub project state.
+[/Sources]</a:t>
+            </a:r>
+          </a:p>
+        </p:txBody>
+      </p:sp>
+      <p:sp>
+        <p:nvSpPr>
+          <p:cNvPr id="4" name="Slide Number Placeholder 3"/>
+          <p:cNvSpPr>
+            <a:spLocks noGrp="1"/>
+          </p:cNvSpPr>
+          <p:nvPr>
+            <p:ph type="sldNum" sz="quarter" idx="10"/>
+          </p:nvPr>
+        </p:nvSpPr>
+        <p:spPr/>
+        <p:txBody>
+          <a:bodyPr/>
+          <a:lstStyle/>
+          <a:p>
+            <a:fld id="{F7021451-1387-4CA6-816F-3879F97B5CBC}" type="slidenum">
+              <a:rPr lang="en-US"/>
+              <a:t>11</a:t>
+            </a:fld>
+            <a:endParaRPr lang="en-US"/>
+          </a:p>
+        </p:txBody>
+      </p:sp>
+    </p:spTree>
+    <p:extLst>
+      <p:ext uri="{BB962C8B-B14F-4D97-AF65-F5344CB8AC3E}">
+        <p14:creationId xmlns:p14="http://schemas.microsoft.com/office/powerpoint/2010/main" val="1024086991"/>
+      </p:ext>
+    </p:extLst>
+  </p:cSld>
+  <p:clrMapOvr>
+    <a:masterClrMapping/>
+  </p:clrMapOvr>
+</p:notes>
+</file>
+
+<file path=ppt/notesSlides/notesSlide12.xml><?xml version="1.0" encoding="utf-8"?>
+<p:notes xmlns:a="http://schemas.openxmlformats.org/drawingml/2006/main" xmlns:r="http://schemas.openxmlformats.org/officeDocument/2006/relationships" xmlns:p="http://schemas.openxmlformats.org/presentationml/2006/main">
+  <p:cSld>
+    <p:spTree>
+      <p:nvGrpSpPr>
+        <p:cNvPr id="1" name=""/>
+        <p:cNvGrpSpPr/>
+        <p:nvPr/>
+      </p:nvGrpSpPr>
+      <p:grpSpPr>
+        <a:xfrm>
+          <a:off x="0" y="0"/>
+          <a:ext cx="0" cy="0"/>
+          <a:chOff x="0" y="0"/>
+          <a:chExt cx="0" cy="0"/>
+        </a:xfrm>
+      </p:grpSpPr>
+      <p:sp>
+        <p:nvSpPr>
+          <p:cNvPr id="2" name="Slide Image Placeholder 1"/>
+          <p:cNvSpPr>
+            <a:spLocks noGrp="1" noRot="1" noChangeAspect="1"/>
+          </p:cNvSpPr>
+          <p:nvPr>
+            <p:ph type="sldImg"/>
+          </p:nvPr>
+        </p:nvSpPr>
+        <p:spPr/>
+      </p:sp>
+      <p:sp>
+        <p:nvSpPr>
+          <p:cNvPr id="3" name="Notes Placeholder 2"/>
+          <p:cNvSpPr>
+            <a:spLocks noGrp="1"/>
+          </p:cNvSpPr>
+          <p:nvPr>
+            <p:ph type="body" idx="1"/>
+          </p:nvPr>
+        </p:nvSpPr>
+        <p:spPr/>
+        <p:txBody>
+          <a:bodyPr/>
+          <a:lstStyle/>
+          <a:p>
+            <a:r>
+              <a:rPr lang="en-US" dirty="0"/>
+              <a:t>[Sources]
+- Visual style based on the uploaded PowerPoint template closing slide and Queen Mary branding from Copyright PDFs Ally.pptx.
+[/Sources]</a:t>
+            </a:r>
+          </a:p>
+        </p:txBody>
+      </p:sp>
+      <p:sp>
+        <p:nvSpPr>
+          <p:cNvPr id="4" name="Slide Number Placeholder 3"/>
+          <p:cNvSpPr>
+            <a:spLocks noGrp="1"/>
+          </p:cNvSpPr>
+          <p:nvPr>
+            <p:ph type="sldNum" sz="quarter" idx="10"/>
+          </p:nvPr>
+        </p:nvSpPr>
+        <p:spPr/>
+        <p:txBody>
+          <a:bodyPr/>
+          <a:lstStyle/>
+          <a:p>
+            <a:fld id="{F7021451-1387-4CA6-816F-3879F97B5CBC}" type="slidenum">
+              <a:rPr lang="en-US"/>
+              <a:t>12</a:t>
             </a:fld>
             <a:endParaRPr lang="en-US"/>
           </a:p>
@@ -963,7 +1147,7 @@
     </p:spTree>
     <p:extLst>
       <p:ext uri="{BB962C8B-B14F-4D97-AF65-F5344CB8AC3E}">
-        <p14:creationId xmlns:p14="http://schemas.microsoft.com/office/powerpoint/2010/main" val="1024086991"/>
+        <p14:creationId xmlns:p14="http://schemas.microsoft.com/office/powerpoint/2010/main" val="30579774"/>
       </p:ext>
     </p:extLst>
   </p:cSld>
@@ -1020,9 +1204,9 @@
             <a:r>
               <a:rPr lang="en-US" dirty="0"/>
               <a:t>[Sources]
-- Uploaded thesis PDF: Results and Discussion chapter (pp. 37–43) for system effectiveness and objective comparison.
-- Uploaded thesis PDF: Conclusion section 6.2 and 6.3 (pp. 44–45) for achievement of objectives and remaining limitations.
-- Profile screenshot is cropped from uploaded PDF p. 41 as evidence of progress tracking.
+- All four visual assets on this slide are cropped from dissertation result pages in the uploaded PDF: user management (p. 37), Character Matching (p. 38), Pronunciation Quiz (p. 39), and Word Puzzle (p. 40).
+- The screenshots correspond to the thesis discussion in Chapter 5 and are used here as implementation evidence.
+- Template styling continues the uploaded PowerPoint theme (footer gradient and Queen Mary branding).
 [/Sources]</a:t>
             </a:r>
           </a:p>
@@ -1111,9 +1295,9 @@
             <a:r>
               <a:rPr lang="en-US" dirty="0"/>
               <a:t>[Sources]
-- Uploaded thesis PDF: Discussion of limitations (p. 42) and conclusion/future work (pp. 44–45).
-- Uploaded DOCX initial draft: Risk and Environmental Impact Assessment appendix for privacy, fairness, and deployment-related constraints.
-- Limitations reflect both the dissertation discussion and the current GitHub project state.
+- All four visual assets on this slide are cropped from dissertation result pages in the uploaded PDF: user management (p. 37), Character Matching (p. 38), Pronunciation Quiz (p. 39), and Word Puzzle (p. 40).
+- The screenshots correspond to the thesis discussion in Chapter 5 and are used here as implementation evidence.
+- Template styling continues the uploaded PowerPoint theme (footer gradient and Queen Mary branding).
 [/Sources]</a:t>
             </a:r>
           </a:p>
@@ -1145,7 +1329,7 @@
     </p:spTree>
     <p:extLst>
       <p:ext uri="{BB962C8B-B14F-4D97-AF65-F5344CB8AC3E}">
-        <p14:creationId xmlns:p14="http://schemas.microsoft.com/office/powerpoint/2010/main" val="1024086991"/>
+        <p14:creationId xmlns:p14="http://schemas.microsoft.com/office/powerpoint/2010/main" val="3457845096"/>
       </p:ext>
     </p:extLst>
   </p:cSld>
@@ -1581,8 +1765,8 @@
         </p:nvSpPr>
         <p:spPr>
           <a:xfrm>
-            <a:off x="1417320" y="2359152"/>
-            <a:ext cx="9418320" cy="658368"/>
+            <a:off x="1167714" y="2131543"/>
+            <a:ext cx="9667926" cy="885977"/>
           </a:xfrm>
           <a:prstGeom prst="rect">
             <a:avLst/>
@@ -1602,13 +1786,20 @@
                 <a:solidFill>
                   <a:srgbClr val="FFFFFF"/>
                 </a:solidFill>
+                <a:highlight>
+                  <a:srgbClr val="FFFF00"/>
+                </a:highlight>
                 <a:latin typeface="Arial" pitchFamily="34" charset="0"/>
                 <a:ea typeface="Arial" pitchFamily="34" charset="-122"/>
                 <a:cs typeface="Arial" pitchFamily="34" charset="-120"/>
               </a:rPr>
               <a:t>CatLingo</a:t>
             </a:r>
-            <a:endParaRPr lang="en-US" sz="3100" dirty="0"/>
+            <a:endParaRPr lang="en-US" sz="3100" dirty="0">
+              <a:highlight>
+                <a:srgbClr val="FFFF00"/>
+              </a:highlight>
+            </a:endParaRPr>
           </a:p>
         </p:txBody>
       </p:sp>
@@ -1620,8 +1811,8 @@
         </p:nvSpPr>
         <p:spPr>
           <a:xfrm>
-            <a:off x="1417320" y="2907792"/>
-            <a:ext cx="9509760" cy="384048"/>
+            <a:off x="1124465" y="2842056"/>
+            <a:ext cx="9802615" cy="449784"/>
           </a:xfrm>
           <a:prstGeom prst="rect">
             <a:avLst/>
@@ -1659,7 +1850,7 @@
         </p:nvSpPr>
         <p:spPr>
           <a:xfrm>
-            <a:off x="1417320" y="3419856"/>
+            <a:off x="1124465" y="3441605"/>
             <a:ext cx="5303520" cy="228600"/>
           </a:xfrm>
           <a:prstGeom prst="rect">
@@ -1698,7 +1889,7 @@
         </p:nvSpPr>
         <p:spPr>
           <a:xfrm>
-            <a:off x="1444752" y="4041648"/>
+            <a:off x="1124465" y="4352544"/>
             <a:ext cx="4389120" cy="841248"/>
           </a:xfrm>
           <a:prstGeom prst="rect">
@@ -1715,7 +1906,7 @@
               <a:buNone/>
             </a:pPr>
             <a:r>
-              <a:rPr lang="en-US" sz="1450" dirty="0">
+              <a:rPr lang="en-US" sz="1400" dirty="0">
                 <a:solidFill>
                   <a:srgbClr val="FFFFFF"/>
                 </a:solidFill>
@@ -1725,14 +1916,14 @@
               </a:rPr>
               <a:t>Liu Weiliang</a:t>
             </a:r>
-            <a:endParaRPr lang="en-US" sz="1450" dirty="0"/>
+            <a:endParaRPr lang="en-US" sz="1400" dirty="0"/>
           </a:p>
           <a:p>
             <a:pPr marL="0" indent="0" algn="l">
               <a:buNone/>
             </a:pPr>
             <a:r>
-              <a:rPr lang="en-US" sz="1450" dirty="0">
+              <a:rPr lang="en-US" sz="1400" dirty="0">
                 <a:solidFill>
                   <a:srgbClr val="FFFFFF"/>
                 </a:solidFill>
@@ -1742,14 +1933,14 @@
               </a:rPr>
               <a:t>Telecommunications Engineering with Management</a:t>
             </a:r>
-            <a:endParaRPr lang="en-US" sz="1450" dirty="0"/>
+            <a:endParaRPr lang="en-US" sz="1400" dirty="0"/>
           </a:p>
           <a:p>
             <a:pPr marL="0" indent="0" algn="l">
               <a:buNone/>
             </a:pPr>
             <a:r>
-              <a:rPr lang="en-US" sz="1450" dirty="0">
+              <a:rPr lang="en-US" sz="1400" dirty="0">
                 <a:solidFill>
                   <a:srgbClr val="FFFFFF"/>
                 </a:solidFill>
@@ -1759,7 +1950,7 @@
               </a:rPr>
               <a:t>BUPT / QMUL · 2025/26</a:t>
             </a:r>
-            <a:endParaRPr lang="en-US" sz="1450" dirty="0"/>
+            <a:endParaRPr lang="en-US" sz="1400" dirty="0"/>
           </a:p>
         </p:txBody>
       </p:sp>
@@ -1786,6 +1977,54 @@
           </a:ln>
         </p:spPr>
       </p:sp>
+      <p:pic>
+        <p:nvPicPr>
+          <p:cNvPr id="9" name="Picture 13" descr="b6db589c-7942-45dd-b976-168c70c0582a.jpg">
+            <a:extLst>
+              <a:ext uri="{FF2B5EF4-FFF2-40B4-BE49-F238E27FC236}">
+                <a16:creationId xmlns:a16="http://schemas.microsoft.com/office/drawing/2014/main" id="{98512A25-983D-4D65-B794-F936D118EE70}"/>
+              </a:ext>
+            </a:extLst>
+          </p:cNvPr>
+          <p:cNvPicPr>
+            <a:picLocks noChangeAspect="1"/>
+          </p:cNvPicPr>
+          <p:nvPr/>
+        </p:nvPicPr>
+        <p:blipFill>
+          <a:blip r:embed="rId5">
+            <a:extLst>
+              <a:ext uri="{BEBA8EAE-BF5A-486C-A8C5-ECC9F3942E4B}">
+                <a14:imgProps xmlns:a14="http://schemas.microsoft.com/office/drawing/2010/main">
+                  <a14:imgLayer r:embed="rId6">
+                    <a14:imgEffect>
+                      <a14:backgroundRemoval t="3223" b="92090" l="5469" r="91016">
+                        <a14:foregroundMark x1="33594" y1="82715" x2="40820" y2="84863"/>
+                        <a14:foregroundMark x1="19336" y1="88477" x2="47754" y2="87207"/>
+                        <a14:foregroundMark x1="91113" y1="79785" x2="83691" y2="88086"/>
+                        <a14:foregroundMark x1="69238" y1="92090" x2="72852" y2="91699"/>
+                        <a14:backgroundMark x1="5762" y1="391" x2="5957" y2="5273"/>
+                      </a14:backgroundRemoval>
+                    </a14:imgEffect>
+                  </a14:imgLayer>
+                </a14:imgProps>
+              </a:ext>
+            </a:extLst>
+          </a:blip>
+          <a:stretch>
+            <a:fillRect/>
+          </a:stretch>
+        </p:blipFill>
+        <p:spPr>
+          <a:xfrm>
+            <a:off x="7388833" y="1897381"/>
+            <a:ext cx="3337560" cy="3337560"/>
+          </a:xfrm>
+          <a:prstGeom prst="rect">
+            <a:avLst/>
+          </a:prstGeom>
+        </p:spPr>
+      </p:pic>
     </p:spTree>
   </p:cSld>
   <p:clrMapOvr>
@@ -1795,6 +2034,2253 @@
 </file>
 
 <file path=ppt/slides/slide10.xml><?xml version="1.0" encoding="utf-8"?>
+<p:sld xmlns:a="http://schemas.openxmlformats.org/drawingml/2006/main" xmlns:r="http://schemas.openxmlformats.org/officeDocument/2006/relationships" xmlns:p="http://schemas.openxmlformats.org/presentationml/2006/main">
+  <p:cSld name="Slide 8">
+    <p:spTree>
+      <p:nvGrpSpPr>
+        <p:cNvPr id="1" name=""/>
+        <p:cNvGrpSpPr/>
+        <p:nvPr/>
+      </p:nvGrpSpPr>
+      <p:grpSpPr>
+        <a:xfrm>
+          <a:off x="0" y="0"/>
+          <a:ext cx="0" cy="0"/>
+          <a:chOff x="0" y="0"/>
+          <a:chExt cx="0" cy="0"/>
+        </a:xfrm>
+      </p:grpSpPr>
+      <p:sp>
+        <p:nvSpPr>
+          <p:cNvPr id="2" name="Text 0"/>
+          <p:cNvSpPr/>
+          <p:nvPr/>
+        </p:nvSpPr>
+        <p:spPr>
+          <a:xfrm>
+            <a:off x="640080" y="274320"/>
+            <a:ext cx="10881360" cy="384048"/>
+          </a:xfrm>
+          <a:prstGeom prst="rect">
+            <a:avLst/>
+          </a:prstGeom>
+          <a:noFill/>
+          <a:ln/>
+        </p:spPr>
+        <p:txBody>
+          <a:bodyPr wrap="square" lIns="0" tIns="0" rIns="0" bIns="0" rtlCol="0" anchor="ctr"/>
+          <a:lstStyle/>
+          <a:p>
+            <a:pPr marL="0" indent="0" algn="ctr">
+              <a:buNone/>
+            </a:pPr>
+            <a:r>
+              <a:rPr lang="en-US" sz="2500" b="1" dirty="0">
+                <a:solidFill>
+                  <a:srgbClr val="23488B"/>
+                </a:solidFill>
+                <a:latin typeface="Arial" pitchFamily="34" charset="0"/>
+                <a:ea typeface="Arial" pitchFamily="34" charset="-122"/>
+                <a:cs typeface="Arial" pitchFamily="34" charset="-120"/>
+              </a:rPr>
+              <a:t>Evaluation Against the Original Objectives</a:t>
+            </a:r>
+            <a:endParaRPr lang="en-US" sz="2500" dirty="0"/>
+          </a:p>
+        </p:txBody>
+      </p:sp>
+      <p:sp>
+        <p:nvSpPr>
+          <p:cNvPr id="3" name="Text 1"/>
+          <p:cNvSpPr/>
+          <p:nvPr/>
+        </p:nvSpPr>
+        <p:spPr>
+          <a:xfrm>
+            <a:off x="903028" y="630936"/>
+            <a:ext cx="10149840" cy="219456"/>
+          </a:xfrm>
+          <a:prstGeom prst="rect">
+            <a:avLst/>
+          </a:prstGeom>
+          <a:noFill/>
+          <a:ln/>
+        </p:spPr>
+        <p:txBody>
+          <a:bodyPr wrap="square" lIns="0" tIns="0" rIns="0" bIns="0" rtlCol="0" anchor="ctr"/>
+          <a:lstStyle/>
+          <a:p>
+            <a:pPr marL="0" indent="0" algn="ctr">
+              <a:buNone/>
+            </a:pPr>
+            <a:r>
+              <a:rPr lang="en-US" sz="1050" i="1" dirty="0">
+                <a:solidFill>
+                  <a:srgbClr val="667A99"/>
+                </a:solidFill>
+                <a:latin typeface="Arial" pitchFamily="34" charset="0"/>
+                <a:ea typeface="Arial" pitchFamily="34" charset="-122"/>
+                <a:cs typeface="Arial" pitchFamily="34" charset="-120"/>
+              </a:rPr>
+              <a:t>Most core goals were achieved; full-scale user evaluation remains future work</a:t>
+            </a:r>
+            <a:endParaRPr lang="en-US" sz="1050" dirty="0"/>
+          </a:p>
+        </p:txBody>
+      </p:sp>
+      <p:sp>
+        <p:nvSpPr>
+          <p:cNvPr id="4" name="Shape 2"/>
+          <p:cNvSpPr/>
+          <p:nvPr/>
+        </p:nvSpPr>
+        <p:spPr>
+          <a:xfrm>
+            <a:off x="658368" y="1152144"/>
+            <a:ext cx="6629400" cy="4736592"/>
+          </a:xfrm>
+          <a:prstGeom prst="roundRect">
+            <a:avLst>
+              <a:gd name="adj" fmla="val 1544"/>
+            </a:avLst>
+          </a:prstGeom>
+          <a:solidFill>
+            <a:srgbClr val="F9FBFE"/>
+          </a:solidFill>
+          <a:ln w="13970">
+            <a:solidFill>
+              <a:srgbClr val="C8D9EA"/>
+            </a:solidFill>
+            <a:prstDash val="solid"/>
+          </a:ln>
+          <a:effectLst>
+            <a:outerShdw blurRad="15240" dist="12700" dir="2700000" algn="bl" rotWithShape="0">
+              <a:srgbClr val="000000">
+                <a:alpha val="12000"/>
+              </a:srgbClr>
+            </a:outerShdw>
+          </a:effectLst>
+        </p:spPr>
+      </p:sp>
+      <p:sp>
+        <p:nvSpPr>
+          <p:cNvPr id="5" name="Shape 3"/>
+          <p:cNvSpPr/>
+          <p:nvPr/>
+        </p:nvSpPr>
+        <p:spPr>
+          <a:xfrm>
+            <a:off x="877824" y="969264"/>
+            <a:ext cx="2359152" cy="310896"/>
+          </a:xfrm>
+          <a:prstGeom prst="roundRect">
+            <a:avLst>
+              <a:gd name="adj" fmla="val 35294"/>
+            </a:avLst>
+          </a:prstGeom>
+          <a:solidFill>
+            <a:srgbClr val="DFF5F8"/>
+          </a:solidFill>
+          <a:ln w="12700">
+            <a:solidFill>
+              <a:srgbClr val="DFF5F8"/>
+            </a:solidFill>
+            <a:prstDash val="solid"/>
+          </a:ln>
+        </p:spPr>
+      </p:sp>
+      <p:sp>
+        <p:nvSpPr>
+          <p:cNvPr id="6" name="Text 4"/>
+          <p:cNvSpPr/>
+          <p:nvPr/>
+        </p:nvSpPr>
+        <p:spPr>
+          <a:xfrm>
+            <a:off x="877824" y="1005840"/>
+            <a:ext cx="2359152" cy="256032"/>
+          </a:xfrm>
+          <a:prstGeom prst="rect">
+            <a:avLst/>
+          </a:prstGeom>
+          <a:noFill/>
+          <a:ln/>
+        </p:spPr>
+        <p:txBody>
+          <a:bodyPr wrap="square" lIns="0" tIns="0" rIns="0" bIns="0" rtlCol="0" anchor="ctr"/>
+          <a:lstStyle/>
+          <a:p>
+            <a:pPr marL="0" indent="0" algn="ctr">
+              <a:buNone/>
+            </a:pPr>
+            <a:r>
+              <a:rPr lang="en-US" sz="1250" b="1" dirty="0">
+                <a:solidFill>
+                  <a:srgbClr val="1E3F7A"/>
+                </a:solidFill>
+                <a:latin typeface="Arial" pitchFamily="34" charset="0"/>
+                <a:ea typeface="Arial" pitchFamily="34" charset="-122"/>
+                <a:cs typeface="Arial" pitchFamily="34" charset="-120"/>
+              </a:rPr>
+              <a:t>Objective status</a:t>
+            </a:r>
+            <a:endParaRPr lang="en-US" sz="1250" dirty="0"/>
+          </a:p>
+        </p:txBody>
+      </p:sp>
+      <p:sp>
+        <p:nvSpPr>
+          <p:cNvPr id="7" name="Shape 5"/>
+          <p:cNvSpPr/>
+          <p:nvPr/>
+        </p:nvSpPr>
+        <p:spPr>
+          <a:xfrm>
+            <a:off x="896112" y="1444752"/>
+            <a:ext cx="5930996" cy="338328"/>
+          </a:xfrm>
+          <a:prstGeom prst="roundRect">
+            <a:avLst>
+              <a:gd name="adj" fmla="val 9524"/>
+            </a:avLst>
+          </a:prstGeom>
+          <a:solidFill>
+            <a:srgbClr val="FFFFFF"/>
+          </a:solidFill>
+          <a:ln w="10160">
+            <a:solidFill>
+              <a:srgbClr val="D7E3EE"/>
+            </a:solidFill>
+            <a:prstDash val="solid"/>
+          </a:ln>
+        </p:spPr>
+      </p:sp>
+      <p:sp>
+        <p:nvSpPr>
+          <p:cNvPr id="8" name="Text 6"/>
+          <p:cNvSpPr/>
+          <p:nvPr/>
+        </p:nvSpPr>
+        <p:spPr>
+          <a:xfrm>
+            <a:off x="1051560" y="1554480"/>
+            <a:ext cx="3520440" cy="128016"/>
+          </a:xfrm>
+          <a:prstGeom prst="rect">
+            <a:avLst/>
+          </a:prstGeom>
+          <a:noFill/>
+          <a:ln/>
+        </p:spPr>
+        <p:txBody>
+          <a:bodyPr wrap="square" lIns="0" tIns="0" rIns="0" bIns="0" rtlCol="0" anchor="ctr">
+            <a:normAutofit fontScale="77500" lnSpcReduction="20000"/>
+          </a:bodyPr>
+          <a:lstStyle/>
+          <a:p>
+            <a:pPr marL="0" indent="0">
+              <a:buNone/>
+            </a:pPr>
+            <a:r>
+              <a:rPr lang="en-US" sz="1260" dirty="0">
+                <a:solidFill>
+                  <a:srgbClr val="274673"/>
+                </a:solidFill>
+                <a:latin typeface="Arial" pitchFamily="34" charset="0"/>
+                <a:ea typeface="Arial" pitchFamily="34" charset="-122"/>
+                <a:cs typeface="Arial" pitchFamily="34" charset="-120"/>
+              </a:rPr>
+              <a:t>Requirements and learner needs analysis</a:t>
+            </a:r>
+            <a:endParaRPr lang="en-US" sz="1260" dirty="0"/>
+          </a:p>
+        </p:txBody>
+      </p:sp>
+      <p:sp>
+        <p:nvSpPr>
+          <p:cNvPr id="9" name="Shape 7"/>
+          <p:cNvSpPr/>
+          <p:nvPr/>
+        </p:nvSpPr>
+        <p:spPr>
+          <a:xfrm>
+            <a:off x="5732051" y="1495044"/>
+            <a:ext cx="983845" cy="256032"/>
+          </a:xfrm>
+          <a:prstGeom prst="roundRect">
+            <a:avLst>
+              <a:gd name="adj" fmla="val 14286"/>
+            </a:avLst>
+          </a:prstGeom>
+          <a:solidFill>
+            <a:srgbClr val="F1FAE8"/>
+          </a:solidFill>
+          <a:ln w="10160">
+            <a:solidFill>
+              <a:srgbClr val="A5D28A"/>
+            </a:solidFill>
+            <a:prstDash val="solid"/>
+          </a:ln>
+        </p:spPr>
+      </p:sp>
+      <p:sp>
+        <p:nvSpPr>
+          <p:cNvPr id="10" name="Text 8"/>
+          <p:cNvSpPr/>
+          <p:nvPr/>
+        </p:nvSpPr>
+        <p:spPr>
+          <a:xfrm>
+            <a:off x="5814101" y="1559052"/>
+            <a:ext cx="128016" cy="91440"/>
+          </a:xfrm>
+          <a:prstGeom prst="rect">
+            <a:avLst/>
+          </a:prstGeom>
+          <a:noFill/>
+          <a:ln/>
+        </p:spPr>
+        <p:txBody>
+          <a:bodyPr wrap="square" lIns="0" tIns="0" rIns="0" bIns="0" rtlCol="0" anchor="ctr"/>
+          <a:lstStyle/>
+          <a:p>
+            <a:pPr marL="0" indent="0" algn="ctr">
+              <a:buNone/>
+            </a:pPr>
+            <a:r>
+              <a:rPr lang="en-US" sz="1250" b="1" dirty="0">
+                <a:solidFill>
+                  <a:srgbClr val="4E9833"/>
+                </a:solidFill>
+                <a:latin typeface="Arial" pitchFamily="34" charset="0"/>
+                <a:ea typeface="Arial" pitchFamily="34" charset="-122"/>
+                <a:cs typeface="Arial" pitchFamily="34" charset="-120"/>
+              </a:rPr>
+              <a:t>✓</a:t>
+            </a:r>
+            <a:endParaRPr lang="en-US" sz="1250" dirty="0"/>
+          </a:p>
+        </p:txBody>
+      </p:sp>
+      <p:sp>
+        <p:nvSpPr>
+          <p:cNvPr id="11" name="Text 9"/>
+          <p:cNvSpPr/>
+          <p:nvPr/>
+        </p:nvSpPr>
+        <p:spPr>
+          <a:xfrm>
+            <a:off x="5942117" y="1549908"/>
+            <a:ext cx="616108" cy="146304"/>
+          </a:xfrm>
+          <a:prstGeom prst="rect">
+            <a:avLst/>
+          </a:prstGeom>
+          <a:noFill/>
+          <a:ln/>
+        </p:spPr>
+        <p:txBody>
+          <a:bodyPr wrap="square" lIns="0" tIns="0" rIns="0" bIns="0" rtlCol="0" anchor="ctr">
+            <a:normAutofit fontScale="92500" lnSpcReduction="10000"/>
+          </a:bodyPr>
+          <a:lstStyle/>
+          <a:p>
+            <a:pPr marL="0" indent="0" algn="l">
+              <a:buNone/>
+            </a:pPr>
+            <a:r>
+              <a:rPr lang="en-US" sz="1080" b="1" dirty="0">
+                <a:solidFill>
+                  <a:srgbClr val="4E9833"/>
+                </a:solidFill>
+                <a:latin typeface="Arial" pitchFamily="34" charset="0"/>
+                <a:ea typeface="Arial" pitchFamily="34" charset="-122"/>
+                <a:cs typeface="Arial" pitchFamily="34" charset="-120"/>
+              </a:rPr>
+              <a:t>Achieved</a:t>
+            </a:r>
+            <a:endParaRPr lang="en-US" sz="1080" dirty="0"/>
+          </a:p>
+        </p:txBody>
+      </p:sp>
+      <p:sp>
+        <p:nvSpPr>
+          <p:cNvPr id="12" name="Shape 10"/>
+          <p:cNvSpPr/>
+          <p:nvPr/>
+        </p:nvSpPr>
+        <p:spPr>
+          <a:xfrm>
+            <a:off x="896111" y="2039112"/>
+            <a:ext cx="5930995" cy="338328"/>
+          </a:xfrm>
+          <a:prstGeom prst="roundRect">
+            <a:avLst>
+              <a:gd name="adj" fmla="val 9524"/>
+            </a:avLst>
+          </a:prstGeom>
+          <a:solidFill>
+            <a:srgbClr val="F4F8FC"/>
+          </a:solidFill>
+          <a:ln w="10160">
+            <a:solidFill>
+              <a:srgbClr val="D7E3EE"/>
+            </a:solidFill>
+            <a:prstDash val="solid"/>
+          </a:ln>
+        </p:spPr>
+      </p:sp>
+      <p:sp>
+        <p:nvSpPr>
+          <p:cNvPr id="13" name="Text 11"/>
+          <p:cNvSpPr/>
+          <p:nvPr/>
+        </p:nvSpPr>
+        <p:spPr>
+          <a:xfrm>
+            <a:off x="1051560" y="2148840"/>
+            <a:ext cx="3520440" cy="128016"/>
+          </a:xfrm>
+          <a:prstGeom prst="rect">
+            <a:avLst/>
+          </a:prstGeom>
+          <a:noFill/>
+          <a:ln/>
+        </p:spPr>
+        <p:txBody>
+          <a:bodyPr wrap="square" lIns="0" tIns="0" rIns="0" bIns="0" rtlCol="0" anchor="ctr">
+            <a:normAutofit fontScale="77500" lnSpcReduction="20000"/>
+          </a:bodyPr>
+          <a:lstStyle/>
+          <a:p>
+            <a:pPr marL="0" indent="0">
+              <a:buNone/>
+            </a:pPr>
+            <a:r>
+              <a:rPr lang="en-US" sz="1260" dirty="0">
+                <a:solidFill>
+                  <a:srgbClr val="274673"/>
+                </a:solidFill>
+                <a:latin typeface="Arial" pitchFamily="34" charset="0"/>
+                <a:ea typeface="Arial" pitchFamily="34" charset="-122"/>
+                <a:cs typeface="Arial" pitchFamily="34" charset="-120"/>
+              </a:rPr>
+              <a:t>Modular native Android architecture</a:t>
+            </a:r>
+            <a:endParaRPr lang="en-US" sz="1260" dirty="0"/>
+          </a:p>
+        </p:txBody>
+      </p:sp>
+      <p:sp>
+        <p:nvSpPr>
+          <p:cNvPr id="17" name="Shape 15"/>
+          <p:cNvSpPr/>
+          <p:nvPr/>
+        </p:nvSpPr>
+        <p:spPr>
+          <a:xfrm>
+            <a:off x="896112" y="2633472"/>
+            <a:ext cx="5930994" cy="338328"/>
+          </a:xfrm>
+          <a:prstGeom prst="roundRect">
+            <a:avLst>
+              <a:gd name="adj" fmla="val 9524"/>
+            </a:avLst>
+          </a:prstGeom>
+          <a:solidFill>
+            <a:srgbClr val="FFFFFF"/>
+          </a:solidFill>
+          <a:ln w="10160">
+            <a:solidFill>
+              <a:srgbClr val="D7E3EE"/>
+            </a:solidFill>
+            <a:prstDash val="solid"/>
+          </a:ln>
+        </p:spPr>
+      </p:sp>
+      <p:sp>
+        <p:nvSpPr>
+          <p:cNvPr id="18" name="Text 16"/>
+          <p:cNvSpPr/>
+          <p:nvPr/>
+        </p:nvSpPr>
+        <p:spPr>
+          <a:xfrm>
+            <a:off x="1051560" y="2743200"/>
+            <a:ext cx="3520440" cy="128016"/>
+          </a:xfrm>
+          <a:prstGeom prst="rect">
+            <a:avLst/>
+          </a:prstGeom>
+          <a:noFill/>
+          <a:ln/>
+        </p:spPr>
+        <p:txBody>
+          <a:bodyPr wrap="square" lIns="0" tIns="0" rIns="0" bIns="0" rtlCol="0" anchor="ctr">
+            <a:normAutofit fontScale="77500" lnSpcReduction="20000"/>
+          </a:bodyPr>
+          <a:lstStyle/>
+          <a:p>
+            <a:pPr marL="0" indent="0">
+              <a:buNone/>
+            </a:pPr>
+            <a:r>
+              <a:rPr lang="en-US" sz="1260" dirty="0">
+                <a:solidFill>
+                  <a:srgbClr val="274673"/>
+                </a:solidFill>
+                <a:latin typeface="Arial" pitchFamily="34" charset="0"/>
+                <a:ea typeface="Arial" pitchFamily="34" charset="-122"/>
+                <a:cs typeface="Arial" pitchFamily="34" charset="-120"/>
+              </a:rPr>
+              <a:t>Three educational mini-games</a:t>
+            </a:r>
+            <a:endParaRPr lang="en-US" sz="1260" dirty="0"/>
+          </a:p>
+        </p:txBody>
+      </p:sp>
+      <p:sp>
+        <p:nvSpPr>
+          <p:cNvPr id="20" name="Text 18"/>
+          <p:cNvSpPr/>
+          <p:nvPr/>
+        </p:nvSpPr>
+        <p:spPr>
+          <a:xfrm>
+            <a:off x="4754880" y="2720340"/>
+            <a:ext cx="128016" cy="91440"/>
+          </a:xfrm>
+          <a:prstGeom prst="rect">
+            <a:avLst/>
+          </a:prstGeom>
+          <a:noFill/>
+          <a:ln/>
+        </p:spPr>
+        <p:txBody>
+          <a:bodyPr wrap="square" lIns="0" tIns="0" rIns="0" bIns="0" rtlCol="0" anchor="ctr"/>
+          <a:lstStyle/>
+          <a:p>
+            <a:pPr marL="0" indent="0" algn="ctr">
+              <a:buNone/>
+            </a:pPr>
+            <a:endParaRPr lang="en-US" sz="1250" dirty="0"/>
+          </a:p>
+        </p:txBody>
+      </p:sp>
+      <p:sp>
+        <p:nvSpPr>
+          <p:cNvPr id="22" name="Shape 20"/>
+          <p:cNvSpPr/>
+          <p:nvPr/>
+        </p:nvSpPr>
+        <p:spPr>
+          <a:xfrm>
+            <a:off x="896111" y="3227832"/>
+            <a:ext cx="5930993" cy="329184"/>
+          </a:xfrm>
+          <a:prstGeom prst="roundRect">
+            <a:avLst>
+              <a:gd name="adj" fmla="val 9524"/>
+            </a:avLst>
+          </a:prstGeom>
+          <a:solidFill>
+            <a:srgbClr val="F4F8FC"/>
+          </a:solidFill>
+          <a:ln w="10160">
+            <a:solidFill>
+              <a:srgbClr val="D7E3EE"/>
+            </a:solidFill>
+            <a:prstDash val="solid"/>
+          </a:ln>
+        </p:spPr>
+      </p:sp>
+      <p:sp>
+        <p:nvSpPr>
+          <p:cNvPr id="23" name="Text 21"/>
+          <p:cNvSpPr/>
+          <p:nvPr/>
+        </p:nvSpPr>
+        <p:spPr>
+          <a:xfrm>
+            <a:off x="1051560" y="3337560"/>
+            <a:ext cx="3520440" cy="128016"/>
+          </a:xfrm>
+          <a:prstGeom prst="rect">
+            <a:avLst/>
+          </a:prstGeom>
+          <a:noFill/>
+          <a:ln/>
+        </p:spPr>
+        <p:txBody>
+          <a:bodyPr wrap="square" lIns="0" tIns="0" rIns="0" bIns="0" rtlCol="0" anchor="ctr">
+            <a:normAutofit fontScale="77500" lnSpcReduction="20000"/>
+          </a:bodyPr>
+          <a:lstStyle/>
+          <a:p>
+            <a:pPr marL="0" indent="0">
+              <a:buNone/>
+            </a:pPr>
+            <a:r>
+              <a:rPr lang="en-US" sz="1260" dirty="0">
+                <a:solidFill>
+                  <a:srgbClr val="274673"/>
+                </a:solidFill>
+                <a:latin typeface="Arial" pitchFamily="34" charset="0"/>
+                <a:ea typeface="Arial" pitchFamily="34" charset="-122"/>
+                <a:cs typeface="Arial" pitchFamily="34" charset="-120"/>
+              </a:rPr>
+              <a:t>SQLite + JSON-backed content pipeline</a:t>
+            </a:r>
+            <a:endParaRPr lang="en-US" sz="1260" dirty="0"/>
+          </a:p>
+        </p:txBody>
+      </p:sp>
+      <p:sp>
+        <p:nvSpPr>
+          <p:cNvPr id="27" name="Shape 25"/>
+          <p:cNvSpPr/>
+          <p:nvPr/>
+        </p:nvSpPr>
+        <p:spPr>
+          <a:xfrm>
+            <a:off x="896112" y="3822192"/>
+            <a:ext cx="5930992" cy="393192"/>
+          </a:xfrm>
+          <a:prstGeom prst="roundRect">
+            <a:avLst>
+              <a:gd name="adj" fmla="val 9524"/>
+            </a:avLst>
+          </a:prstGeom>
+          <a:solidFill>
+            <a:srgbClr val="FFFFFF"/>
+          </a:solidFill>
+          <a:ln w="10160">
+            <a:solidFill>
+              <a:srgbClr val="D7E3EE"/>
+            </a:solidFill>
+            <a:prstDash val="solid"/>
+          </a:ln>
+        </p:spPr>
+      </p:sp>
+      <p:sp>
+        <p:nvSpPr>
+          <p:cNvPr id="28" name="Text 26"/>
+          <p:cNvSpPr/>
+          <p:nvPr/>
+        </p:nvSpPr>
+        <p:spPr>
+          <a:xfrm>
+            <a:off x="1051560" y="3931920"/>
+            <a:ext cx="3520440" cy="128016"/>
+          </a:xfrm>
+          <a:prstGeom prst="rect">
+            <a:avLst/>
+          </a:prstGeom>
+          <a:noFill/>
+          <a:ln/>
+        </p:spPr>
+        <p:txBody>
+          <a:bodyPr wrap="square" lIns="0" tIns="0" rIns="0" bIns="0" rtlCol="0" anchor="ctr">
+            <a:normAutofit fontScale="77500" lnSpcReduction="20000"/>
+          </a:bodyPr>
+          <a:lstStyle/>
+          <a:p>
+            <a:pPr marL="0" indent="0">
+              <a:buNone/>
+            </a:pPr>
+            <a:r>
+              <a:rPr lang="en-US" sz="1260" dirty="0">
+                <a:solidFill>
+                  <a:srgbClr val="274673"/>
+                </a:solidFill>
+                <a:latin typeface="Arial" pitchFamily="34" charset="0"/>
+                <a:ea typeface="Arial" pitchFamily="34" charset="-122"/>
+                <a:cs typeface="Arial" pitchFamily="34" charset="-120"/>
+              </a:rPr>
+              <a:t>Progress tracking and achievements</a:t>
+            </a:r>
+            <a:endParaRPr lang="en-US" sz="1260" dirty="0"/>
+          </a:p>
+        </p:txBody>
+      </p:sp>
+      <p:sp>
+        <p:nvSpPr>
+          <p:cNvPr id="30" name="Text 28"/>
+          <p:cNvSpPr/>
+          <p:nvPr/>
+        </p:nvSpPr>
+        <p:spPr>
+          <a:xfrm>
+            <a:off x="4754880" y="3909060"/>
+            <a:ext cx="128016" cy="91440"/>
+          </a:xfrm>
+          <a:prstGeom prst="rect">
+            <a:avLst/>
+          </a:prstGeom>
+          <a:noFill/>
+          <a:ln/>
+        </p:spPr>
+        <p:txBody>
+          <a:bodyPr wrap="square" lIns="0" tIns="0" rIns="0" bIns="0" rtlCol="0" anchor="ctr"/>
+          <a:lstStyle/>
+          <a:p>
+            <a:pPr marL="0" indent="0" algn="ctr">
+              <a:buNone/>
+            </a:pPr>
+            <a:endParaRPr lang="en-US" sz="1250" dirty="0"/>
+          </a:p>
+        </p:txBody>
+      </p:sp>
+      <p:sp>
+        <p:nvSpPr>
+          <p:cNvPr id="37" name="Shape 35"/>
+          <p:cNvSpPr/>
+          <p:nvPr/>
+        </p:nvSpPr>
+        <p:spPr>
+          <a:xfrm>
+            <a:off x="7479792" y="1152144"/>
+            <a:ext cx="4050792" cy="4736592"/>
+          </a:xfrm>
+          <a:prstGeom prst="roundRect">
+            <a:avLst>
+              <a:gd name="adj" fmla="val 1806"/>
+            </a:avLst>
+          </a:prstGeom>
+          <a:solidFill>
+            <a:srgbClr val="FFFFFF"/>
+          </a:solidFill>
+          <a:ln w="13970">
+            <a:solidFill>
+              <a:srgbClr val="C8D9EA"/>
+            </a:solidFill>
+            <a:prstDash val="solid"/>
+          </a:ln>
+          <a:effectLst>
+            <a:outerShdw blurRad="15240" dist="12700" dir="2700000" algn="bl" rotWithShape="0">
+              <a:srgbClr val="000000">
+                <a:alpha val="12000"/>
+              </a:srgbClr>
+            </a:outerShdw>
+          </a:effectLst>
+        </p:spPr>
+      </p:sp>
+      <p:sp>
+        <p:nvSpPr>
+          <p:cNvPr id="38" name="Shape 36"/>
+          <p:cNvSpPr/>
+          <p:nvPr/>
+        </p:nvSpPr>
+        <p:spPr>
+          <a:xfrm>
+            <a:off x="7717536" y="969264"/>
+            <a:ext cx="1737360" cy="310896"/>
+          </a:xfrm>
+          <a:prstGeom prst="roundRect">
+            <a:avLst>
+              <a:gd name="adj" fmla="val 35294"/>
+            </a:avLst>
+          </a:prstGeom>
+          <a:solidFill>
+            <a:srgbClr val="EAF0FF"/>
+          </a:solidFill>
+          <a:ln w="12700">
+            <a:solidFill>
+              <a:srgbClr val="EAF0FF"/>
+            </a:solidFill>
+            <a:prstDash val="solid"/>
+          </a:ln>
+        </p:spPr>
+      </p:sp>
+      <p:sp>
+        <p:nvSpPr>
+          <p:cNvPr id="39" name="Text 37"/>
+          <p:cNvSpPr/>
+          <p:nvPr/>
+        </p:nvSpPr>
+        <p:spPr>
+          <a:xfrm>
+            <a:off x="7717536" y="1005840"/>
+            <a:ext cx="1737360" cy="256032"/>
+          </a:xfrm>
+          <a:prstGeom prst="rect">
+            <a:avLst/>
+          </a:prstGeom>
+          <a:noFill/>
+          <a:ln/>
+        </p:spPr>
+        <p:txBody>
+          <a:bodyPr wrap="square" lIns="0" tIns="0" rIns="0" bIns="0" rtlCol="0" anchor="ctr"/>
+          <a:lstStyle/>
+          <a:p>
+            <a:pPr marL="0" indent="0" algn="ctr">
+              <a:buNone/>
+            </a:pPr>
+            <a:r>
+              <a:rPr lang="en-US" sz="1250" b="1" dirty="0">
+                <a:solidFill>
+                  <a:srgbClr val="1E3F7A"/>
+                </a:solidFill>
+                <a:latin typeface="Arial" pitchFamily="34" charset="0"/>
+                <a:ea typeface="Arial" pitchFamily="34" charset="-122"/>
+                <a:cs typeface="Arial" pitchFamily="34" charset="-120"/>
+              </a:rPr>
+              <a:t>Key takeaways</a:t>
+            </a:r>
+            <a:endParaRPr lang="en-US" sz="1250" dirty="0"/>
+          </a:p>
+        </p:txBody>
+      </p:sp>
+      <p:sp>
+        <p:nvSpPr>
+          <p:cNvPr id="40" name="Text 38"/>
+          <p:cNvSpPr/>
+          <p:nvPr/>
+        </p:nvSpPr>
+        <p:spPr>
+          <a:xfrm>
+            <a:off x="7735824" y="1481328"/>
+            <a:ext cx="3401568" cy="2011680"/>
+          </a:xfrm>
+          <a:prstGeom prst="rect">
+            <a:avLst/>
+          </a:prstGeom>
+          <a:noFill/>
+          <a:ln/>
+        </p:spPr>
+        <p:txBody>
+          <a:bodyPr wrap="square" lIns="254" tIns="254" rIns="254" bIns="254" rtlCol="0" anchor="t">
+            <a:normAutofit fontScale="85000" lnSpcReduction="10000"/>
+          </a:bodyPr>
+          <a:lstStyle/>
+          <a:p>
+            <a:pPr marL="0" indent="0">
+              <a:buNone/>
+            </a:pPr>
+            <a:r>
+              <a:rPr lang="en-US" sz="1480" dirty="0">
+                <a:solidFill>
+                  <a:srgbClr val="274673"/>
+                </a:solidFill>
+                <a:latin typeface="Arial" pitchFamily="34" charset="0"/>
+                <a:ea typeface="Arial" pitchFamily="34" charset="-122"/>
+                <a:cs typeface="Arial" pitchFamily="34" charset="-120"/>
+              </a:rPr>
+              <a:t>• CatLingo already supports a coherent learning workflow: login, game selection, interactive practice, and progress review.</a:t>
+            </a:r>
+            <a:endParaRPr lang="en-US" sz="1480" dirty="0"/>
+          </a:p>
+          <a:p>
+            <a:pPr marL="0" indent="0">
+              <a:buNone/>
+            </a:pPr>
+            <a:endParaRPr lang="en-US" sz="1480" dirty="0"/>
+          </a:p>
+          <a:p>
+            <a:pPr marL="0" indent="0">
+              <a:buNone/>
+            </a:pPr>
+            <a:r>
+              <a:rPr lang="en-US" sz="1480" dirty="0">
+                <a:solidFill>
+                  <a:srgbClr val="274673"/>
+                </a:solidFill>
+                <a:latin typeface="Arial" pitchFamily="34" charset="0"/>
+                <a:ea typeface="Arial" pitchFamily="34" charset="-122"/>
+                <a:cs typeface="Arial" pitchFamily="34" charset="-120"/>
+              </a:rPr>
+              <a:t>• The prototype is strongest in integrated structure, local persistence, and the technically grounded speaking workflow.</a:t>
+            </a:r>
+            <a:endParaRPr lang="en-US" sz="1480" dirty="0"/>
+          </a:p>
+          <a:p>
+            <a:pPr marL="0" indent="0">
+              <a:buNone/>
+            </a:pPr>
+            <a:endParaRPr lang="en-US" sz="1480" dirty="0"/>
+          </a:p>
+          <a:p>
+            <a:pPr marL="0" indent="0">
+              <a:buNone/>
+            </a:pPr>
+            <a:r>
+              <a:rPr lang="en-US" sz="1480" dirty="0">
+                <a:solidFill>
+                  <a:srgbClr val="274673"/>
+                </a:solidFill>
+                <a:latin typeface="Arial" pitchFamily="34" charset="0"/>
+                <a:ea typeface="Arial" pitchFamily="34" charset="-122"/>
+                <a:cs typeface="Arial" pitchFamily="34" charset="-120"/>
+              </a:rPr>
+              <a:t>• The current project demonstrates feasibility and internal coherence more strongly than long-term pedagogical impact at scale.</a:t>
+            </a:r>
+            <a:endParaRPr lang="en-US" sz="1480" dirty="0"/>
+          </a:p>
+        </p:txBody>
+      </p:sp>
+      <p:pic>
+        <p:nvPicPr>
+          <p:cNvPr id="43" name="Image 1" descr="/mnt/data/work/template_media/image2.jpg"/>
+          <p:cNvPicPr>
+            <a:picLocks noChangeAspect="1"/>
+          </p:cNvPicPr>
+          <p:nvPr/>
+        </p:nvPicPr>
+        <p:blipFill>
+          <a:blip r:embed="rId3"/>
+          <a:srcRect t="44800" b="44800"/>
+          <a:stretch/>
+        </p:blipFill>
+        <p:spPr>
+          <a:xfrm>
+            <a:off x="0" y="6144768"/>
+            <a:ext cx="12191695" cy="713232"/>
+          </a:xfrm>
+          <a:prstGeom prst="rect">
+            <a:avLst/>
+          </a:prstGeom>
+        </p:spPr>
+      </p:pic>
+      <p:pic>
+        <p:nvPicPr>
+          <p:cNvPr id="44" name="Image 2" descr="/mnt/data/work/qm_logo_transparent.png"/>
+          <p:cNvPicPr>
+            <a:picLocks noChangeAspect="1"/>
+          </p:cNvPicPr>
+          <p:nvPr/>
+        </p:nvPicPr>
+        <p:blipFill>
+          <a:blip r:embed="rId4"/>
+          <a:stretch>
+            <a:fillRect/>
+          </a:stretch>
+        </p:blipFill>
+        <p:spPr>
+          <a:xfrm>
+            <a:off x="580644" y="6236208"/>
+            <a:ext cx="1389888" cy="438912"/>
+          </a:xfrm>
+          <a:prstGeom prst="rect">
+            <a:avLst/>
+          </a:prstGeom>
+        </p:spPr>
+      </p:pic>
+      <p:sp>
+        <p:nvSpPr>
+          <p:cNvPr id="45" name="Text 40"/>
+          <p:cNvSpPr/>
+          <p:nvPr/>
+        </p:nvSpPr>
+        <p:spPr>
+          <a:xfrm>
+            <a:off x="11688775" y="6309360"/>
+            <a:ext cx="228600" cy="201168"/>
+          </a:xfrm>
+          <a:prstGeom prst="rect">
+            <a:avLst/>
+          </a:prstGeom>
+          <a:noFill/>
+          <a:ln/>
+        </p:spPr>
+        <p:txBody>
+          <a:bodyPr wrap="square" lIns="0" tIns="0" rIns="0" bIns="0" rtlCol="0" anchor="ctr"/>
+          <a:lstStyle/>
+          <a:p>
+            <a:pPr marL="0" indent="0" algn="r">
+              <a:buNone/>
+            </a:pPr>
+            <a:r>
+              <a:rPr lang="en-US" sz="1100" dirty="0">
+                <a:solidFill>
+                  <a:srgbClr val="FFFFFF"/>
+                </a:solidFill>
+                <a:latin typeface="Arial" pitchFamily="34" charset="0"/>
+                <a:cs typeface="Arial" pitchFamily="34" charset="-120"/>
+              </a:rPr>
+              <a:t>10</a:t>
+            </a:r>
+            <a:endParaRPr lang="en-US" sz="1100" dirty="0"/>
+          </a:p>
+        </p:txBody>
+      </p:sp>
+      <p:sp>
+        <p:nvSpPr>
+          <p:cNvPr id="49" name="Shape 7">
+            <a:extLst>
+              <a:ext uri="{FF2B5EF4-FFF2-40B4-BE49-F238E27FC236}">
+                <a16:creationId xmlns:a16="http://schemas.microsoft.com/office/drawing/2014/main" id="{6AD7434B-0B79-4281-8FD7-1DAC41484853}"/>
+              </a:ext>
+            </a:extLst>
+          </p:cNvPr>
+          <p:cNvSpPr/>
+          <p:nvPr/>
+        </p:nvSpPr>
+        <p:spPr>
+          <a:xfrm>
+            <a:off x="5732050" y="2084832"/>
+            <a:ext cx="983845" cy="256032"/>
+          </a:xfrm>
+          <a:prstGeom prst="roundRect">
+            <a:avLst>
+              <a:gd name="adj" fmla="val 14286"/>
+            </a:avLst>
+          </a:prstGeom>
+          <a:solidFill>
+            <a:srgbClr val="F1FAE8"/>
+          </a:solidFill>
+          <a:ln w="10160">
+            <a:solidFill>
+              <a:srgbClr val="A5D28A"/>
+            </a:solidFill>
+            <a:prstDash val="solid"/>
+          </a:ln>
+        </p:spPr>
+      </p:sp>
+      <p:sp>
+        <p:nvSpPr>
+          <p:cNvPr id="50" name="Text 8">
+            <a:extLst>
+              <a:ext uri="{FF2B5EF4-FFF2-40B4-BE49-F238E27FC236}">
+                <a16:creationId xmlns:a16="http://schemas.microsoft.com/office/drawing/2014/main" id="{9C84D905-0EFB-4B3C-B312-DCAC4CBFB5AC}"/>
+              </a:ext>
+            </a:extLst>
+          </p:cNvPr>
+          <p:cNvSpPr/>
+          <p:nvPr/>
+        </p:nvSpPr>
+        <p:spPr>
+          <a:xfrm>
+            <a:off x="5810394" y="2167128"/>
+            <a:ext cx="128016" cy="91440"/>
+          </a:xfrm>
+          <a:prstGeom prst="rect">
+            <a:avLst/>
+          </a:prstGeom>
+          <a:noFill/>
+          <a:ln/>
+        </p:spPr>
+        <p:txBody>
+          <a:bodyPr wrap="square" lIns="0" tIns="0" rIns="0" bIns="0" rtlCol="0" anchor="ctr"/>
+          <a:lstStyle/>
+          <a:p>
+            <a:pPr marL="0" indent="0" algn="ctr">
+              <a:buNone/>
+            </a:pPr>
+            <a:r>
+              <a:rPr lang="en-US" sz="1250" b="1" dirty="0">
+                <a:solidFill>
+                  <a:srgbClr val="4E9833"/>
+                </a:solidFill>
+                <a:latin typeface="Arial" pitchFamily="34" charset="0"/>
+                <a:ea typeface="Arial" pitchFamily="34" charset="-122"/>
+                <a:cs typeface="Arial" pitchFamily="34" charset="-120"/>
+              </a:rPr>
+              <a:t>✓</a:t>
+            </a:r>
+            <a:endParaRPr lang="en-US" sz="1250" dirty="0"/>
+          </a:p>
+        </p:txBody>
+      </p:sp>
+      <p:sp>
+        <p:nvSpPr>
+          <p:cNvPr id="51" name="Text 9">
+            <a:extLst>
+              <a:ext uri="{FF2B5EF4-FFF2-40B4-BE49-F238E27FC236}">
+                <a16:creationId xmlns:a16="http://schemas.microsoft.com/office/drawing/2014/main" id="{88A33DD0-940F-4E7B-8CA7-5462A75D9FE4}"/>
+              </a:ext>
+            </a:extLst>
+          </p:cNvPr>
+          <p:cNvSpPr/>
+          <p:nvPr/>
+        </p:nvSpPr>
+        <p:spPr>
+          <a:xfrm>
+            <a:off x="5977948" y="2148840"/>
+            <a:ext cx="616108" cy="146304"/>
+          </a:xfrm>
+          <a:prstGeom prst="rect">
+            <a:avLst/>
+          </a:prstGeom>
+          <a:noFill/>
+          <a:ln/>
+        </p:spPr>
+        <p:txBody>
+          <a:bodyPr wrap="square" lIns="0" tIns="0" rIns="0" bIns="0" rtlCol="0" anchor="ctr">
+            <a:normAutofit fontScale="92500" lnSpcReduction="10000"/>
+          </a:bodyPr>
+          <a:lstStyle/>
+          <a:p>
+            <a:pPr marL="0" indent="0" algn="l">
+              <a:buNone/>
+            </a:pPr>
+            <a:r>
+              <a:rPr lang="en-US" sz="1080" b="1" dirty="0">
+                <a:solidFill>
+                  <a:srgbClr val="4E9833"/>
+                </a:solidFill>
+                <a:latin typeface="Arial" pitchFamily="34" charset="0"/>
+                <a:ea typeface="Arial" pitchFamily="34" charset="-122"/>
+                <a:cs typeface="Arial" pitchFamily="34" charset="-120"/>
+              </a:rPr>
+              <a:t>Achieved</a:t>
+            </a:r>
+            <a:endParaRPr lang="en-US" sz="1080" dirty="0"/>
+          </a:p>
+        </p:txBody>
+      </p:sp>
+      <p:sp>
+        <p:nvSpPr>
+          <p:cNvPr id="55" name="Shape 7">
+            <a:extLst>
+              <a:ext uri="{FF2B5EF4-FFF2-40B4-BE49-F238E27FC236}">
+                <a16:creationId xmlns:a16="http://schemas.microsoft.com/office/drawing/2014/main" id="{7A9A1F7B-C933-484C-B5A0-AB49E98D34A1}"/>
+              </a:ext>
+            </a:extLst>
+          </p:cNvPr>
+          <p:cNvSpPr/>
+          <p:nvPr/>
+        </p:nvSpPr>
+        <p:spPr>
+          <a:xfrm>
+            <a:off x="5732050" y="2670048"/>
+            <a:ext cx="983845" cy="256032"/>
+          </a:xfrm>
+          <a:prstGeom prst="roundRect">
+            <a:avLst>
+              <a:gd name="adj" fmla="val 14286"/>
+            </a:avLst>
+          </a:prstGeom>
+          <a:solidFill>
+            <a:srgbClr val="F1FAE8"/>
+          </a:solidFill>
+          <a:ln w="10160">
+            <a:solidFill>
+              <a:srgbClr val="A5D28A"/>
+            </a:solidFill>
+            <a:prstDash val="solid"/>
+          </a:ln>
+        </p:spPr>
+      </p:sp>
+      <p:sp>
+        <p:nvSpPr>
+          <p:cNvPr id="56" name="Text 8">
+            <a:extLst>
+              <a:ext uri="{FF2B5EF4-FFF2-40B4-BE49-F238E27FC236}">
+                <a16:creationId xmlns:a16="http://schemas.microsoft.com/office/drawing/2014/main" id="{26EF5722-5FE4-4930-A980-7DCA5022C212}"/>
+              </a:ext>
+            </a:extLst>
+          </p:cNvPr>
+          <p:cNvSpPr/>
+          <p:nvPr/>
+        </p:nvSpPr>
+        <p:spPr>
+          <a:xfrm>
+            <a:off x="5814100" y="2734056"/>
+            <a:ext cx="128016" cy="91440"/>
+          </a:xfrm>
+          <a:prstGeom prst="rect">
+            <a:avLst/>
+          </a:prstGeom>
+          <a:noFill/>
+          <a:ln/>
+        </p:spPr>
+        <p:txBody>
+          <a:bodyPr wrap="square" lIns="0" tIns="0" rIns="0" bIns="0" rtlCol="0" anchor="ctr"/>
+          <a:lstStyle/>
+          <a:p>
+            <a:pPr marL="0" indent="0" algn="ctr">
+              <a:buNone/>
+            </a:pPr>
+            <a:r>
+              <a:rPr lang="en-US" sz="1250" b="1" dirty="0">
+                <a:solidFill>
+                  <a:srgbClr val="4E9833"/>
+                </a:solidFill>
+                <a:latin typeface="Arial" pitchFamily="34" charset="0"/>
+                <a:ea typeface="Arial" pitchFamily="34" charset="-122"/>
+                <a:cs typeface="Arial" pitchFamily="34" charset="-120"/>
+              </a:rPr>
+              <a:t>✓</a:t>
+            </a:r>
+            <a:endParaRPr lang="en-US" sz="1250" dirty="0"/>
+          </a:p>
+        </p:txBody>
+      </p:sp>
+      <p:sp>
+        <p:nvSpPr>
+          <p:cNvPr id="57" name="Text 9">
+            <a:extLst>
+              <a:ext uri="{FF2B5EF4-FFF2-40B4-BE49-F238E27FC236}">
+                <a16:creationId xmlns:a16="http://schemas.microsoft.com/office/drawing/2014/main" id="{5F831E59-3E6F-4047-A21E-65585B700CE5}"/>
+              </a:ext>
+            </a:extLst>
+          </p:cNvPr>
+          <p:cNvSpPr/>
+          <p:nvPr/>
+        </p:nvSpPr>
+        <p:spPr>
+          <a:xfrm>
+            <a:off x="5942116" y="2724912"/>
+            <a:ext cx="616108" cy="146304"/>
+          </a:xfrm>
+          <a:prstGeom prst="rect">
+            <a:avLst/>
+          </a:prstGeom>
+          <a:noFill/>
+          <a:ln/>
+        </p:spPr>
+        <p:txBody>
+          <a:bodyPr wrap="square" lIns="0" tIns="0" rIns="0" bIns="0" rtlCol="0" anchor="ctr">
+            <a:normAutofit fontScale="92500" lnSpcReduction="10000"/>
+          </a:bodyPr>
+          <a:lstStyle/>
+          <a:p>
+            <a:pPr marL="0" indent="0" algn="l">
+              <a:buNone/>
+            </a:pPr>
+            <a:r>
+              <a:rPr lang="en-US" sz="1080" b="1" dirty="0">
+                <a:solidFill>
+                  <a:srgbClr val="4E9833"/>
+                </a:solidFill>
+                <a:latin typeface="Arial" pitchFamily="34" charset="0"/>
+                <a:ea typeface="Arial" pitchFamily="34" charset="-122"/>
+                <a:cs typeface="Arial" pitchFamily="34" charset="-120"/>
+              </a:rPr>
+              <a:t>Achieved</a:t>
+            </a:r>
+            <a:endParaRPr lang="en-US" sz="1080" dirty="0"/>
+          </a:p>
+        </p:txBody>
+      </p:sp>
+      <p:sp>
+        <p:nvSpPr>
+          <p:cNvPr id="58" name="Shape 7">
+            <a:extLst>
+              <a:ext uri="{FF2B5EF4-FFF2-40B4-BE49-F238E27FC236}">
+                <a16:creationId xmlns:a16="http://schemas.microsoft.com/office/drawing/2014/main" id="{40F1DA16-688E-48C2-AFAA-2211E0B50371}"/>
+              </a:ext>
+            </a:extLst>
+          </p:cNvPr>
+          <p:cNvSpPr/>
+          <p:nvPr/>
+        </p:nvSpPr>
+        <p:spPr>
+          <a:xfrm>
+            <a:off x="5732051" y="3264408"/>
+            <a:ext cx="983845" cy="256032"/>
+          </a:xfrm>
+          <a:prstGeom prst="roundRect">
+            <a:avLst>
+              <a:gd name="adj" fmla="val 14286"/>
+            </a:avLst>
+          </a:prstGeom>
+          <a:solidFill>
+            <a:srgbClr val="F1FAE8"/>
+          </a:solidFill>
+          <a:ln w="10160">
+            <a:solidFill>
+              <a:srgbClr val="A5D28A"/>
+            </a:solidFill>
+            <a:prstDash val="solid"/>
+          </a:ln>
+        </p:spPr>
+      </p:sp>
+      <p:sp>
+        <p:nvSpPr>
+          <p:cNvPr id="59" name="Text 8">
+            <a:extLst>
+              <a:ext uri="{FF2B5EF4-FFF2-40B4-BE49-F238E27FC236}">
+                <a16:creationId xmlns:a16="http://schemas.microsoft.com/office/drawing/2014/main" id="{04E8894C-824C-4865-8834-C9B4D5B82148}"/>
+              </a:ext>
+            </a:extLst>
+          </p:cNvPr>
+          <p:cNvSpPr/>
+          <p:nvPr/>
+        </p:nvSpPr>
+        <p:spPr>
+          <a:xfrm>
+            <a:off x="5814101" y="3328416"/>
+            <a:ext cx="128016" cy="91440"/>
+          </a:xfrm>
+          <a:prstGeom prst="rect">
+            <a:avLst/>
+          </a:prstGeom>
+          <a:noFill/>
+          <a:ln/>
+        </p:spPr>
+        <p:txBody>
+          <a:bodyPr wrap="square" lIns="0" tIns="0" rIns="0" bIns="0" rtlCol="0" anchor="ctr"/>
+          <a:lstStyle/>
+          <a:p>
+            <a:pPr marL="0" indent="0" algn="ctr">
+              <a:buNone/>
+            </a:pPr>
+            <a:r>
+              <a:rPr lang="en-US" sz="1250" b="1" dirty="0">
+                <a:solidFill>
+                  <a:srgbClr val="4E9833"/>
+                </a:solidFill>
+                <a:latin typeface="Arial" pitchFamily="34" charset="0"/>
+                <a:ea typeface="Arial" pitchFamily="34" charset="-122"/>
+                <a:cs typeface="Arial" pitchFamily="34" charset="-120"/>
+              </a:rPr>
+              <a:t>✓</a:t>
+            </a:r>
+            <a:endParaRPr lang="en-US" sz="1250" dirty="0"/>
+          </a:p>
+        </p:txBody>
+      </p:sp>
+      <p:sp>
+        <p:nvSpPr>
+          <p:cNvPr id="60" name="Text 9">
+            <a:extLst>
+              <a:ext uri="{FF2B5EF4-FFF2-40B4-BE49-F238E27FC236}">
+                <a16:creationId xmlns:a16="http://schemas.microsoft.com/office/drawing/2014/main" id="{10043DEC-A239-48E6-B9B9-CDC5F218C5B6}"/>
+              </a:ext>
+            </a:extLst>
+          </p:cNvPr>
+          <p:cNvSpPr/>
+          <p:nvPr/>
+        </p:nvSpPr>
+        <p:spPr>
+          <a:xfrm>
+            <a:off x="5942117" y="3319272"/>
+            <a:ext cx="616108" cy="146304"/>
+          </a:xfrm>
+          <a:prstGeom prst="rect">
+            <a:avLst/>
+          </a:prstGeom>
+          <a:noFill/>
+          <a:ln/>
+        </p:spPr>
+        <p:txBody>
+          <a:bodyPr wrap="square" lIns="0" tIns="0" rIns="0" bIns="0" rtlCol="0" anchor="ctr">
+            <a:normAutofit fontScale="92500" lnSpcReduction="10000"/>
+          </a:bodyPr>
+          <a:lstStyle/>
+          <a:p>
+            <a:pPr marL="0" indent="0" algn="l">
+              <a:buNone/>
+            </a:pPr>
+            <a:r>
+              <a:rPr lang="en-US" sz="1080" b="1" dirty="0">
+                <a:solidFill>
+                  <a:srgbClr val="4E9833"/>
+                </a:solidFill>
+                <a:latin typeface="Arial" pitchFamily="34" charset="0"/>
+                <a:ea typeface="Arial" pitchFamily="34" charset="-122"/>
+                <a:cs typeface="Arial" pitchFamily="34" charset="-120"/>
+              </a:rPr>
+              <a:t>Achieved</a:t>
+            </a:r>
+            <a:endParaRPr lang="en-US" sz="1080" dirty="0"/>
+          </a:p>
+        </p:txBody>
+      </p:sp>
+      <p:sp>
+        <p:nvSpPr>
+          <p:cNvPr id="61" name="Shape 7">
+            <a:extLst>
+              <a:ext uri="{FF2B5EF4-FFF2-40B4-BE49-F238E27FC236}">
+                <a16:creationId xmlns:a16="http://schemas.microsoft.com/office/drawing/2014/main" id="{9712ADE1-8B1C-4751-B139-7B6FD36DF9F2}"/>
+              </a:ext>
+            </a:extLst>
+          </p:cNvPr>
+          <p:cNvSpPr/>
+          <p:nvPr/>
+        </p:nvSpPr>
+        <p:spPr>
+          <a:xfrm>
+            <a:off x="5732051" y="3904488"/>
+            <a:ext cx="983845" cy="256032"/>
+          </a:xfrm>
+          <a:prstGeom prst="roundRect">
+            <a:avLst>
+              <a:gd name="adj" fmla="val 14286"/>
+            </a:avLst>
+          </a:prstGeom>
+          <a:solidFill>
+            <a:srgbClr val="F1FAE8"/>
+          </a:solidFill>
+          <a:ln w="10160">
+            <a:solidFill>
+              <a:srgbClr val="A5D28A"/>
+            </a:solidFill>
+            <a:prstDash val="solid"/>
+          </a:ln>
+        </p:spPr>
+      </p:sp>
+      <p:sp>
+        <p:nvSpPr>
+          <p:cNvPr id="62" name="Text 8">
+            <a:extLst>
+              <a:ext uri="{FF2B5EF4-FFF2-40B4-BE49-F238E27FC236}">
+                <a16:creationId xmlns:a16="http://schemas.microsoft.com/office/drawing/2014/main" id="{DE115138-E8F9-4451-8D1E-67059277613D}"/>
+              </a:ext>
+            </a:extLst>
+          </p:cNvPr>
+          <p:cNvSpPr/>
+          <p:nvPr/>
+        </p:nvSpPr>
+        <p:spPr>
+          <a:xfrm>
+            <a:off x="5814101" y="3968496"/>
+            <a:ext cx="128016" cy="91440"/>
+          </a:xfrm>
+          <a:prstGeom prst="rect">
+            <a:avLst/>
+          </a:prstGeom>
+          <a:noFill/>
+          <a:ln/>
+        </p:spPr>
+        <p:txBody>
+          <a:bodyPr wrap="square" lIns="0" tIns="0" rIns="0" bIns="0" rtlCol="0" anchor="ctr"/>
+          <a:lstStyle/>
+          <a:p>
+            <a:pPr marL="0" indent="0" algn="ctr">
+              <a:buNone/>
+            </a:pPr>
+            <a:r>
+              <a:rPr lang="en-US" sz="1250" b="1" dirty="0">
+                <a:solidFill>
+                  <a:srgbClr val="4E9833"/>
+                </a:solidFill>
+                <a:latin typeface="Arial" pitchFamily="34" charset="0"/>
+                <a:ea typeface="Arial" pitchFamily="34" charset="-122"/>
+                <a:cs typeface="Arial" pitchFamily="34" charset="-120"/>
+              </a:rPr>
+              <a:t>✓</a:t>
+            </a:r>
+            <a:endParaRPr lang="en-US" sz="1250" dirty="0"/>
+          </a:p>
+        </p:txBody>
+      </p:sp>
+      <p:sp>
+        <p:nvSpPr>
+          <p:cNvPr id="63" name="Text 9">
+            <a:extLst>
+              <a:ext uri="{FF2B5EF4-FFF2-40B4-BE49-F238E27FC236}">
+                <a16:creationId xmlns:a16="http://schemas.microsoft.com/office/drawing/2014/main" id="{EA2186D5-08CC-445F-8EA3-FE46B188B946}"/>
+              </a:ext>
+            </a:extLst>
+          </p:cNvPr>
+          <p:cNvSpPr/>
+          <p:nvPr/>
+        </p:nvSpPr>
+        <p:spPr>
+          <a:xfrm>
+            <a:off x="5942117" y="3959352"/>
+            <a:ext cx="616108" cy="146304"/>
+          </a:xfrm>
+          <a:prstGeom prst="rect">
+            <a:avLst/>
+          </a:prstGeom>
+          <a:noFill/>
+          <a:ln/>
+        </p:spPr>
+        <p:txBody>
+          <a:bodyPr wrap="square" lIns="0" tIns="0" rIns="0" bIns="0" rtlCol="0" anchor="ctr">
+            <a:normAutofit fontScale="92500" lnSpcReduction="10000"/>
+          </a:bodyPr>
+          <a:lstStyle/>
+          <a:p>
+            <a:pPr marL="0" indent="0" algn="l">
+              <a:buNone/>
+            </a:pPr>
+            <a:r>
+              <a:rPr lang="en-US" sz="1080" b="1" dirty="0">
+                <a:solidFill>
+                  <a:srgbClr val="4E9833"/>
+                </a:solidFill>
+                <a:latin typeface="Arial" pitchFamily="34" charset="0"/>
+                <a:ea typeface="Arial" pitchFamily="34" charset="-122"/>
+                <a:cs typeface="Arial" pitchFamily="34" charset="-120"/>
+              </a:rPr>
+              <a:t>Achieved</a:t>
+            </a:r>
+            <a:endParaRPr lang="en-US" sz="1080" dirty="0"/>
+          </a:p>
+        </p:txBody>
+      </p:sp>
+      <p:pic>
+        <p:nvPicPr>
+          <p:cNvPr id="64" name="Picture 12" descr="8a7c0663-f7b2-4937-9eb5-b4aeb9d07c89_no_bg.png">
+            <a:extLst>
+              <a:ext uri="{FF2B5EF4-FFF2-40B4-BE49-F238E27FC236}">
+                <a16:creationId xmlns:a16="http://schemas.microsoft.com/office/drawing/2014/main" id="{13B75718-B9F8-4EBA-9B57-CC8EC6531DFF}"/>
+              </a:ext>
+            </a:extLst>
+          </p:cNvPr>
+          <p:cNvPicPr>
+            <a:picLocks noChangeAspect="1"/>
+          </p:cNvPicPr>
+          <p:nvPr/>
+        </p:nvPicPr>
+        <p:blipFill>
+          <a:blip r:embed="rId5">
+            <a:extLst>
+              <a:ext uri="{BEBA8EAE-BF5A-486C-A8C5-ECC9F3942E4B}">
+                <a14:imgProps xmlns:a14="http://schemas.microsoft.com/office/drawing/2010/main">
+                  <a14:imgLayer r:embed="rId6">
+                    <a14:imgEffect>
+                      <a14:backgroundRemoval t="9961" b="89941" l="9961" r="91211">
+                        <a14:foregroundMark x1="31055" y1="44043" x2="34180" y2="35938"/>
+                        <a14:foregroundMark x1="51465" y1="40918" x2="54590" y2="44629"/>
+                        <a14:foregroundMark x1="23633" y1="40918" x2="30371" y2="47168"/>
+                        <a14:foregroundMark x1="28516" y1="44043" x2="27344" y2="40332"/>
+                        <a14:foregroundMark x1="90527" y1="63184" x2="91211" y2="67578"/>
+                      </a14:backgroundRemoval>
+                    </a14:imgEffect>
+                  </a14:imgLayer>
+                </a14:imgProps>
+              </a:ext>
+            </a:extLst>
+          </a:blip>
+          <a:stretch>
+            <a:fillRect/>
+          </a:stretch>
+        </p:blipFill>
+        <p:spPr>
+          <a:xfrm>
+            <a:off x="10609783" y="5504688"/>
+            <a:ext cx="1143000" cy="1143000"/>
+          </a:xfrm>
+          <a:prstGeom prst="rect">
+            <a:avLst/>
+          </a:prstGeom>
+        </p:spPr>
+      </p:pic>
+    </p:spTree>
+  </p:cSld>
+  <p:clrMapOvr>
+    <a:masterClrMapping/>
+  </p:clrMapOvr>
+</p:sld>
+</file>
+
+<file path=ppt/slides/slide11.xml><?xml version="1.0" encoding="utf-8"?>
+<p:sld xmlns:a="http://schemas.openxmlformats.org/drawingml/2006/main" xmlns:r="http://schemas.openxmlformats.org/officeDocument/2006/relationships" xmlns:p="http://schemas.openxmlformats.org/presentationml/2006/main">
+  <p:cSld name="Slide 9">
+    <p:spTree>
+      <p:nvGrpSpPr>
+        <p:cNvPr id="1" name=""/>
+        <p:cNvGrpSpPr/>
+        <p:nvPr/>
+      </p:nvGrpSpPr>
+      <p:grpSpPr>
+        <a:xfrm>
+          <a:off x="0" y="0"/>
+          <a:ext cx="0" cy="0"/>
+          <a:chOff x="0" y="0"/>
+          <a:chExt cx="0" cy="0"/>
+        </a:xfrm>
+      </p:grpSpPr>
+      <p:sp>
+        <p:nvSpPr>
+          <p:cNvPr id="2" name="Text 0"/>
+          <p:cNvSpPr/>
+          <p:nvPr/>
+        </p:nvSpPr>
+        <p:spPr>
+          <a:xfrm>
+            <a:off x="640080" y="274320"/>
+            <a:ext cx="10881360" cy="384048"/>
+          </a:xfrm>
+          <a:prstGeom prst="rect">
+            <a:avLst/>
+          </a:prstGeom>
+          <a:noFill/>
+          <a:ln/>
+        </p:spPr>
+        <p:txBody>
+          <a:bodyPr wrap="square" lIns="0" tIns="0" rIns="0" bIns="0" rtlCol="0" anchor="ctr"/>
+          <a:lstStyle/>
+          <a:p>
+            <a:pPr marL="0" indent="0" algn="ctr">
+              <a:buNone/>
+            </a:pPr>
+            <a:r>
+              <a:rPr lang="en-US" sz="2500" b="1" dirty="0">
+                <a:solidFill>
+                  <a:srgbClr val="23488B"/>
+                </a:solidFill>
+                <a:latin typeface="Arial" pitchFamily="34" charset="0"/>
+                <a:ea typeface="Arial" pitchFamily="34" charset="-122"/>
+                <a:cs typeface="Arial" pitchFamily="34" charset="-120"/>
+              </a:rPr>
+              <a:t>Limitations and Future Work</a:t>
+            </a:r>
+            <a:endParaRPr lang="en-US" sz="2500" dirty="0"/>
+          </a:p>
+        </p:txBody>
+      </p:sp>
+      <p:sp>
+        <p:nvSpPr>
+          <p:cNvPr id="3" name="Text 1"/>
+          <p:cNvSpPr/>
+          <p:nvPr/>
+        </p:nvSpPr>
+        <p:spPr>
+          <a:xfrm>
+            <a:off x="1005840" y="694944"/>
+            <a:ext cx="10149840" cy="219456"/>
+          </a:xfrm>
+          <a:prstGeom prst="rect">
+            <a:avLst/>
+          </a:prstGeom>
+          <a:noFill/>
+          <a:ln/>
+        </p:spPr>
+        <p:txBody>
+          <a:bodyPr wrap="square" lIns="0" tIns="0" rIns="0" bIns="0" rtlCol="0" anchor="ctr"/>
+          <a:lstStyle/>
+          <a:p>
+            <a:pPr marL="0" indent="0" algn="ctr">
+              <a:buNone/>
+            </a:pPr>
+            <a:r>
+              <a:rPr lang="en-US" sz="1050" i="1" dirty="0">
+                <a:solidFill>
+                  <a:srgbClr val="667A99"/>
+                </a:solidFill>
+                <a:latin typeface="Arial" pitchFamily="34" charset="0"/>
+                <a:ea typeface="Arial" pitchFamily="34" charset="-122"/>
+                <a:cs typeface="Arial" pitchFamily="34" charset="-120"/>
+              </a:rPr>
+              <a:t>The prototype establishes a solid foundation, but not the final endpoint</a:t>
+            </a:r>
+            <a:endParaRPr lang="en-US" sz="1050" dirty="0"/>
+          </a:p>
+        </p:txBody>
+      </p:sp>
+      <p:sp>
+        <p:nvSpPr>
+          <p:cNvPr id="4" name="Shape 2"/>
+          <p:cNvSpPr/>
+          <p:nvPr/>
+        </p:nvSpPr>
+        <p:spPr>
+          <a:xfrm>
+            <a:off x="658368" y="1207008"/>
+            <a:ext cx="5413248" cy="4526280"/>
+          </a:xfrm>
+          <a:prstGeom prst="roundRect">
+            <a:avLst>
+              <a:gd name="adj" fmla="val 1616"/>
+            </a:avLst>
+          </a:prstGeom>
+          <a:solidFill>
+            <a:srgbClr val="FFF1F1"/>
+          </a:solidFill>
+          <a:ln w="13970">
+            <a:solidFill>
+              <a:srgbClr val="F1C1C1"/>
+            </a:solidFill>
+            <a:prstDash val="solid"/>
+          </a:ln>
+          <a:effectLst>
+            <a:outerShdw blurRad="15240" dist="12700" dir="2700000" algn="bl" rotWithShape="0">
+              <a:srgbClr val="000000">
+                <a:alpha val="12000"/>
+              </a:srgbClr>
+            </a:outerShdw>
+          </a:effectLst>
+        </p:spPr>
+      </p:sp>
+      <p:sp>
+        <p:nvSpPr>
+          <p:cNvPr id="5" name="Shape 3"/>
+          <p:cNvSpPr/>
+          <p:nvPr/>
+        </p:nvSpPr>
+        <p:spPr>
+          <a:xfrm>
+            <a:off x="6117336" y="1207008"/>
+            <a:ext cx="5413248" cy="4526280"/>
+          </a:xfrm>
+          <a:prstGeom prst="roundRect">
+            <a:avLst>
+              <a:gd name="adj" fmla="val 1616"/>
+            </a:avLst>
+          </a:prstGeom>
+          <a:solidFill>
+            <a:srgbClr val="F2FAEE"/>
+          </a:solidFill>
+          <a:ln w="13970">
+            <a:solidFill>
+              <a:srgbClr val="CFE3B9"/>
+            </a:solidFill>
+            <a:prstDash val="solid"/>
+          </a:ln>
+          <a:effectLst>
+            <a:outerShdw blurRad="15240" dist="12700" dir="2700000" algn="bl" rotWithShape="0">
+              <a:srgbClr val="000000">
+                <a:alpha val="12000"/>
+              </a:srgbClr>
+            </a:outerShdw>
+          </a:effectLst>
+        </p:spPr>
+      </p:sp>
+      <p:sp>
+        <p:nvSpPr>
+          <p:cNvPr id="6" name="Shape 4"/>
+          <p:cNvSpPr/>
+          <p:nvPr/>
+        </p:nvSpPr>
+        <p:spPr>
+          <a:xfrm>
+            <a:off x="896112" y="1024128"/>
+            <a:ext cx="1691640" cy="310896"/>
+          </a:xfrm>
+          <a:prstGeom prst="roundRect">
+            <a:avLst>
+              <a:gd name="adj" fmla="val 35294"/>
+            </a:avLst>
+          </a:prstGeom>
+          <a:solidFill>
+            <a:srgbClr val="FFE7E7"/>
+          </a:solidFill>
+          <a:ln w="12700">
+            <a:solidFill>
+              <a:srgbClr val="FFE7E7"/>
+            </a:solidFill>
+            <a:prstDash val="solid"/>
+          </a:ln>
+        </p:spPr>
+      </p:sp>
+      <p:sp>
+        <p:nvSpPr>
+          <p:cNvPr id="7" name="Text 5"/>
+          <p:cNvSpPr/>
+          <p:nvPr/>
+        </p:nvSpPr>
+        <p:spPr>
+          <a:xfrm>
+            <a:off x="896112" y="1060704"/>
+            <a:ext cx="1691640" cy="256032"/>
+          </a:xfrm>
+          <a:prstGeom prst="rect">
+            <a:avLst/>
+          </a:prstGeom>
+          <a:noFill/>
+          <a:ln/>
+        </p:spPr>
+        <p:txBody>
+          <a:bodyPr wrap="square" lIns="0" tIns="0" rIns="0" bIns="0" rtlCol="0" anchor="ctr"/>
+          <a:lstStyle/>
+          <a:p>
+            <a:pPr marL="0" indent="0" algn="ctr">
+              <a:buNone/>
+            </a:pPr>
+            <a:r>
+              <a:rPr lang="en-US" sz="1250" b="1" dirty="0">
+                <a:solidFill>
+                  <a:srgbClr val="D95858"/>
+                </a:solidFill>
+                <a:latin typeface="Arial" pitchFamily="34" charset="0"/>
+                <a:ea typeface="Arial" pitchFamily="34" charset="-122"/>
+                <a:cs typeface="Arial" pitchFamily="34" charset="-120"/>
+              </a:rPr>
+              <a:t>Limitations</a:t>
+            </a:r>
+            <a:endParaRPr lang="en-US" sz="1250" dirty="0"/>
+          </a:p>
+        </p:txBody>
+      </p:sp>
+      <p:sp>
+        <p:nvSpPr>
+          <p:cNvPr id="8" name="Shape 6"/>
+          <p:cNvSpPr/>
+          <p:nvPr/>
+        </p:nvSpPr>
+        <p:spPr>
+          <a:xfrm>
+            <a:off x="6355080" y="1024128"/>
+            <a:ext cx="1783080" cy="310896"/>
+          </a:xfrm>
+          <a:prstGeom prst="roundRect">
+            <a:avLst>
+              <a:gd name="adj" fmla="val 35294"/>
+            </a:avLst>
+          </a:prstGeom>
+          <a:solidFill>
+            <a:srgbClr val="EAF7E0"/>
+          </a:solidFill>
+          <a:ln w="12700">
+            <a:solidFill>
+              <a:srgbClr val="EAF7E0"/>
+            </a:solidFill>
+            <a:prstDash val="solid"/>
+          </a:ln>
+        </p:spPr>
+      </p:sp>
+      <p:sp>
+        <p:nvSpPr>
+          <p:cNvPr id="9" name="Text 7"/>
+          <p:cNvSpPr/>
+          <p:nvPr/>
+        </p:nvSpPr>
+        <p:spPr>
+          <a:xfrm>
+            <a:off x="6355080" y="1060704"/>
+            <a:ext cx="1783080" cy="256032"/>
+          </a:xfrm>
+          <a:prstGeom prst="rect">
+            <a:avLst/>
+          </a:prstGeom>
+          <a:noFill/>
+          <a:ln/>
+        </p:spPr>
+        <p:txBody>
+          <a:bodyPr wrap="square" lIns="0" tIns="0" rIns="0" bIns="0" rtlCol="0" anchor="ctr"/>
+          <a:lstStyle/>
+          <a:p>
+            <a:pPr marL="0" indent="0" algn="ctr">
+              <a:buNone/>
+            </a:pPr>
+            <a:r>
+              <a:rPr lang="en-US" sz="1250" b="1" dirty="0">
+                <a:solidFill>
+                  <a:srgbClr val="4B8B2B"/>
+                </a:solidFill>
+                <a:latin typeface="Arial" pitchFamily="34" charset="0"/>
+                <a:ea typeface="Arial" pitchFamily="34" charset="-122"/>
+                <a:cs typeface="Arial" pitchFamily="34" charset="-120"/>
+              </a:rPr>
+              <a:t>Future work</a:t>
+            </a:r>
+            <a:endParaRPr lang="en-US" sz="1250" dirty="0"/>
+          </a:p>
+        </p:txBody>
+      </p:sp>
+      <p:sp>
+        <p:nvSpPr>
+          <p:cNvPr id="10" name="Text 8"/>
+          <p:cNvSpPr/>
+          <p:nvPr/>
+        </p:nvSpPr>
+        <p:spPr>
+          <a:xfrm>
+            <a:off x="932688" y="1536192"/>
+            <a:ext cx="4663440" cy="3611880"/>
+          </a:xfrm>
+          <a:prstGeom prst="rect">
+            <a:avLst/>
+          </a:prstGeom>
+          <a:noFill/>
+          <a:ln/>
+        </p:spPr>
+        <p:txBody>
+          <a:bodyPr wrap="square" lIns="254" tIns="254" rIns="254" bIns="254" rtlCol="0" anchor="t">
+            <a:normAutofit/>
+          </a:bodyPr>
+          <a:lstStyle/>
+          <a:p>
+            <a:pPr marL="0" indent="0">
+              <a:buNone/>
+            </a:pPr>
+            <a:r>
+              <a:rPr lang="en-US" sz="1500" dirty="0">
+                <a:solidFill>
+                  <a:srgbClr val="8C3B3B"/>
+                </a:solidFill>
+                <a:latin typeface="Arial" pitchFamily="34" charset="0"/>
+                <a:ea typeface="Arial" pitchFamily="34" charset="-122"/>
+                <a:cs typeface="Arial" pitchFamily="34" charset="-120"/>
+              </a:rPr>
+              <a:t>• Data are stored locally only, which suits a student prototype but limits broader deployment.</a:t>
+            </a:r>
+            <a:endParaRPr lang="en-US" sz="1500" dirty="0"/>
+          </a:p>
+          <a:p>
+            <a:pPr marL="0" indent="0">
+              <a:buNone/>
+            </a:pPr>
+            <a:endParaRPr lang="en-US" sz="1500" dirty="0"/>
+          </a:p>
+          <a:p>
+            <a:pPr marL="0" indent="0">
+              <a:buNone/>
+            </a:pPr>
+            <a:r>
+              <a:rPr lang="en-US" sz="1500" dirty="0">
+                <a:solidFill>
+                  <a:srgbClr val="8C3B3B"/>
+                </a:solidFill>
+                <a:latin typeface="Arial" pitchFamily="34" charset="0"/>
+                <a:ea typeface="Arial" pitchFamily="34" charset="-122"/>
+                <a:cs typeface="Arial" pitchFamily="34" charset="-120"/>
+              </a:rPr>
+              <a:t>• Pronunciation outcomes can vary with device conditions, background noise, and external service behaviour.</a:t>
+            </a:r>
+            <a:endParaRPr lang="en-US" sz="1500" dirty="0"/>
+          </a:p>
+          <a:p>
+            <a:pPr marL="0" indent="0">
+              <a:buNone/>
+            </a:pPr>
+            <a:endParaRPr lang="en-US" sz="1500" dirty="0"/>
+          </a:p>
+          <a:p>
+            <a:pPr marL="0" indent="0">
+              <a:buNone/>
+            </a:pPr>
+            <a:r>
+              <a:rPr lang="en-US" sz="1500" dirty="0">
+                <a:solidFill>
+                  <a:srgbClr val="8C3B3B"/>
+                </a:solidFill>
+                <a:latin typeface="Arial" pitchFamily="34" charset="0"/>
+                <a:ea typeface="Arial" pitchFamily="34" charset="-122"/>
+                <a:cs typeface="Arial" pitchFamily="34" charset="-120"/>
+              </a:rPr>
+              <a:t>• Question quality still depends on dataset balance, preprocessing quality, and distractor design.</a:t>
+            </a:r>
+            <a:endParaRPr lang="en-US" sz="1500" dirty="0"/>
+          </a:p>
+          <a:p>
+            <a:pPr marL="0" indent="0">
+              <a:buNone/>
+            </a:pPr>
+            <a:endParaRPr lang="en-US" sz="1500" dirty="0"/>
+          </a:p>
+        </p:txBody>
+      </p:sp>
+      <p:sp>
+        <p:nvSpPr>
+          <p:cNvPr id="11" name="Text 9"/>
+          <p:cNvSpPr/>
+          <p:nvPr/>
+        </p:nvSpPr>
+        <p:spPr>
+          <a:xfrm>
+            <a:off x="6391656" y="1536192"/>
+            <a:ext cx="4663440" cy="3703320"/>
+          </a:xfrm>
+          <a:prstGeom prst="rect">
+            <a:avLst/>
+          </a:prstGeom>
+          <a:noFill/>
+          <a:ln/>
+        </p:spPr>
+        <p:txBody>
+          <a:bodyPr wrap="square" lIns="254" tIns="254" rIns="254" bIns="254" rtlCol="0" anchor="t">
+            <a:normAutofit/>
+          </a:bodyPr>
+          <a:lstStyle/>
+          <a:p>
+            <a:pPr marL="0" indent="0">
+              <a:buNone/>
+            </a:pPr>
+            <a:r>
+              <a:rPr lang="en-US" sz="1500" dirty="0">
+                <a:solidFill>
+                  <a:srgbClr val="3E6F28"/>
+                </a:solidFill>
+                <a:latin typeface="Arial" pitchFamily="34" charset="0"/>
+                <a:ea typeface="Arial" pitchFamily="34" charset="-122"/>
+                <a:cs typeface="Arial" pitchFamily="34" charset="-120"/>
+              </a:rPr>
+              <a:t>• Add cloud-backed accounts and cross-device synchronisation.</a:t>
+            </a:r>
+            <a:endParaRPr lang="en-US" sz="1500" dirty="0"/>
+          </a:p>
+          <a:p>
+            <a:pPr marL="0" indent="0">
+              <a:buNone/>
+            </a:pPr>
+            <a:endParaRPr lang="en-US" sz="1500" dirty="0"/>
+          </a:p>
+          <a:p>
+            <a:pPr marL="0" indent="0">
+              <a:buNone/>
+            </a:pPr>
+            <a:r>
+              <a:rPr lang="en-US" sz="1500" dirty="0">
+                <a:solidFill>
+                  <a:srgbClr val="3E6F28"/>
+                </a:solidFill>
+                <a:latin typeface="Arial" pitchFamily="34" charset="0"/>
+                <a:ea typeface="Arial" pitchFamily="34" charset="-122"/>
+                <a:cs typeface="Arial" pitchFamily="34" charset="-120"/>
+              </a:rPr>
+              <a:t>• Expand achievement logic and richer progress analytics.</a:t>
+            </a:r>
+            <a:endParaRPr lang="en-US" sz="1500" dirty="0"/>
+          </a:p>
+          <a:p>
+            <a:pPr marL="0" indent="0">
+              <a:buNone/>
+            </a:pPr>
+            <a:endParaRPr lang="en-US" sz="1500" dirty="0"/>
+          </a:p>
+          <a:p>
+            <a:pPr marL="0" indent="0">
+              <a:buNone/>
+            </a:pPr>
+            <a:r>
+              <a:rPr lang="en-US" sz="1500" dirty="0">
+                <a:solidFill>
+                  <a:srgbClr val="3E6F28"/>
+                </a:solidFill>
+                <a:latin typeface="Arial" pitchFamily="34" charset="0"/>
+                <a:ea typeface="Arial" pitchFamily="34" charset="-122"/>
+                <a:cs typeface="Arial" pitchFamily="34" charset="-120"/>
+              </a:rPr>
+              <a:t>• Improve Word Puzzle curation and difficulty modelling.</a:t>
+            </a:r>
+            <a:endParaRPr lang="en-US" sz="1500" dirty="0"/>
+          </a:p>
+          <a:p>
+            <a:pPr marL="0" indent="0">
+              <a:buNone/>
+            </a:pPr>
+            <a:endParaRPr lang="en-US" sz="1500" dirty="0"/>
+          </a:p>
+          <a:p>
+            <a:pPr marL="0" indent="0">
+              <a:buNone/>
+            </a:pPr>
+            <a:r>
+              <a:rPr lang="en-US" sz="1500" dirty="0">
+                <a:solidFill>
+                  <a:srgbClr val="3E6F28"/>
+                </a:solidFill>
+                <a:latin typeface="Arial" pitchFamily="34" charset="0"/>
+                <a:ea typeface="Arial" pitchFamily="34" charset="-122"/>
+                <a:cs typeface="Arial" pitchFamily="34" charset="-120"/>
+              </a:rPr>
+              <a:t>• Provide more detailed pronunciation feedback and test under wider conditions.</a:t>
+            </a:r>
+            <a:endParaRPr lang="en-US" sz="1500" dirty="0"/>
+          </a:p>
+          <a:p>
+            <a:pPr marL="0" indent="0">
+              <a:buNone/>
+            </a:pPr>
+            <a:endParaRPr lang="en-US" sz="1500" dirty="0"/>
+          </a:p>
+        </p:txBody>
+      </p:sp>
+      <p:sp>
+        <p:nvSpPr>
+          <p:cNvPr id="12" name="Shape 10"/>
+          <p:cNvSpPr/>
+          <p:nvPr/>
+        </p:nvSpPr>
+        <p:spPr>
+          <a:xfrm>
+            <a:off x="3721608" y="5367528"/>
+            <a:ext cx="4761306" cy="466344"/>
+          </a:xfrm>
+          <a:prstGeom prst="roundRect">
+            <a:avLst>
+              <a:gd name="adj" fmla="val 17857"/>
+            </a:avLst>
+          </a:prstGeom>
+          <a:solidFill>
+            <a:srgbClr val="FFFFFF"/>
+          </a:solidFill>
+          <a:ln w="12700">
+            <a:solidFill>
+              <a:srgbClr val="38B7C9"/>
+            </a:solidFill>
+            <a:prstDash val="solid"/>
+          </a:ln>
+        </p:spPr>
+      </p:sp>
+      <p:sp>
+        <p:nvSpPr>
+          <p:cNvPr id="13" name="Text 11"/>
+          <p:cNvSpPr/>
+          <p:nvPr/>
+        </p:nvSpPr>
+        <p:spPr>
+          <a:xfrm>
+            <a:off x="3913632" y="5559552"/>
+            <a:ext cx="4343400" cy="91440"/>
+          </a:xfrm>
+          <a:prstGeom prst="rect">
+            <a:avLst/>
+          </a:prstGeom>
+          <a:noFill/>
+          <a:ln/>
+        </p:spPr>
+        <p:txBody>
+          <a:bodyPr wrap="square" lIns="0" tIns="0" rIns="0" bIns="0" rtlCol="0" anchor="ctr"/>
+          <a:lstStyle/>
+          <a:p>
+            <a:pPr marL="0" indent="0" algn="ctr">
+              <a:buNone/>
+            </a:pPr>
+            <a:r>
+              <a:rPr lang="en-US" sz="1180" b="1" dirty="0">
+                <a:solidFill>
+                  <a:srgbClr val="1E3F7A"/>
+                </a:solidFill>
+                <a:latin typeface="Arial" pitchFamily="34" charset="0"/>
+                <a:ea typeface="Arial" pitchFamily="34" charset="-122"/>
+                <a:cs typeface="Arial" pitchFamily="34" charset="-120"/>
+              </a:rPr>
+              <a:t>Positioning: a credible and integrated prototype for future expansion</a:t>
+            </a:r>
+            <a:endParaRPr lang="en-US" sz="1180" dirty="0"/>
+          </a:p>
+        </p:txBody>
+      </p:sp>
+      <p:pic>
+        <p:nvPicPr>
+          <p:cNvPr id="14" name="Image 0" descr="/mnt/data/work/template_media/image2.jpg"/>
+          <p:cNvPicPr>
+            <a:picLocks noChangeAspect="1"/>
+          </p:cNvPicPr>
+          <p:nvPr/>
+        </p:nvPicPr>
+        <p:blipFill>
+          <a:blip r:embed="rId3"/>
+          <a:srcRect t="44800" b="44800"/>
+          <a:stretch/>
+        </p:blipFill>
+        <p:spPr>
+          <a:xfrm>
+            <a:off x="0" y="6144768"/>
+            <a:ext cx="12191695" cy="713232"/>
+          </a:xfrm>
+          <a:prstGeom prst="rect">
+            <a:avLst/>
+          </a:prstGeom>
+        </p:spPr>
+      </p:pic>
+      <p:pic>
+        <p:nvPicPr>
+          <p:cNvPr id="15" name="Image 1" descr="/mnt/data/work/qm_logo_transparent.png"/>
+          <p:cNvPicPr>
+            <a:picLocks noChangeAspect="1"/>
+          </p:cNvPicPr>
+          <p:nvPr/>
+        </p:nvPicPr>
+        <p:blipFill>
+          <a:blip r:embed="rId4"/>
+          <a:stretch>
+            <a:fillRect/>
+          </a:stretch>
+        </p:blipFill>
+        <p:spPr>
+          <a:xfrm>
+            <a:off x="580644" y="6236208"/>
+            <a:ext cx="1389888" cy="438912"/>
+          </a:xfrm>
+          <a:prstGeom prst="rect">
+            <a:avLst/>
+          </a:prstGeom>
+        </p:spPr>
+      </p:pic>
+      <p:sp>
+        <p:nvSpPr>
+          <p:cNvPr id="16" name="Text 12"/>
+          <p:cNvSpPr/>
+          <p:nvPr/>
+        </p:nvSpPr>
+        <p:spPr>
+          <a:xfrm>
+            <a:off x="11688775" y="6309360"/>
+            <a:ext cx="228600" cy="201168"/>
+          </a:xfrm>
+          <a:prstGeom prst="rect">
+            <a:avLst/>
+          </a:prstGeom>
+          <a:noFill/>
+          <a:ln/>
+        </p:spPr>
+        <p:txBody>
+          <a:bodyPr wrap="square" lIns="0" tIns="0" rIns="0" bIns="0" rtlCol="0" anchor="ctr"/>
+          <a:lstStyle/>
+          <a:p>
+            <a:pPr marL="0" indent="0" algn="r">
+              <a:buNone/>
+            </a:pPr>
+            <a:r>
+              <a:rPr lang="en-US" sz="1100">
+                <a:solidFill>
+                  <a:srgbClr val="FFFFFF"/>
+                </a:solidFill>
+                <a:latin typeface="Arial" pitchFamily="34" charset="0"/>
+                <a:cs typeface="Arial" pitchFamily="34" charset="-120"/>
+              </a:rPr>
+              <a:t>1</a:t>
+            </a:r>
+            <a:r>
+              <a:rPr lang="en-US" sz="1100" dirty="0">
+                <a:solidFill>
+                  <a:srgbClr val="FFFFFF"/>
+                </a:solidFill>
+                <a:latin typeface="Arial" pitchFamily="34" charset="0"/>
+                <a:cs typeface="Arial" pitchFamily="34" charset="-120"/>
+              </a:rPr>
+              <a:t>1</a:t>
+            </a:r>
+            <a:endParaRPr lang="en-US" sz="1100" dirty="0"/>
+          </a:p>
+        </p:txBody>
+      </p:sp>
+      <p:pic>
+        <p:nvPicPr>
+          <p:cNvPr id="17" name="Picture 12" descr="8a7c0663-f7b2-4937-9eb5-b4aeb9d07c89_no_bg.png">
+            <a:extLst>
+              <a:ext uri="{FF2B5EF4-FFF2-40B4-BE49-F238E27FC236}">
+                <a16:creationId xmlns:a16="http://schemas.microsoft.com/office/drawing/2014/main" id="{D3636918-74F8-4B37-850F-E72536824CAA}"/>
+              </a:ext>
+            </a:extLst>
+          </p:cNvPr>
+          <p:cNvPicPr>
+            <a:picLocks noChangeAspect="1"/>
+          </p:cNvPicPr>
+          <p:nvPr/>
+        </p:nvPicPr>
+        <p:blipFill>
+          <a:blip r:embed="rId5">
+            <a:extLst>
+              <a:ext uri="{BEBA8EAE-BF5A-486C-A8C5-ECC9F3942E4B}">
+                <a14:imgProps xmlns:a14="http://schemas.microsoft.com/office/drawing/2010/main">
+                  <a14:imgLayer r:embed="rId6">
+                    <a14:imgEffect>
+                      <a14:backgroundRemoval t="9961" b="89941" l="9961" r="91211">
+                        <a14:foregroundMark x1="31055" y1="44043" x2="34180" y2="35938"/>
+                        <a14:foregroundMark x1="51465" y1="40918" x2="54590" y2="44629"/>
+                        <a14:foregroundMark x1="23633" y1="40918" x2="30371" y2="47168"/>
+                        <a14:foregroundMark x1="28516" y1="44043" x2="27344" y2="40332"/>
+                        <a14:foregroundMark x1="90527" y1="63184" x2="91211" y2="67578"/>
+                      </a14:backgroundRemoval>
+                    </a14:imgEffect>
+                  </a14:imgLayer>
+                </a14:imgProps>
+              </a:ext>
+            </a:extLst>
+          </a:blip>
+          <a:stretch>
+            <a:fillRect/>
+          </a:stretch>
+        </p:blipFill>
+        <p:spPr>
+          <a:xfrm>
+            <a:off x="10609783" y="5504688"/>
+            <a:ext cx="1143000" cy="1143000"/>
+          </a:xfrm>
+          <a:prstGeom prst="rect">
+            <a:avLst/>
+          </a:prstGeom>
+        </p:spPr>
+      </p:pic>
+    </p:spTree>
+  </p:cSld>
+  <p:clrMapOvr>
+    <a:masterClrMapping/>
+  </p:clrMapOvr>
+</p:sld>
+</file>
+
+<file path=ppt/slides/slide12.xml><?xml version="1.0" encoding="utf-8"?>
 <p:sld xmlns:a="http://schemas.openxmlformats.org/drawingml/2006/main" xmlns:r="http://schemas.openxmlformats.org/officeDocument/2006/relationships" xmlns:p="http://schemas.openxmlformats.org/presentationml/2006/main">
   <p:cSld name="Slide 10">
     <p:bg>
@@ -2600,6 +5086,54 @@
           </a:p>
         </p:txBody>
       </p:sp>
+      <p:pic>
+        <p:nvPicPr>
+          <p:cNvPr id="17" name="Picture 12" descr="8a7c0663-f7b2-4937-9eb5-b4aeb9d07c89_no_bg.png">
+            <a:extLst>
+              <a:ext uri="{FF2B5EF4-FFF2-40B4-BE49-F238E27FC236}">
+                <a16:creationId xmlns:a16="http://schemas.microsoft.com/office/drawing/2014/main" id="{5B63F4DF-6AA4-41A6-A741-B8D2AD466C4C}"/>
+              </a:ext>
+            </a:extLst>
+          </p:cNvPr>
+          <p:cNvPicPr>
+            <a:picLocks noChangeAspect="1"/>
+          </p:cNvPicPr>
+          <p:nvPr/>
+        </p:nvPicPr>
+        <p:blipFill>
+          <a:blip r:embed="rId5">
+            <a:extLst>
+              <a:ext uri="{BEBA8EAE-BF5A-486C-A8C5-ECC9F3942E4B}">
+                <a14:imgProps xmlns:a14="http://schemas.microsoft.com/office/drawing/2010/main">
+                  <a14:imgLayer r:embed="rId6">
+                    <a14:imgEffect>
+                      <a14:backgroundRemoval t="9961" b="89941" l="9961" r="91211">
+                        <a14:foregroundMark x1="31055" y1="44043" x2="34180" y2="35938"/>
+                        <a14:foregroundMark x1="51465" y1="40918" x2="54590" y2="44629"/>
+                        <a14:foregroundMark x1="23633" y1="40918" x2="30371" y2="47168"/>
+                        <a14:foregroundMark x1="28516" y1="44043" x2="27344" y2="40332"/>
+                        <a14:foregroundMark x1="90527" y1="63184" x2="91211" y2="67578"/>
+                      </a14:backgroundRemoval>
+                    </a14:imgEffect>
+                  </a14:imgLayer>
+                </a14:imgProps>
+              </a:ext>
+            </a:extLst>
+          </a:blip>
+          <a:stretch>
+            <a:fillRect/>
+          </a:stretch>
+        </p:blipFill>
+        <p:spPr>
+          <a:xfrm>
+            <a:off x="10609783" y="5504688"/>
+            <a:ext cx="1143000" cy="1143000"/>
+          </a:xfrm>
+          <a:prstGeom prst="rect">
+            <a:avLst/>
+          </a:prstGeom>
+        </p:spPr>
+      </p:pic>
     </p:spTree>
   </p:cSld>
   <p:clrMapOvr>
@@ -4010,6 +6544,54 @@
           </a:p>
         </p:txBody>
       </p:sp>
+      <p:pic>
+        <p:nvPicPr>
+          <p:cNvPr id="38" name="Picture 12" descr="8a7c0663-f7b2-4937-9eb5-b4aeb9d07c89_no_bg.png">
+            <a:extLst>
+              <a:ext uri="{FF2B5EF4-FFF2-40B4-BE49-F238E27FC236}">
+                <a16:creationId xmlns:a16="http://schemas.microsoft.com/office/drawing/2014/main" id="{A38BC56A-FCEE-407A-844B-967D0AE902CB}"/>
+              </a:ext>
+            </a:extLst>
+          </p:cNvPr>
+          <p:cNvPicPr>
+            <a:picLocks noChangeAspect="1"/>
+          </p:cNvPicPr>
+          <p:nvPr/>
+        </p:nvPicPr>
+        <p:blipFill>
+          <a:blip r:embed="rId5">
+            <a:extLst>
+              <a:ext uri="{BEBA8EAE-BF5A-486C-A8C5-ECC9F3942E4B}">
+                <a14:imgProps xmlns:a14="http://schemas.microsoft.com/office/drawing/2010/main">
+                  <a14:imgLayer r:embed="rId6">
+                    <a14:imgEffect>
+                      <a14:backgroundRemoval t="9961" b="89941" l="9961" r="91211">
+                        <a14:foregroundMark x1="31055" y1="44043" x2="34180" y2="35938"/>
+                        <a14:foregroundMark x1="51465" y1="40918" x2="54590" y2="44629"/>
+                        <a14:foregroundMark x1="23633" y1="40918" x2="30371" y2="47168"/>
+                        <a14:foregroundMark x1="28516" y1="44043" x2="27344" y2="40332"/>
+                        <a14:foregroundMark x1="90527" y1="63184" x2="91211" y2="67578"/>
+                      </a14:backgroundRemoval>
+                    </a14:imgEffect>
+                  </a14:imgLayer>
+                </a14:imgProps>
+              </a:ext>
+            </a:extLst>
+          </a:blip>
+          <a:stretch>
+            <a:fillRect/>
+          </a:stretch>
+        </p:blipFill>
+        <p:spPr>
+          <a:xfrm>
+            <a:off x="10609783" y="5504688"/>
+            <a:ext cx="1143000" cy="1143000"/>
+          </a:xfrm>
+          <a:prstGeom prst="rect">
+            <a:avLst/>
+          </a:prstGeom>
+        </p:spPr>
+      </p:pic>
     </p:spTree>
   </p:cSld>
   <p:clrMapOvr>
@@ -4248,7 +6830,7 @@
         </p:nvSpPr>
         <p:spPr>
           <a:xfrm>
-            <a:off x="1170432" y="1554480"/>
+            <a:off x="1170432" y="1706468"/>
             <a:ext cx="1417320" cy="164592"/>
           </a:xfrm>
           <a:prstGeom prst="rect">
@@ -4287,8 +6869,8 @@
         </p:nvSpPr>
         <p:spPr>
           <a:xfrm>
-            <a:off x="2523744" y="1536192"/>
-            <a:ext cx="3154680" cy="310896"/>
+            <a:off x="2566993" y="1527048"/>
+            <a:ext cx="3271575" cy="457200"/>
           </a:xfrm>
           <a:prstGeom prst="rect">
             <a:avLst/>
@@ -4306,7 +6888,7 @@
               <a:buNone/>
             </a:pPr>
             <a:r>
-              <a:rPr lang="en-US" sz="1170" dirty="0">
+              <a:rPr lang="en-US" sz="1000" dirty="0">
                 <a:solidFill>
                   <a:srgbClr val="274673"/>
                 </a:solidFill>
@@ -4316,14 +6898,14 @@
               </a:rPr>
               <a:t>Activities + XML layouts</a:t>
             </a:r>
-            <a:endParaRPr lang="en-US" sz="1170" dirty="0"/>
+            <a:endParaRPr lang="en-US" sz="1000" dirty="0"/>
           </a:p>
           <a:p>
             <a:pPr marL="0" indent="0" algn="l">
               <a:buNone/>
             </a:pPr>
             <a:r>
-              <a:rPr lang="en-US" sz="1170" dirty="0">
+              <a:rPr lang="en-US" sz="1000" dirty="0">
                 <a:solidFill>
                   <a:srgbClr val="274673"/>
                 </a:solidFill>
@@ -4333,7 +6915,7 @@
               </a:rPr>
               <a:t>Login, game hub, profile, achievements, shared game UI</a:t>
             </a:r>
-            <a:endParaRPr lang="en-US" sz="1170" dirty="0"/>
+            <a:endParaRPr lang="en-US" sz="1000" dirty="0"/>
           </a:p>
         </p:txBody>
       </p:sp>
@@ -4397,7 +6979,7 @@
         </p:nvSpPr>
         <p:spPr>
           <a:xfrm>
-            <a:off x="1170432" y="2542032"/>
+            <a:off x="1170432" y="2688336"/>
             <a:ext cx="1417320" cy="164592"/>
           </a:xfrm>
           <a:prstGeom prst="rect">
@@ -4436,8 +7018,8 @@
         </p:nvSpPr>
         <p:spPr>
           <a:xfrm>
-            <a:off x="2523744" y="2523744"/>
-            <a:ext cx="3154680" cy="310896"/>
+            <a:off x="2523743" y="2569464"/>
+            <a:ext cx="3209791" cy="384048"/>
           </a:xfrm>
           <a:prstGeom prst="rect">
             <a:avLst/>
@@ -4455,7 +7037,7 @@
               <a:buNone/>
             </a:pPr>
             <a:r>
-              <a:rPr lang="en-US" sz="1170" dirty="0">
+              <a:rPr lang="en-US" sz="1000" dirty="0">
                 <a:solidFill>
                   <a:srgbClr val="274673"/>
                 </a:solidFill>
@@ -4465,14 +7047,14 @@
               </a:rPr>
               <a:t>MainActivity, game_choice, GameActivity</a:t>
             </a:r>
-            <a:endParaRPr lang="en-US" sz="1170" dirty="0"/>
+            <a:endParaRPr lang="en-US" sz="1000" dirty="0"/>
           </a:p>
           <a:p>
             <a:pPr marL="0" indent="0" algn="l">
               <a:buNone/>
             </a:pPr>
             <a:r>
-              <a:rPr lang="en-US" sz="1170" dirty="0">
+              <a:rPr lang="en-US" sz="1000" dirty="0">
                 <a:solidFill>
                   <a:srgbClr val="274673"/>
                 </a:solidFill>
@@ -4482,7 +7064,7 @@
               </a:rPr>
               <a:t>Navigation, session flow, game dispatch</a:t>
             </a:r>
-            <a:endParaRPr lang="en-US" sz="1170" dirty="0"/>
+            <a:endParaRPr lang="en-US" sz="1000" dirty="0"/>
           </a:p>
         </p:txBody>
       </p:sp>
@@ -4546,7 +7128,7 @@
         </p:nvSpPr>
         <p:spPr>
           <a:xfrm>
-            <a:off x="1170432" y="3529584"/>
+            <a:off x="1172409" y="3694176"/>
             <a:ext cx="1417320" cy="164592"/>
           </a:xfrm>
           <a:prstGeom prst="rect">
@@ -4585,8 +7167,8 @@
         </p:nvSpPr>
         <p:spPr>
           <a:xfrm>
-            <a:off x="2523744" y="3511296"/>
-            <a:ext cx="3154680" cy="310896"/>
+            <a:off x="2523744" y="3529584"/>
+            <a:ext cx="3314824" cy="512064"/>
           </a:xfrm>
           <a:prstGeom prst="rect">
             <a:avLst/>
@@ -4596,7 +7178,7 @@
         </p:spPr>
         <p:txBody>
           <a:bodyPr wrap="square" lIns="0" tIns="0" rIns="0" bIns="0" rtlCol="0" anchor="ctr">
-            <a:normAutofit/>
+            <a:noAutofit/>
           </a:bodyPr>
           <a:lstStyle/>
           <a:p>
@@ -4604,34 +7186,48 @@
               <a:buNone/>
             </a:pPr>
             <a:r>
-              <a:rPr lang="en-US" sz="1170" dirty="0">
+              <a:rPr lang="en-US" sz="1200" dirty="0">
                 <a:solidFill>
                   <a:srgbClr val="274673"/>
                 </a:solidFill>
+                <a:highlight>
+                  <a:srgbClr val="FFFF00"/>
+                </a:highlight>
                 <a:latin typeface="Arial" pitchFamily="34" charset="0"/>
                 <a:ea typeface="Arial" pitchFamily="34" charset="-122"/>
                 <a:cs typeface="Arial" pitchFamily="34" charset="-120"/>
               </a:rPr>
               <a:t>SQLite + DAO + DataManager</a:t>
             </a:r>
-            <a:endParaRPr lang="en-US" sz="1170" dirty="0"/>
+            <a:endParaRPr lang="en-US" sz="1200" dirty="0">
+              <a:highlight>
+                <a:srgbClr val="FFFF00"/>
+              </a:highlight>
+            </a:endParaRPr>
           </a:p>
           <a:p>
             <a:pPr marL="0" indent="0" algn="l">
               <a:buNone/>
             </a:pPr>
             <a:r>
-              <a:rPr lang="en-US" sz="1170" dirty="0">
+              <a:rPr lang="en-US" sz="1200" dirty="0">
                 <a:solidFill>
                   <a:srgbClr val="274673"/>
                 </a:solidFill>
+                <a:highlight>
+                  <a:srgbClr val="FFFF00"/>
+                </a:highlight>
                 <a:latin typeface="Arial" pitchFamily="34" charset="0"/>
                 <a:ea typeface="Arial" pitchFamily="34" charset="-122"/>
                 <a:cs typeface="Arial" pitchFamily="34" charset="-120"/>
               </a:rPr>
               <a:t>Users, scores, question details, sentences, word resources</a:t>
             </a:r>
-            <a:endParaRPr lang="en-US" sz="1170" dirty="0"/>
+            <a:endParaRPr lang="en-US" sz="1200" dirty="0">
+              <a:highlight>
+                <a:srgbClr val="FFFF00"/>
+              </a:highlight>
+            </a:endParaRPr>
           </a:p>
         </p:txBody>
       </p:sp>
@@ -4695,7 +7291,7 @@
         </p:nvSpPr>
         <p:spPr>
           <a:xfrm>
-            <a:off x="1170432" y="4517136"/>
+            <a:off x="1170432" y="4617720"/>
             <a:ext cx="1417320" cy="164592"/>
           </a:xfrm>
           <a:prstGeom prst="rect">
@@ -4734,7 +7330,7 @@
         </p:nvSpPr>
         <p:spPr>
           <a:xfrm>
-            <a:off x="2523744" y="4498848"/>
+            <a:off x="2523743" y="4572000"/>
             <a:ext cx="3154680" cy="310896"/>
           </a:xfrm>
           <a:prstGeom prst="rect">
@@ -4745,42 +7341,32 @@
         </p:spPr>
         <p:txBody>
           <a:bodyPr wrap="square" lIns="0" tIns="0" rIns="0" bIns="0" rtlCol="0" anchor="ctr">
-            <a:normAutofit/>
+            <a:noAutofit/>
           </a:bodyPr>
           <a:lstStyle/>
           <a:p>
-            <a:pPr marL="0" indent="0" algn="l">
-              <a:buNone/>
-            </a:pPr>
-            <a:r>
-              <a:rPr lang="en-US" sz="1170" dirty="0">
+            <a:r>
+              <a:rPr lang="en-US" sz="1200" dirty="0">
                 <a:solidFill>
                   <a:srgbClr val="274673"/>
                 </a:solidFill>
                 <a:latin typeface="Arial" pitchFamily="34" charset="0"/>
-                <a:ea typeface="Arial" pitchFamily="34" charset="-122"/>
                 <a:cs typeface="Arial" pitchFamily="34" charset="-120"/>
               </a:rPr>
               <a:t>Speech evaluation / recognition components</a:t>
             </a:r>
-            <a:endParaRPr lang="en-US" sz="1170" dirty="0"/>
-          </a:p>
-          <a:p>
-            <a:pPr marL="0" indent="0" algn="l">
-              <a:buNone/>
-            </a:pPr>
-            <a:r>
-              <a:rPr lang="en-US" sz="1170" dirty="0">
+          </a:p>
+          <a:p>
+            <a:r>
+              <a:rPr lang="en-US" sz="1200" dirty="0">
                 <a:solidFill>
                   <a:srgbClr val="274673"/>
                 </a:solidFill>
                 <a:latin typeface="Arial" pitchFamily="34" charset="0"/>
-                <a:ea typeface="Arial" pitchFamily="34" charset="-122"/>
                 <a:cs typeface="Arial" pitchFamily="34" charset="-120"/>
               </a:rPr>
               <a:t>HanLP-assisted sentence processing</a:t>
             </a:r>
-            <a:endParaRPr lang="en-US" sz="1170" dirty="0"/>
           </a:p>
         </p:txBody>
       </p:sp>
@@ -5076,7 +7662,7 @@
         </p:spPr>
         <p:txBody>
           <a:bodyPr wrap="square" lIns="0" tIns="0" rIns="0" bIns="0" rtlCol="0" anchor="ctr">
-            <a:normAutofit/>
+            <a:normAutofit fontScale="92500"/>
           </a:bodyPr>
           <a:lstStyle/>
           <a:p>
@@ -5183,7 +7769,7 @@
         </p:spPr>
         <p:txBody>
           <a:bodyPr wrap="square" lIns="0" tIns="0" rIns="0" bIns="0" rtlCol="0" anchor="ctr">
-            <a:normAutofit/>
+            <a:normAutofit fontScale="92500"/>
           </a:bodyPr>
           <a:lstStyle/>
           <a:p>
@@ -5290,7 +7876,7 @@
         </p:spPr>
         <p:txBody>
           <a:bodyPr wrap="square" lIns="0" tIns="0" rIns="0" bIns="0" rtlCol="0" anchor="ctr">
-            <a:normAutofit/>
+            <a:normAutofit fontScale="85000" lnSpcReduction="10000"/>
           </a:bodyPr>
           <a:lstStyle/>
           <a:p>
@@ -5397,7 +7983,7 @@
         </p:spPr>
         <p:txBody>
           <a:bodyPr wrap="square" lIns="0" tIns="0" rIns="0" bIns="0" rtlCol="0" anchor="ctr">
-            <a:normAutofit/>
+            <a:normAutofit fontScale="77500" lnSpcReduction="20000"/>
           </a:bodyPr>
           <a:lstStyle/>
           <a:p>
@@ -5504,7 +8090,7 @@
         </p:spPr>
         <p:txBody>
           <a:bodyPr wrap="square" lIns="0" tIns="0" rIns="0" bIns="0" rtlCol="0" anchor="ctr">
-            <a:normAutofit/>
+            <a:normAutofit fontScale="77500" lnSpcReduction="20000"/>
           </a:bodyPr>
           <a:lstStyle/>
           <a:p>
@@ -5612,6 +8198,54 @@
           </a:p>
         </p:txBody>
       </p:sp>
+      <p:pic>
+        <p:nvPicPr>
+          <p:cNvPr id="46" name="Picture 12" descr="8a7c0663-f7b2-4937-9eb5-b4aeb9d07c89_no_bg.png">
+            <a:extLst>
+              <a:ext uri="{FF2B5EF4-FFF2-40B4-BE49-F238E27FC236}">
+                <a16:creationId xmlns:a16="http://schemas.microsoft.com/office/drawing/2014/main" id="{373977A3-E986-4424-B002-9929DC7A5F77}"/>
+              </a:ext>
+            </a:extLst>
+          </p:cNvPr>
+          <p:cNvPicPr>
+            <a:picLocks noChangeAspect="1"/>
+          </p:cNvPicPr>
+          <p:nvPr/>
+        </p:nvPicPr>
+        <p:blipFill>
+          <a:blip r:embed="rId5">
+            <a:extLst>
+              <a:ext uri="{BEBA8EAE-BF5A-486C-A8C5-ECC9F3942E4B}">
+                <a14:imgProps xmlns:a14="http://schemas.microsoft.com/office/drawing/2010/main">
+                  <a14:imgLayer r:embed="rId6">
+                    <a14:imgEffect>
+                      <a14:backgroundRemoval t="9961" b="89941" l="9961" r="91211">
+                        <a14:foregroundMark x1="31055" y1="44043" x2="34180" y2="35938"/>
+                        <a14:foregroundMark x1="51465" y1="40918" x2="54590" y2="44629"/>
+                        <a14:foregroundMark x1="23633" y1="40918" x2="30371" y2="47168"/>
+                        <a14:foregroundMark x1="28516" y1="44043" x2="27344" y2="40332"/>
+                        <a14:foregroundMark x1="90527" y1="63184" x2="91211" y2="67578"/>
+                      </a14:backgroundRemoval>
+                    </a14:imgEffect>
+                  </a14:imgLayer>
+                </a14:imgProps>
+              </a:ext>
+            </a:extLst>
+          </a:blip>
+          <a:stretch>
+            <a:fillRect/>
+          </a:stretch>
+        </p:blipFill>
+        <p:spPr>
+          <a:xfrm>
+            <a:off x="10609783" y="5504688"/>
+            <a:ext cx="1143000" cy="1143000"/>
+          </a:xfrm>
+          <a:prstGeom prst="rect">
+            <a:avLst/>
+          </a:prstGeom>
+        </p:spPr>
+      </p:pic>
     </p:spTree>
   </p:cSld>
   <p:clrMapOvr>
@@ -7089,7 +9723,7 @@
         </p:nvSpPr>
         <p:spPr>
           <a:xfrm>
-            <a:off x="10680192" y="4901184"/>
+            <a:off x="10680192" y="4946904"/>
             <a:ext cx="548640" cy="109728"/>
           </a:xfrm>
           <a:prstGeom prst="rect">
@@ -7206,6 +9840,54 @@
           </a:p>
         </p:txBody>
       </p:sp>
+      <p:pic>
+        <p:nvPicPr>
+          <p:cNvPr id="48" name="Picture 12" descr="8a7c0663-f7b2-4937-9eb5-b4aeb9d07c89_no_bg.png">
+            <a:extLst>
+              <a:ext uri="{FF2B5EF4-FFF2-40B4-BE49-F238E27FC236}">
+                <a16:creationId xmlns:a16="http://schemas.microsoft.com/office/drawing/2014/main" id="{847F2C66-4465-487B-9387-D15529E74131}"/>
+              </a:ext>
+            </a:extLst>
+          </p:cNvPr>
+          <p:cNvPicPr>
+            <a:picLocks noChangeAspect="1"/>
+          </p:cNvPicPr>
+          <p:nvPr/>
+        </p:nvPicPr>
+        <p:blipFill>
+          <a:blip r:embed="rId5">
+            <a:extLst>
+              <a:ext uri="{BEBA8EAE-BF5A-486C-A8C5-ECC9F3942E4B}">
+                <a14:imgProps xmlns:a14="http://schemas.microsoft.com/office/drawing/2010/main">
+                  <a14:imgLayer r:embed="rId6">
+                    <a14:imgEffect>
+                      <a14:backgroundRemoval t="9961" b="89941" l="9961" r="91211">
+                        <a14:foregroundMark x1="31055" y1="44043" x2="34180" y2="35938"/>
+                        <a14:foregroundMark x1="51465" y1="40918" x2="54590" y2="44629"/>
+                        <a14:foregroundMark x1="23633" y1="40918" x2="30371" y2="47168"/>
+                        <a14:foregroundMark x1="28516" y1="44043" x2="27344" y2="40332"/>
+                        <a14:foregroundMark x1="90527" y1="63184" x2="91211" y2="67578"/>
+                      </a14:backgroundRemoval>
+                    </a14:imgEffect>
+                  </a14:imgLayer>
+                </a14:imgProps>
+              </a:ext>
+            </a:extLst>
+          </a:blip>
+          <a:stretch>
+            <a:fillRect/>
+          </a:stretch>
+        </p:blipFill>
+        <p:spPr>
+          <a:xfrm>
+            <a:off x="10609783" y="5504688"/>
+            <a:ext cx="1143000" cy="1143000"/>
+          </a:xfrm>
+          <a:prstGeom prst="rect">
+            <a:avLst/>
+          </a:prstGeom>
+        </p:spPr>
+      </p:pic>
     </p:spTree>
   </p:cSld>
   <p:clrMapOvr>
@@ -7317,7 +9999,7 @@
         </p:nvSpPr>
         <p:spPr>
           <a:xfrm>
-            <a:off x="658368" y="1225296"/>
+            <a:off x="640080" y="1225296"/>
             <a:ext cx="3154680" cy="3273552"/>
           </a:xfrm>
           <a:prstGeom prst="roundRect">
@@ -7624,7 +10306,7 @@
         </p:spPr>
         <p:txBody>
           <a:bodyPr wrap="square" lIns="0" tIns="0" rIns="0" bIns="0" rtlCol="0" anchor="ctr">
-            <a:normAutofit/>
+            <a:normAutofit fontScale="92500"/>
           </a:bodyPr>
           <a:lstStyle/>
           <a:p>
@@ -7654,7 +10336,7 @@
         </p:nvSpPr>
         <p:spPr>
           <a:xfrm>
-            <a:off x="4142232" y="1225296"/>
+            <a:off x="4133088" y="1225296"/>
             <a:ext cx="3154680" cy="3273552"/>
           </a:xfrm>
           <a:prstGeom prst="roundRect">
@@ -7895,7 +10577,7 @@
         </p:spPr>
         <p:txBody>
           <a:bodyPr wrap="square" lIns="0" tIns="0" rIns="0" bIns="0" rtlCol="0" anchor="ctr">
-            <a:normAutofit/>
+            <a:normAutofit fontScale="85000" lnSpcReduction="10000"/>
           </a:bodyPr>
           <a:lstStyle/>
           <a:p>
@@ -7961,7 +10643,7 @@
         </p:spPr>
         <p:txBody>
           <a:bodyPr wrap="square" lIns="0" tIns="0" rIns="0" bIns="0" rtlCol="0" anchor="ctr">
-            <a:normAutofit/>
+            <a:normAutofit fontScale="77500" lnSpcReduction="20000"/>
           </a:bodyPr>
           <a:lstStyle/>
           <a:p>
@@ -8100,7 +10782,7 @@
         </p:spPr>
         <p:txBody>
           <a:bodyPr wrap="square" lIns="0" tIns="0" rIns="0" bIns="0" rtlCol="0" anchor="ctr">
-            <a:normAutofit/>
+            <a:normAutofit fontScale="85000" lnSpcReduction="10000"/>
           </a:bodyPr>
           <a:lstStyle/>
           <a:p>
@@ -8112,13 +10794,20 @@
                 <a:solidFill>
                   <a:srgbClr val="274673"/>
                 </a:solidFill>
+                <a:highlight>
+                  <a:srgbClr val="FFFF00"/>
+                </a:highlight>
                 <a:latin typeface="Arial" pitchFamily="34" charset="0"/>
                 <a:ea typeface="Arial" pitchFamily="34" charset="-122"/>
                 <a:cs typeface="Arial" pitchFamily="34" charset="-120"/>
               </a:rPr>
               <a:t>Sentence tokens loaded from SQLite</a:t>
             </a:r>
-            <a:endParaRPr lang="en-US" sz="1340" dirty="0"/>
+            <a:endParaRPr lang="en-US" sz="1340" dirty="0">
+              <a:highlight>
+                <a:srgbClr val="FFFF00"/>
+              </a:highlight>
+            </a:endParaRPr>
           </a:p>
         </p:txBody>
       </p:sp>
@@ -8166,7 +10855,7 @@
         </p:spPr>
         <p:txBody>
           <a:bodyPr wrap="square" lIns="0" tIns="0" rIns="0" bIns="0" rtlCol="0" anchor="ctr">
-            <a:normAutofit/>
+            <a:normAutofit fontScale="85000" lnSpcReduction="10000"/>
           </a:bodyPr>
           <a:lstStyle/>
           <a:p>
@@ -8232,7 +10921,7 @@
         </p:spPr>
         <p:txBody>
           <a:bodyPr wrap="square" lIns="0" tIns="0" rIns="0" bIns="0" rtlCol="0" anchor="ctr">
-            <a:normAutofit/>
+            <a:normAutofit fontScale="85000" lnSpcReduction="10000"/>
           </a:bodyPr>
           <a:lstStyle/>
           <a:p>
@@ -8298,7 +10987,7 @@
         </p:spPr>
         <p:txBody>
           <a:bodyPr wrap="square" lIns="0" tIns="0" rIns="0" bIns="0" rtlCol="0" anchor="ctr">
-            <a:normAutofit/>
+            <a:normAutofit fontScale="92500"/>
           </a:bodyPr>
           <a:lstStyle/>
           <a:p>
@@ -8362,8 +11051,8 @@
         </p:nvSpPr>
         <p:spPr>
           <a:xfrm>
-            <a:off x="877824" y="4956048"/>
-            <a:ext cx="1965960" cy="164592"/>
+            <a:off x="822960" y="4860036"/>
+            <a:ext cx="2281554" cy="557784"/>
           </a:xfrm>
           <a:prstGeom prst="rect">
             <a:avLst/>
@@ -8379,7 +11068,7 @@
               <a:buNone/>
             </a:pPr>
             <a:r>
-              <a:rPr lang="en-US" sz="1500" b="1" dirty="0">
+              <a:rPr lang="en-US" sz="1200" b="1" dirty="0">
                 <a:solidFill>
                   <a:srgbClr val="1E3F7A"/>
                 </a:solidFill>
@@ -8389,7 +11078,7 @@
               </a:rPr>
               <a:t>Implementation highlights</a:t>
             </a:r>
-            <a:endParaRPr lang="en-US" sz="1500" dirty="0"/>
+            <a:endParaRPr lang="en-US" sz="1200" dirty="0"/>
           </a:p>
         </p:txBody>
       </p:sp>
@@ -8401,8 +11090,8 @@
         </p:nvSpPr>
         <p:spPr>
           <a:xfrm>
-            <a:off x="2834640" y="4855464"/>
-            <a:ext cx="8321040" cy="310896"/>
+            <a:off x="2887610" y="4821359"/>
+            <a:ext cx="8465615" cy="649224"/>
           </a:xfrm>
           <a:prstGeom prst="rect">
             <a:avLst/>
@@ -8420,7 +11109,7 @@
               <a:buNone/>
             </a:pPr>
             <a:r>
-              <a:rPr lang="en-US" sz="1240" dirty="0">
+              <a:rPr lang="en-US" sz="1100" dirty="0">
                 <a:solidFill>
                   <a:srgbClr val="274673"/>
                 </a:solidFill>
@@ -8430,7 +11119,7 @@
               </a:rPr>
               <a:t>GameActivity dispatches the three modes; session summaries are stored in game_scores and detailed answers in game_question_details; the pronunciation module uses evaluation callbacks, while Word Puzzle switches between reorder and blank-style tasks based on sentence length and token count.</a:t>
             </a:r>
-            <a:endParaRPr lang="en-US" sz="1240" dirty="0"/>
+            <a:endParaRPr lang="en-US" sz="1100" dirty="0"/>
           </a:p>
         </p:txBody>
       </p:sp>
@@ -8520,6 +11209,54 @@
           </a:p>
         </p:txBody>
       </p:sp>
+      <p:pic>
+        <p:nvPicPr>
+          <p:cNvPr id="40" name="Picture 12" descr="8a7c0663-f7b2-4937-9eb5-b4aeb9d07c89_no_bg.png">
+            <a:extLst>
+              <a:ext uri="{FF2B5EF4-FFF2-40B4-BE49-F238E27FC236}">
+                <a16:creationId xmlns:a16="http://schemas.microsoft.com/office/drawing/2014/main" id="{F23D8D7D-0544-4660-80B5-7E733936C683}"/>
+              </a:ext>
+            </a:extLst>
+          </p:cNvPr>
+          <p:cNvPicPr>
+            <a:picLocks noChangeAspect="1"/>
+          </p:cNvPicPr>
+          <p:nvPr/>
+        </p:nvPicPr>
+        <p:blipFill>
+          <a:blip r:embed="rId5">
+            <a:extLst>
+              <a:ext uri="{BEBA8EAE-BF5A-486C-A8C5-ECC9F3942E4B}">
+                <a14:imgProps xmlns:a14="http://schemas.microsoft.com/office/drawing/2010/main">
+                  <a14:imgLayer r:embed="rId6">
+                    <a14:imgEffect>
+                      <a14:backgroundRemoval t="9961" b="89941" l="9961" r="91211">
+                        <a14:foregroundMark x1="31055" y1="44043" x2="34180" y2="35938"/>
+                        <a14:foregroundMark x1="51465" y1="40918" x2="54590" y2="44629"/>
+                        <a14:foregroundMark x1="23633" y1="40918" x2="30371" y2="47168"/>
+                        <a14:foregroundMark x1="28516" y1="44043" x2="27344" y2="40332"/>
+                        <a14:foregroundMark x1="90527" y1="63184" x2="91211" y2="67578"/>
+                      </a14:backgroundRemoval>
+                    </a14:imgEffect>
+                  </a14:imgLayer>
+                </a14:imgProps>
+              </a:ext>
+            </a:extLst>
+          </a:blip>
+          <a:stretch>
+            <a:fillRect/>
+          </a:stretch>
+        </p:blipFill>
+        <p:spPr>
+          <a:xfrm>
+            <a:off x="10609783" y="5504688"/>
+            <a:ext cx="1143000" cy="1143000"/>
+          </a:xfrm>
+          <a:prstGeom prst="rect">
+            <a:avLst/>
+          </a:prstGeom>
+        </p:spPr>
+      </p:pic>
     </p:spTree>
   </p:cSld>
   <p:clrMapOvr>
@@ -8529,6 +11266,514 @@
 </file>
 
 <file path=ppt/slides/slide7.xml><?xml version="1.0" encoding="utf-8"?>
+<p:sld xmlns:a="http://schemas.openxmlformats.org/drawingml/2006/main" xmlns:r="http://schemas.openxmlformats.org/officeDocument/2006/relationships" xmlns:p="http://schemas.openxmlformats.org/presentationml/2006/main">
+  <p:cSld>
+    <p:spTree>
+      <p:nvGrpSpPr>
+        <p:cNvPr id="1" name=""/>
+        <p:cNvGrpSpPr/>
+        <p:nvPr/>
+      </p:nvGrpSpPr>
+      <p:grpSpPr>
+        <a:xfrm>
+          <a:off x="0" y="0"/>
+          <a:ext cx="0" cy="0"/>
+          <a:chOff x="0" y="0"/>
+          <a:chExt cx="0" cy="0"/>
+        </a:xfrm>
+      </p:grpSpPr>
+      <p:sp>
+        <p:nvSpPr>
+          <p:cNvPr id="2" name="Text 0"/>
+          <p:cNvSpPr/>
+          <p:nvPr/>
+        </p:nvSpPr>
+        <p:spPr>
+          <a:xfrm>
+            <a:off x="640080" y="274320"/>
+            <a:ext cx="10881360" cy="384048"/>
+          </a:xfrm>
+          <a:prstGeom prst="rect">
+            <a:avLst/>
+          </a:prstGeom>
+          <a:noFill/>
+          <a:ln/>
+        </p:spPr>
+        <p:txBody>
+          <a:bodyPr wrap="square" lIns="0" tIns="0" rIns="0" bIns="0" rtlCol="0" anchor="ctr"/>
+          <a:lstStyle/>
+          <a:p>
+            <a:pPr marL="0" indent="0" algn="ctr">
+              <a:buNone/>
+            </a:pPr>
+            <a:r>
+              <a:rPr lang="en-US" sz="2500" b="1" dirty="0">
+                <a:solidFill>
+                  <a:srgbClr val="23488B"/>
+                </a:solidFill>
+                <a:latin typeface="Arial" pitchFamily="34" charset="0"/>
+                <a:ea typeface="Arial" pitchFamily="34" charset="-122"/>
+                <a:cs typeface="Arial" pitchFamily="34" charset="-120"/>
+              </a:rPr>
+              <a:t>UI and Result Snapshots</a:t>
+            </a:r>
+            <a:endParaRPr lang="en-US" sz="2500" dirty="0"/>
+          </a:p>
+        </p:txBody>
+      </p:sp>
+      <p:sp>
+        <p:nvSpPr>
+          <p:cNvPr id="3" name="Text 1"/>
+          <p:cNvSpPr/>
+          <p:nvPr/>
+        </p:nvSpPr>
+        <p:spPr>
+          <a:xfrm>
+            <a:off x="1005840" y="694944"/>
+            <a:ext cx="10149840" cy="219456"/>
+          </a:xfrm>
+          <a:prstGeom prst="rect">
+            <a:avLst/>
+          </a:prstGeom>
+          <a:noFill/>
+          <a:ln/>
+        </p:spPr>
+        <p:txBody>
+          <a:bodyPr wrap="square" lIns="0" tIns="0" rIns="0" bIns="0" rtlCol="0" anchor="ctr"/>
+          <a:lstStyle/>
+          <a:p>
+            <a:pPr marL="0" indent="0" algn="ctr">
+              <a:buNone/>
+            </a:pPr>
+            <a:r>
+              <a:rPr lang="en-US" sz="1050" i="1" dirty="0">
+                <a:solidFill>
+                  <a:srgbClr val="667A99"/>
+                </a:solidFill>
+                <a:latin typeface="Arial" pitchFamily="34" charset="0"/>
+                <a:ea typeface="Arial" pitchFamily="34" charset="-122"/>
+                <a:cs typeface="Arial" pitchFamily="34" charset="-120"/>
+              </a:rPr>
+              <a:t>Screens from the implemented prototype shown in the dissertation</a:t>
+            </a:r>
+            <a:endParaRPr lang="en-US" sz="1050" dirty="0"/>
+          </a:p>
+        </p:txBody>
+      </p:sp>
+      <p:sp>
+        <p:nvSpPr>
+          <p:cNvPr id="4" name="Shape 2"/>
+          <p:cNvSpPr/>
+          <p:nvPr/>
+        </p:nvSpPr>
+        <p:spPr>
+          <a:xfrm>
+            <a:off x="713232" y="1234439"/>
+            <a:ext cx="5440680" cy="4788243"/>
+          </a:xfrm>
+          <a:prstGeom prst="roundRect">
+            <a:avLst>
+              <a:gd name="adj" fmla="val 3524"/>
+            </a:avLst>
+          </a:prstGeom>
+          <a:solidFill>
+            <a:srgbClr val="FFFFFF"/>
+          </a:solidFill>
+          <a:ln w="13970">
+            <a:solidFill>
+              <a:srgbClr val="C8D9EA"/>
+            </a:solidFill>
+            <a:prstDash val="solid"/>
+          </a:ln>
+          <a:effectLst>
+            <a:outerShdw blurRad="15240" dist="12700" dir="2700000" algn="bl" rotWithShape="0">
+              <a:srgbClr val="000000">
+                <a:alpha val="12000"/>
+              </a:srgbClr>
+            </a:outerShdw>
+          </a:effectLst>
+        </p:spPr>
+      </p:sp>
+      <p:sp>
+        <p:nvSpPr>
+          <p:cNvPr id="5" name="Text 3"/>
+          <p:cNvSpPr/>
+          <p:nvPr/>
+        </p:nvSpPr>
+        <p:spPr>
+          <a:xfrm>
+            <a:off x="822960" y="1033272"/>
+            <a:ext cx="5221224" cy="146304"/>
+          </a:xfrm>
+          <a:prstGeom prst="rect">
+            <a:avLst/>
+          </a:prstGeom>
+          <a:noFill/>
+          <a:ln/>
+        </p:spPr>
+        <p:txBody>
+          <a:bodyPr wrap="square" lIns="0" tIns="0" rIns="0" bIns="0" rtlCol="0" anchor="ctr"/>
+          <a:lstStyle/>
+          <a:p>
+            <a:pPr marL="0" indent="0" algn="ctr">
+              <a:buNone/>
+            </a:pPr>
+            <a:r>
+              <a:rPr lang="en-US" sz="1350" b="1" dirty="0">
+                <a:solidFill>
+                  <a:srgbClr val="1E3F7A"/>
+                </a:solidFill>
+                <a:latin typeface="Arial" pitchFamily="34" charset="0"/>
+                <a:ea typeface="Arial" pitchFamily="34" charset="-122"/>
+                <a:cs typeface="Arial" pitchFamily="34" charset="-120"/>
+              </a:rPr>
+              <a:t>User &amp; account flow</a:t>
+            </a:r>
+            <a:endParaRPr lang="en-US" sz="1350" dirty="0"/>
+          </a:p>
+        </p:txBody>
+      </p:sp>
+      <p:sp>
+        <p:nvSpPr>
+          <p:cNvPr id="7" name="Shape 4"/>
+          <p:cNvSpPr/>
+          <p:nvPr/>
+        </p:nvSpPr>
+        <p:spPr>
+          <a:xfrm>
+            <a:off x="6035040" y="1234440"/>
+            <a:ext cx="5440680" cy="4788242"/>
+          </a:xfrm>
+          <a:prstGeom prst="roundRect">
+            <a:avLst>
+              <a:gd name="adj" fmla="val 3524"/>
+            </a:avLst>
+          </a:prstGeom>
+          <a:solidFill>
+            <a:srgbClr val="FFFFFF"/>
+          </a:solidFill>
+          <a:ln w="13970">
+            <a:solidFill>
+              <a:srgbClr val="C8D9EA"/>
+            </a:solidFill>
+            <a:prstDash val="solid"/>
+          </a:ln>
+          <a:effectLst>
+            <a:outerShdw blurRad="15240" dist="12700" dir="2700000" algn="bl" rotWithShape="0">
+              <a:srgbClr val="000000">
+                <a:alpha val="12000"/>
+              </a:srgbClr>
+            </a:outerShdw>
+          </a:effectLst>
+        </p:spPr>
+      </p:sp>
+      <p:sp>
+        <p:nvSpPr>
+          <p:cNvPr id="8" name="Text 5"/>
+          <p:cNvSpPr/>
+          <p:nvPr/>
+        </p:nvSpPr>
+        <p:spPr>
+          <a:xfrm>
+            <a:off x="6144768" y="1033272"/>
+            <a:ext cx="5221224" cy="146304"/>
+          </a:xfrm>
+          <a:prstGeom prst="rect">
+            <a:avLst/>
+          </a:prstGeom>
+          <a:noFill/>
+          <a:ln/>
+        </p:spPr>
+        <p:txBody>
+          <a:bodyPr wrap="square" lIns="0" tIns="0" rIns="0" bIns="0" rtlCol="0" anchor="ctr"/>
+          <a:lstStyle/>
+          <a:p>
+            <a:pPr marL="0" indent="0" algn="ctr">
+              <a:buNone/>
+            </a:pPr>
+            <a:r>
+              <a:rPr lang="en-US" sz="1350" b="1" dirty="0">
+                <a:solidFill>
+                  <a:srgbClr val="1E3F7A"/>
+                </a:solidFill>
+                <a:latin typeface="Arial" pitchFamily="34" charset="0"/>
+                <a:ea typeface="Arial" pitchFamily="34" charset="-122"/>
+                <a:cs typeface="Arial" pitchFamily="34" charset="-120"/>
+              </a:rPr>
+              <a:t>Character Matching feedback</a:t>
+            </a:r>
+            <a:endParaRPr lang="en-US" sz="1350" dirty="0"/>
+          </a:p>
+        </p:txBody>
+      </p:sp>
+      <p:pic>
+        <p:nvPicPr>
+          <p:cNvPr id="16" name="Image 4" descr="/mnt/data/work/template_media/image2.jpg"/>
+          <p:cNvPicPr>
+            <a:picLocks noChangeAspect="1"/>
+          </p:cNvPicPr>
+          <p:nvPr/>
+        </p:nvPicPr>
+        <p:blipFill>
+          <a:blip r:embed="rId3"/>
+          <a:srcRect t="44800" b="44800"/>
+          <a:stretch/>
+        </p:blipFill>
+        <p:spPr>
+          <a:xfrm>
+            <a:off x="0" y="6144768"/>
+            <a:ext cx="12191695" cy="713232"/>
+          </a:xfrm>
+          <a:prstGeom prst="rect">
+            <a:avLst/>
+          </a:prstGeom>
+        </p:spPr>
+      </p:pic>
+      <p:pic>
+        <p:nvPicPr>
+          <p:cNvPr id="17" name="Image 5" descr="/mnt/data/work/qm_logo_transparent.png"/>
+          <p:cNvPicPr>
+            <a:picLocks noChangeAspect="1"/>
+          </p:cNvPicPr>
+          <p:nvPr/>
+        </p:nvPicPr>
+        <p:blipFill>
+          <a:blip r:embed="rId4"/>
+          <a:stretch>
+            <a:fillRect/>
+          </a:stretch>
+        </p:blipFill>
+        <p:spPr>
+          <a:xfrm>
+            <a:off x="580644" y="6236208"/>
+            <a:ext cx="1389888" cy="438912"/>
+          </a:xfrm>
+          <a:prstGeom prst="rect">
+            <a:avLst/>
+          </a:prstGeom>
+        </p:spPr>
+      </p:pic>
+      <p:sp>
+        <p:nvSpPr>
+          <p:cNvPr id="18" name="Text 10"/>
+          <p:cNvSpPr/>
+          <p:nvPr/>
+        </p:nvSpPr>
+        <p:spPr>
+          <a:xfrm>
+            <a:off x="11688775" y="6309360"/>
+            <a:ext cx="228600" cy="201168"/>
+          </a:xfrm>
+          <a:prstGeom prst="rect">
+            <a:avLst/>
+          </a:prstGeom>
+          <a:noFill/>
+          <a:ln/>
+        </p:spPr>
+        <p:txBody>
+          <a:bodyPr wrap="square" lIns="0" tIns="0" rIns="0" bIns="0" rtlCol="0" anchor="ctr"/>
+          <a:lstStyle/>
+          <a:p>
+            <a:pPr marL="0" indent="0" algn="r">
+              <a:buNone/>
+            </a:pPr>
+            <a:r>
+              <a:rPr lang="en-US" sz="1100" dirty="0">
+                <a:solidFill>
+                  <a:srgbClr val="FFFFFF"/>
+                </a:solidFill>
+                <a:latin typeface="Arial" pitchFamily="34" charset="0"/>
+                <a:ea typeface="Arial" pitchFamily="34" charset="-122"/>
+                <a:cs typeface="Arial" pitchFamily="34" charset="-120"/>
+              </a:rPr>
+              <a:t>7</a:t>
+            </a:r>
+            <a:endParaRPr lang="en-US" sz="1100" dirty="0"/>
+          </a:p>
+        </p:txBody>
+      </p:sp>
+      <p:pic>
+        <p:nvPicPr>
+          <p:cNvPr id="21" name="图片 20">
+            <a:extLst>
+              <a:ext uri="{FF2B5EF4-FFF2-40B4-BE49-F238E27FC236}">
+                <a16:creationId xmlns:a16="http://schemas.microsoft.com/office/drawing/2014/main" id="{266628F4-1D17-4653-BC89-78BBF12B40E1}"/>
+              </a:ext>
+            </a:extLst>
+          </p:cNvPr>
+          <p:cNvPicPr>
+            <a:picLocks noChangeAspect="1"/>
+          </p:cNvPicPr>
+          <p:nvPr/>
+        </p:nvPicPr>
+        <p:blipFill>
+          <a:blip r:embed="rId5"/>
+          <a:stretch>
+            <a:fillRect/>
+          </a:stretch>
+        </p:blipFill>
+        <p:spPr>
+          <a:xfrm>
+            <a:off x="3328142" y="1321058"/>
+            <a:ext cx="2495322" cy="4615005"/>
+          </a:xfrm>
+          <a:prstGeom prst="rect">
+            <a:avLst/>
+          </a:prstGeom>
+        </p:spPr>
+      </p:pic>
+      <p:pic>
+        <p:nvPicPr>
+          <p:cNvPr id="23" name="图片 22">
+            <a:extLst>
+              <a:ext uri="{FF2B5EF4-FFF2-40B4-BE49-F238E27FC236}">
+                <a16:creationId xmlns:a16="http://schemas.microsoft.com/office/drawing/2014/main" id="{FB77EFC1-0180-44BF-B82F-FEC3E9A9055B}"/>
+              </a:ext>
+            </a:extLst>
+          </p:cNvPr>
+          <p:cNvPicPr>
+            <a:picLocks noChangeAspect="1"/>
+          </p:cNvPicPr>
+          <p:nvPr/>
+        </p:nvPicPr>
+        <p:blipFill>
+          <a:blip r:embed="rId6"/>
+          <a:stretch>
+            <a:fillRect/>
+          </a:stretch>
+        </p:blipFill>
+        <p:spPr>
+          <a:xfrm>
+            <a:off x="832821" y="1321058"/>
+            <a:ext cx="2495321" cy="4615004"/>
+          </a:xfrm>
+          <a:prstGeom prst="rect">
+            <a:avLst/>
+          </a:prstGeom>
+        </p:spPr>
+      </p:pic>
+      <p:pic>
+        <p:nvPicPr>
+          <p:cNvPr id="22" name="图片 21">
+            <a:extLst>
+              <a:ext uri="{FF2B5EF4-FFF2-40B4-BE49-F238E27FC236}">
+                <a16:creationId xmlns:a16="http://schemas.microsoft.com/office/drawing/2014/main" id="{51F286B5-EC38-46DC-9287-BC44DE0B514E}"/>
+              </a:ext>
+            </a:extLst>
+          </p:cNvPr>
+          <p:cNvPicPr>
+            <a:picLocks noChangeAspect="1"/>
+          </p:cNvPicPr>
+          <p:nvPr/>
+        </p:nvPicPr>
+        <p:blipFill>
+          <a:blip r:embed="rId7"/>
+          <a:stretch>
+            <a:fillRect/>
+          </a:stretch>
+        </p:blipFill>
+        <p:spPr>
+          <a:xfrm>
+            <a:off x="8778607" y="1298448"/>
+            <a:ext cx="2507548" cy="4637617"/>
+          </a:xfrm>
+          <a:prstGeom prst="rect">
+            <a:avLst/>
+          </a:prstGeom>
+        </p:spPr>
+      </p:pic>
+      <p:pic>
+        <p:nvPicPr>
+          <p:cNvPr id="19" name="Picture 12" descr="8a7c0663-f7b2-4937-9eb5-b4aeb9d07c89_no_bg.png">
+            <a:extLst>
+              <a:ext uri="{FF2B5EF4-FFF2-40B4-BE49-F238E27FC236}">
+                <a16:creationId xmlns:a16="http://schemas.microsoft.com/office/drawing/2014/main" id="{5D1F385F-AC28-4745-B997-B80C1721D69A}"/>
+              </a:ext>
+            </a:extLst>
+          </p:cNvPr>
+          <p:cNvPicPr>
+            <a:picLocks noChangeAspect="1"/>
+          </p:cNvPicPr>
+          <p:nvPr/>
+        </p:nvPicPr>
+        <p:blipFill>
+          <a:blip r:embed="rId8">
+            <a:extLst>
+              <a:ext uri="{BEBA8EAE-BF5A-486C-A8C5-ECC9F3942E4B}">
+                <a14:imgProps xmlns:a14="http://schemas.microsoft.com/office/drawing/2010/main">
+                  <a14:imgLayer r:embed="rId9">
+                    <a14:imgEffect>
+                      <a14:backgroundRemoval t="9961" b="89941" l="9961" r="91211">
+                        <a14:foregroundMark x1="31055" y1="44043" x2="34180" y2="35938"/>
+                        <a14:foregroundMark x1="51465" y1="40918" x2="54590" y2="44629"/>
+                        <a14:foregroundMark x1="23633" y1="40918" x2="30371" y2="47168"/>
+                        <a14:foregroundMark x1="28516" y1="44043" x2="27344" y2="40332"/>
+                        <a14:foregroundMark x1="90527" y1="63184" x2="91211" y2="67578"/>
+                      </a14:backgroundRemoval>
+                    </a14:imgEffect>
+                  </a14:imgLayer>
+                </a14:imgProps>
+              </a:ext>
+            </a:extLst>
+          </a:blip>
+          <a:stretch>
+            <a:fillRect/>
+          </a:stretch>
+        </p:blipFill>
+        <p:spPr>
+          <a:xfrm>
+            <a:off x="10609783" y="5504688"/>
+            <a:ext cx="1143000" cy="1143000"/>
+          </a:xfrm>
+          <a:prstGeom prst="rect">
+            <a:avLst/>
+          </a:prstGeom>
+        </p:spPr>
+      </p:pic>
+      <p:pic>
+        <p:nvPicPr>
+          <p:cNvPr id="25" name="图片 24">
+            <a:extLst>
+              <a:ext uri="{FF2B5EF4-FFF2-40B4-BE49-F238E27FC236}">
+                <a16:creationId xmlns:a16="http://schemas.microsoft.com/office/drawing/2014/main" id="{87ABA083-CF95-4FB5-A2F0-D23D776590BD}"/>
+              </a:ext>
+            </a:extLst>
+          </p:cNvPr>
+          <p:cNvPicPr>
+            <a:picLocks noChangeAspect="1"/>
+          </p:cNvPicPr>
+          <p:nvPr/>
+        </p:nvPicPr>
+        <p:blipFill>
+          <a:blip r:embed="rId10"/>
+          <a:stretch>
+            <a:fillRect/>
+          </a:stretch>
+        </p:blipFill>
+        <p:spPr>
+          <a:xfrm>
+            <a:off x="6273501" y="1298449"/>
+            <a:ext cx="2507547" cy="4637614"/>
+          </a:xfrm>
+          <a:prstGeom prst="rect">
+            <a:avLst/>
+          </a:prstGeom>
+        </p:spPr>
+      </p:pic>
+    </p:spTree>
+    <p:extLst>
+      <p:ext uri="{BB962C8B-B14F-4D97-AF65-F5344CB8AC3E}">
+        <p14:creationId xmlns:p14="http://schemas.microsoft.com/office/powerpoint/2010/main" val="2906853894"/>
+      </p:ext>
+    </p:extLst>
+  </p:cSld>
+  <p:clrMapOvr>
+    <a:masterClrMapping/>
+  </p:clrMapOvr>
+</p:sld>
+</file>
+
+<file path=ppt/slides/slide8.xml><?xml version="1.0" encoding="utf-8"?>
 <p:sld xmlns:a="http://schemas.openxmlformats.org/drawingml/2006/main" xmlns:r="http://schemas.openxmlformats.org/officeDocument/2006/relationships" xmlns:p="http://schemas.openxmlformats.org/presentationml/2006/main">
   <p:cSld name="Slide 7">
     <p:spTree>
@@ -8625,14 +11870,14 @@
       </p:sp>
       <p:sp>
         <p:nvSpPr>
-          <p:cNvPr id="4" name="Shape 2"/>
-          <p:cNvSpPr/>
-          <p:nvPr/>
-        </p:nvSpPr>
-        <p:spPr>
-          <a:xfrm>
-            <a:off x="713232" y="1234440"/>
-            <a:ext cx="5440680" cy="2075688"/>
+          <p:cNvPr id="10" name="Shape 6"/>
+          <p:cNvSpPr/>
+          <p:nvPr/>
+        </p:nvSpPr>
+        <p:spPr>
+          <a:xfrm>
+            <a:off x="713232" y="1174386"/>
+            <a:ext cx="5440680" cy="4878942"/>
           </a:xfrm>
           <a:prstGeom prst="roundRect">
             <a:avLst>
@@ -8659,13 +11904,13 @@
       </p:sp>
       <p:sp>
         <p:nvSpPr>
-          <p:cNvPr id="5" name="Text 3"/>
-          <p:cNvSpPr/>
-          <p:nvPr/>
-        </p:nvSpPr>
-        <p:spPr>
-          <a:xfrm>
-            <a:off x="822960" y="1033272"/>
+          <p:cNvPr id="11" name="Text 7"/>
+          <p:cNvSpPr/>
+          <p:nvPr/>
+        </p:nvSpPr>
+        <p:spPr>
+          <a:xfrm>
+            <a:off x="822960" y="973218"/>
             <a:ext cx="5221224" cy="146304"/>
           </a:xfrm>
           <a:prstGeom prst="rect">
@@ -8690,46 +11935,22 @@
                 <a:ea typeface="Arial" pitchFamily="34" charset="-122"/>
                 <a:cs typeface="Arial" pitchFamily="34" charset="-120"/>
               </a:rPr>
-              <a:t>User &amp; account flow</a:t>
+              <a:t>Pronunciation evaluation</a:t>
             </a:r>
             <a:endParaRPr lang="en-US" sz="1350" dirty="0"/>
           </a:p>
         </p:txBody>
       </p:sp>
-      <p:pic>
-        <p:nvPicPr>
-          <p:cNvPr id="6" name="Image 0" descr="/mnt/data/work/crops3/user_pair.png"/>
-          <p:cNvPicPr>
-            <a:picLocks noChangeAspect="1"/>
-          </p:cNvPicPr>
-          <p:nvPr/>
-        </p:nvPicPr>
-        <p:blipFill>
-          <a:blip r:embed="rId3"/>
-          <a:stretch>
-            <a:fillRect/>
-          </a:stretch>
-        </p:blipFill>
-        <p:spPr>
-          <a:xfrm>
-            <a:off x="2300191" y="1307592"/>
-            <a:ext cx="2266763" cy="1929384"/>
-          </a:xfrm>
-          <a:prstGeom prst="rect">
-            <a:avLst/>
-          </a:prstGeom>
-        </p:spPr>
-      </p:pic>
-      <p:sp>
-        <p:nvSpPr>
-          <p:cNvPr id="7" name="Shape 4"/>
-          <p:cNvSpPr/>
-          <p:nvPr/>
-        </p:nvSpPr>
-        <p:spPr>
-          <a:xfrm>
-            <a:off x="6035040" y="1234440"/>
-            <a:ext cx="5440680" cy="2075688"/>
+      <p:sp>
+        <p:nvSpPr>
+          <p:cNvPr id="13" name="Shape 8"/>
+          <p:cNvSpPr/>
+          <p:nvPr/>
+        </p:nvSpPr>
+        <p:spPr>
+          <a:xfrm>
+            <a:off x="6035040" y="1211208"/>
+            <a:ext cx="5440680" cy="4864979"/>
           </a:xfrm>
           <a:prstGeom prst="roundRect">
             <a:avLst>
@@ -8756,13 +11977,13 @@
       </p:sp>
       <p:sp>
         <p:nvSpPr>
-          <p:cNvPr id="8" name="Text 5"/>
-          <p:cNvSpPr/>
-          <p:nvPr/>
-        </p:nvSpPr>
-        <p:spPr>
-          <a:xfrm>
-            <a:off x="6144768" y="1033272"/>
+          <p:cNvPr id="14" name="Text 9"/>
+          <p:cNvSpPr/>
+          <p:nvPr/>
+        </p:nvSpPr>
+        <p:spPr>
+          <a:xfrm>
+            <a:off x="6144768" y="996696"/>
             <a:ext cx="5221224" cy="146304"/>
           </a:xfrm>
           <a:prstGeom prst="rect">
@@ -8787,7 +12008,7 @@
                 <a:ea typeface="Arial" pitchFamily="34" charset="-122"/>
                 <a:cs typeface="Arial" pitchFamily="34" charset="-120"/>
               </a:rPr>
-              <a:t>Character Matching feedback</a:t>
+              <a:t>Word Puzzle interaction</a:t>
             </a:r>
             <a:endParaRPr lang="en-US" sz="1350" dirty="0"/>
           </a:p>
@@ -8795,7 +12016,30 @@
       </p:sp>
       <p:pic>
         <p:nvPicPr>
-          <p:cNvPr id="9" name="Image 1" descr="/mnt/data/work/crops3/char_pair.png"/>
+          <p:cNvPr id="16" name="Image 4" descr="/mnt/data/work/template_media/image2.jpg"/>
+          <p:cNvPicPr>
+            <a:picLocks noChangeAspect="1"/>
+          </p:cNvPicPr>
+          <p:nvPr/>
+        </p:nvPicPr>
+        <p:blipFill>
+          <a:blip r:embed="rId3"/>
+          <a:srcRect t="44800" b="44800"/>
+          <a:stretch/>
+        </p:blipFill>
+        <p:spPr>
+          <a:xfrm>
+            <a:off x="0" y="6144768"/>
+            <a:ext cx="12191695" cy="713232"/>
+          </a:xfrm>
+          <a:prstGeom prst="rect">
+            <a:avLst/>
+          </a:prstGeom>
+        </p:spPr>
+      </p:pic>
+      <p:pic>
+        <p:nvPicPr>
+          <p:cNvPr id="17" name="Image 5" descr="/mnt/data/work/qm_logo_transparent.png"/>
           <p:cNvPicPr>
             <a:picLocks noChangeAspect="1"/>
           </p:cNvPicPr>
@@ -8809,8 +12053,8 @@
         </p:blipFill>
         <p:spPr>
           <a:xfrm>
-            <a:off x="7619187" y="1307592"/>
-            <a:ext cx="2272386" cy="1929384"/>
+            <a:off x="580644" y="6236208"/>
+            <a:ext cx="1389888" cy="438912"/>
           </a:xfrm>
           <a:prstGeom prst="rect">
             <a:avLst/>
@@ -8819,14 +12063,323 @@
       </p:pic>
       <p:sp>
         <p:nvSpPr>
+          <p:cNvPr id="18" name="Text 10"/>
+          <p:cNvSpPr/>
+          <p:nvPr/>
+        </p:nvSpPr>
+        <p:spPr>
+          <a:xfrm>
+            <a:off x="11688775" y="6309360"/>
+            <a:ext cx="228600" cy="201168"/>
+          </a:xfrm>
+          <a:prstGeom prst="rect">
+            <a:avLst/>
+          </a:prstGeom>
+          <a:noFill/>
+          <a:ln/>
+        </p:spPr>
+        <p:txBody>
+          <a:bodyPr wrap="square" lIns="0" tIns="0" rIns="0" bIns="0" rtlCol="0" anchor="ctr"/>
+          <a:lstStyle/>
+          <a:p>
+            <a:pPr marL="0" indent="0" algn="r">
+              <a:buNone/>
+            </a:pPr>
+            <a:r>
+              <a:rPr lang="en-US" sz="1100" dirty="0">
+                <a:solidFill>
+                  <a:srgbClr val="FFFFFF"/>
+                </a:solidFill>
+                <a:latin typeface="Arial" pitchFamily="34" charset="0"/>
+                <a:cs typeface="Arial" pitchFamily="34" charset="-120"/>
+              </a:rPr>
+              <a:t>8</a:t>
+            </a:r>
+            <a:endParaRPr lang="en-US" sz="1100" dirty="0"/>
+          </a:p>
+        </p:txBody>
+      </p:sp>
+      <p:pic>
+        <p:nvPicPr>
+          <p:cNvPr id="25" name="图片 24">
+            <a:extLst>
+              <a:ext uri="{FF2B5EF4-FFF2-40B4-BE49-F238E27FC236}">
+                <a16:creationId xmlns:a16="http://schemas.microsoft.com/office/drawing/2014/main" id="{EF117265-FF5A-4BD0-A630-62F7818F71B0}"/>
+              </a:ext>
+            </a:extLst>
+          </p:cNvPr>
+          <p:cNvPicPr>
+            <a:picLocks noChangeAspect="1"/>
+          </p:cNvPicPr>
+          <p:nvPr/>
+        </p:nvPicPr>
+        <p:blipFill>
+          <a:blip r:embed="rId5"/>
+          <a:stretch>
+            <a:fillRect/>
+          </a:stretch>
+        </p:blipFill>
+        <p:spPr>
+          <a:xfrm>
+            <a:off x="794345" y="1281272"/>
+            <a:ext cx="2543091" cy="4703352"/>
+          </a:xfrm>
+          <a:prstGeom prst="rect">
+            <a:avLst/>
+          </a:prstGeom>
+        </p:spPr>
+      </p:pic>
+      <p:pic>
+        <p:nvPicPr>
+          <p:cNvPr id="27" name="图片 26">
+            <a:extLst>
+              <a:ext uri="{FF2B5EF4-FFF2-40B4-BE49-F238E27FC236}">
+                <a16:creationId xmlns:a16="http://schemas.microsoft.com/office/drawing/2014/main" id="{B17730A3-2669-4504-8140-DECD0D3BD588}"/>
+              </a:ext>
+            </a:extLst>
+          </p:cNvPr>
+          <p:cNvPicPr>
+            <a:picLocks noChangeAspect="1"/>
+          </p:cNvPicPr>
+          <p:nvPr/>
+        </p:nvPicPr>
+        <p:blipFill>
+          <a:blip r:embed="rId6"/>
+          <a:stretch>
+            <a:fillRect/>
+          </a:stretch>
+        </p:blipFill>
+        <p:spPr>
+          <a:xfrm>
+            <a:off x="3337437" y="1270769"/>
+            <a:ext cx="2551309" cy="4718550"/>
+          </a:xfrm>
+          <a:prstGeom prst="rect">
+            <a:avLst/>
+          </a:prstGeom>
+        </p:spPr>
+      </p:pic>
+      <p:pic>
+        <p:nvPicPr>
+          <p:cNvPr id="31" name="图片 30">
+            <a:extLst>
+              <a:ext uri="{FF2B5EF4-FFF2-40B4-BE49-F238E27FC236}">
+                <a16:creationId xmlns:a16="http://schemas.microsoft.com/office/drawing/2014/main" id="{5EAEC3AB-6D4B-404A-BCA4-28D391D078CB}"/>
+              </a:ext>
+            </a:extLst>
+          </p:cNvPr>
+          <p:cNvPicPr>
+            <a:picLocks noChangeAspect="1"/>
+          </p:cNvPicPr>
+          <p:nvPr/>
+        </p:nvPicPr>
+        <p:blipFill>
+          <a:blip r:embed="rId7"/>
+          <a:stretch>
+            <a:fillRect/>
+          </a:stretch>
+        </p:blipFill>
+        <p:spPr>
+          <a:xfrm>
+            <a:off x="6206611" y="1270769"/>
+            <a:ext cx="2548769" cy="4713854"/>
+          </a:xfrm>
+          <a:prstGeom prst="rect">
+            <a:avLst/>
+          </a:prstGeom>
+        </p:spPr>
+      </p:pic>
+      <p:pic>
+        <p:nvPicPr>
+          <p:cNvPr id="33" name="图片 32">
+            <a:extLst>
+              <a:ext uri="{FF2B5EF4-FFF2-40B4-BE49-F238E27FC236}">
+                <a16:creationId xmlns:a16="http://schemas.microsoft.com/office/drawing/2014/main" id="{5701E11B-011E-416E-9CB0-456913868EDF}"/>
+              </a:ext>
+            </a:extLst>
+          </p:cNvPr>
+          <p:cNvPicPr>
+            <a:picLocks noChangeAspect="1"/>
+          </p:cNvPicPr>
+          <p:nvPr/>
+        </p:nvPicPr>
+        <p:blipFill>
+          <a:blip r:embed="rId8"/>
+          <a:stretch>
+            <a:fillRect/>
+          </a:stretch>
+        </p:blipFill>
+        <p:spPr>
+          <a:xfrm>
+            <a:off x="8755380" y="1266074"/>
+            <a:ext cx="2553846" cy="4723245"/>
+          </a:xfrm>
+          <a:prstGeom prst="rect">
+            <a:avLst/>
+          </a:prstGeom>
+        </p:spPr>
+      </p:pic>
+      <p:pic>
+        <p:nvPicPr>
+          <p:cNvPr id="19" name="Picture 12" descr="8a7c0663-f7b2-4937-9eb5-b4aeb9d07c89_no_bg.png">
+            <a:extLst>
+              <a:ext uri="{FF2B5EF4-FFF2-40B4-BE49-F238E27FC236}">
+                <a16:creationId xmlns:a16="http://schemas.microsoft.com/office/drawing/2014/main" id="{5D1F385F-AC28-4745-B997-B80C1721D69A}"/>
+              </a:ext>
+            </a:extLst>
+          </p:cNvPr>
+          <p:cNvPicPr>
+            <a:picLocks noChangeAspect="1"/>
+          </p:cNvPicPr>
+          <p:nvPr/>
+        </p:nvPicPr>
+        <p:blipFill>
+          <a:blip r:embed="rId9">
+            <a:extLst>
+              <a:ext uri="{BEBA8EAE-BF5A-486C-A8C5-ECC9F3942E4B}">
+                <a14:imgProps xmlns:a14="http://schemas.microsoft.com/office/drawing/2010/main">
+                  <a14:imgLayer r:embed="rId10">
+                    <a14:imgEffect>
+                      <a14:backgroundRemoval t="9961" b="89941" l="9961" r="91211">
+                        <a14:foregroundMark x1="31055" y1="44043" x2="34180" y2="35938"/>
+                        <a14:foregroundMark x1="51465" y1="40918" x2="54590" y2="44629"/>
+                        <a14:foregroundMark x1="23633" y1="40918" x2="30371" y2="47168"/>
+                        <a14:foregroundMark x1="28516" y1="44043" x2="27344" y2="40332"/>
+                        <a14:foregroundMark x1="90527" y1="63184" x2="91211" y2="67578"/>
+                      </a14:backgroundRemoval>
+                    </a14:imgEffect>
+                  </a14:imgLayer>
+                </a14:imgProps>
+              </a:ext>
+            </a:extLst>
+          </a:blip>
+          <a:stretch>
+            <a:fillRect/>
+          </a:stretch>
+        </p:blipFill>
+        <p:spPr>
+          <a:xfrm>
+            <a:off x="10609783" y="5504688"/>
+            <a:ext cx="1143000" cy="1143000"/>
+          </a:xfrm>
+          <a:prstGeom prst="rect">
+            <a:avLst/>
+          </a:prstGeom>
+        </p:spPr>
+      </p:pic>
+    </p:spTree>
+  </p:cSld>
+  <p:clrMapOvr>
+    <a:masterClrMapping/>
+  </p:clrMapOvr>
+</p:sld>
+</file>
+
+<file path=ppt/slides/slide9.xml><?xml version="1.0" encoding="utf-8"?>
+<p:sld xmlns:a="http://schemas.openxmlformats.org/drawingml/2006/main" xmlns:r="http://schemas.openxmlformats.org/officeDocument/2006/relationships" xmlns:p="http://schemas.openxmlformats.org/presentationml/2006/main">
+  <p:cSld>
+    <p:spTree>
+      <p:nvGrpSpPr>
+        <p:cNvPr id="1" name=""/>
+        <p:cNvGrpSpPr/>
+        <p:nvPr/>
+      </p:nvGrpSpPr>
+      <p:grpSpPr>
+        <a:xfrm>
+          <a:off x="0" y="0"/>
+          <a:ext cx="0" cy="0"/>
+          <a:chOff x="0" y="0"/>
+          <a:chExt cx="0" cy="0"/>
+        </a:xfrm>
+      </p:grpSpPr>
+      <p:sp>
+        <p:nvSpPr>
+          <p:cNvPr id="2" name="Text 0"/>
+          <p:cNvSpPr/>
+          <p:nvPr/>
+        </p:nvSpPr>
+        <p:spPr>
+          <a:xfrm>
+            <a:off x="640080" y="274320"/>
+            <a:ext cx="10881360" cy="384048"/>
+          </a:xfrm>
+          <a:prstGeom prst="rect">
+            <a:avLst/>
+          </a:prstGeom>
+          <a:noFill/>
+          <a:ln/>
+        </p:spPr>
+        <p:txBody>
+          <a:bodyPr wrap="square" lIns="0" tIns="0" rIns="0" bIns="0" rtlCol="0" anchor="ctr"/>
+          <a:lstStyle/>
+          <a:p>
+            <a:pPr marL="0" indent="0" algn="ctr">
+              <a:buNone/>
+            </a:pPr>
+            <a:r>
+              <a:rPr lang="en-US" sz="2500" b="1" dirty="0">
+                <a:solidFill>
+                  <a:srgbClr val="23488B"/>
+                </a:solidFill>
+                <a:latin typeface="Arial" pitchFamily="34" charset="0"/>
+                <a:ea typeface="Arial" pitchFamily="34" charset="-122"/>
+                <a:cs typeface="Arial" pitchFamily="34" charset="-120"/>
+              </a:rPr>
+              <a:t>UI and Result Snapshots</a:t>
+            </a:r>
+            <a:endParaRPr lang="en-US" sz="2500" dirty="0"/>
+          </a:p>
+        </p:txBody>
+      </p:sp>
+      <p:sp>
+        <p:nvSpPr>
+          <p:cNvPr id="3" name="Text 1"/>
+          <p:cNvSpPr/>
+          <p:nvPr/>
+        </p:nvSpPr>
+        <p:spPr>
+          <a:xfrm>
+            <a:off x="1005840" y="694944"/>
+            <a:ext cx="10149840" cy="219456"/>
+          </a:xfrm>
+          <a:prstGeom prst="rect">
+            <a:avLst/>
+          </a:prstGeom>
+          <a:noFill/>
+          <a:ln/>
+        </p:spPr>
+        <p:txBody>
+          <a:bodyPr wrap="square" lIns="0" tIns="0" rIns="0" bIns="0" rtlCol="0" anchor="ctr"/>
+          <a:lstStyle/>
+          <a:p>
+            <a:pPr marL="0" indent="0" algn="ctr">
+              <a:buNone/>
+            </a:pPr>
+            <a:r>
+              <a:rPr lang="en-US" sz="1050" i="1" dirty="0">
+                <a:solidFill>
+                  <a:srgbClr val="667A99"/>
+                </a:solidFill>
+                <a:latin typeface="Arial" pitchFamily="34" charset="0"/>
+                <a:ea typeface="Arial" pitchFamily="34" charset="-122"/>
+                <a:cs typeface="Arial" pitchFamily="34" charset="-120"/>
+              </a:rPr>
+              <a:t>Screens from the implemented prototype shown in the dissertation</a:t>
+            </a:r>
+            <a:endParaRPr lang="en-US" sz="1050" dirty="0"/>
+          </a:p>
+        </p:txBody>
+      </p:sp>
+      <p:sp>
+        <p:nvSpPr>
           <p:cNvPr id="10" name="Shape 6"/>
           <p:cNvSpPr/>
           <p:nvPr/>
         </p:nvSpPr>
         <p:spPr>
           <a:xfrm>
-            <a:off x="713232" y="3584448"/>
-            <a:ext cx="5440680" cy="2075688"/>
+            <a:off x="713232" y="1174386"/>
+            <a:ext cx="10808208" cy="4878942"/>
           </a:xfrm>
           <a:prstGeom prst="roundRect">
             <a:avLst>
@@ -8859,7 +12412,7 @@
         </p:nvSpPr>
         <p:spPr>
           <a:xfrm>
-            <a:off x="822960" y="3383280"/>
+            <a:off x="3380809" y="982362"/>
             <a:ext cx="5221224" cy="146304"/>
           </a:xfrm>
           <a:prstGeom prst="rect">
@@ -8876,7 +12429,7 @@
               <a:buNone/>
             </a:pPr>
             <a:r>
-              <a:rPr lang="en-US" sz="1350" b="1" dirty="0">
+              <a:rPr lang="en-US" altLang="zh-CN" sz="1400" b="1" dirty="0">
                 <a:solidFill>
                   <a:srgbClr val="1E3F7A"/>
                 </a:solidFill>
@@ -8884,133 +12437,12 @@
                 <a:ea typeface="Arial" pitchFamily="34" charset="-122"/>
                 <a:cs typeface="Arial" pitchFamily="34" charset="-120"/>
               </a:rPr>
-              <a:t>Pronunciation evaluation</a:t>
-            </a:r>
-            <a:endParaRPr lang="en-US" sz="1350" dirty="0"/>
-          </a:p>
-        </p:txBody>
-      </p:sp>
-      <p:pic>
-        <p:nvPicPr>
-          <p:cNvPr id="12" name="Image 2" descr="/mnt/data/work/crops3/pron_pair.png"/>
-          <p:cNvPicPr>
-            <a:picLocks noChangeAspect="1"/>
-          </p:cNvPicPr>
-          <p:nvPr/>
-        </p:nvPicPr>
-        <p:blipFill>
-          <a:blip r:embed="rId5"/>
-          <a:stretch>
-            <a:fillRect/>
-          </a:stretch>
-        </p:blipFill>
-        <p:spPr>
-          <a:xfrm>
-            <a:off x="2318817" y="3657600"/>
-            <a:ext cx="2229510" cy="1929384"/>
-          </a:xfrm>
-          <a:prstGeom prst="rect">
-            <a:avLst/>
-          </a:prstGeom>
-        </p:spPr>
-      </p:pic>
-      <p:sp>
-        <p:nvSpPr>
-          <p:cNvPr id="13" name="Shape 8"/>
-          <p:cNvSpPr/>
-          <p:nvPr/>
-        </p:nvSpPr>
-        <p:spPr>
-          <a:xfrm>
-            <a:off x="6035040" y="3584448"/>
-            <a:ext cx="5440680" cy="2075688"/>
-          </a:xfrm>
-          <a:prstGeom prst="roundRect">
-            <a:avLst>
-              <a:gd name="adj" fmla="val 3524"/>
-            </a:avLst>
-          </a:prstGeom>
-          <a:solidFill>
-            <a:srgbClr val="FFFFFF"/>
-          </a:solidFill>
-          <a:ln w="13970">
-            <a:solidFill>
-              <a:srgbClr val="C8D9EA"/>
-            </a:solidFill>
-            <a:prstDash val="solid"/>
-          </a:ln>
-          <a:effectLst>
-            <a:outerShdw blurRad="15240" dist="12700" dir="2700000" algn="bl" rotWithShape="0">
-              <a:srgbClr val="000000">
-                <a:alpha val="12000"/>
-              </a:srgbClr>
-            </a:outerShdw>
-          </a:effectLst>
-        </p:spPr>
-      </p:sp>
-      <p:sp>
-        <p:nvSpPr>
-          <p:cNvPr id="14" name="Text 9"/>
-          <p:cNvSpPr/>
-          <p:nvPr/>
-        </p:nvSpPr>
-        <p:spPr>
-          <a:xfrm>
-            <a:off x="6144768" y="3383280"/>
-            <a:ext cx="5221224" cy="146304"/>
-          </a:xfrm>
-          <a:prstGeom prst="rect">
-            <a:avLst/>
-          </a:prstGeom>
-          <a:noFill/>
-          <a:ln/>
-        </p:spPr>
-        <p:txBody>
-          <a:bodyPr wrap="square" lIns="0" tIns="0" rIns="0" bIns="0" rtlCol="0" anchor="ctr"/>
-          <a:lstStyle/>
-          <a:p>
-            <a:pPr marL="0" indent="0" algn="ctr">
-              <a:buNone/>
-            </a:pPr>
-            <a:r>
-              <a:rPr lang="en-US" sz="1350" b="1" dirty="0">
-                <a:solidFill>
-                  <a:srgbClr val="1E3F7A"/>
-                </a:solidFill>
-                <a:latin typeface="Arial" pitchFamily="34" charset="0"/>
-                <a:ea typeface="Arial" pitchFamily="34" charset="-122"/>
-                <a:cs typeface="Arial" pitchFamily="34" charset="-120"/>
-              </a:rPr>
-              <a:t>Word Puzzle interaction</a:t>
-            </a:r>
-            <a:endParaRPr lang="en-US" sz="1350" dirty="0"/>
-          </a:p>
-        </p:txBody>
-      </p:sp>
-      <p:pic>
-        <p:nvPicPr>
-          <p:cNvPr id="15" name="Image 3" descr="/mnt/data/work/crops3/puzzle_pair.png"/>
-          <p:cNvPicPr>
-            <a:picLocks noChangeAspect="1"/>
-          </p:cNvPicPr>
-          <p:nvPr/>
-        </p:nvPicPr>
-        <p:blipFill>
-          <a:blip r:embed="rId6"/>
-          <a:stretch>
-            <a:fillRect/>
-          </a:stretch>
-        </p:blipFill>
-        <p:spPr>
-          <a:xfrm>
-            <a:off x="7645984" y="3657600"/>
-            <a:ext cx="2218792" cy="1929384"/>
-          </a:xfrm>
-          <a:prstGeom prst="rect">
-            <a:avLst/>
-          </a:prstGeom>
-        </p:spPr>
-      </p:pic>
+              <a:t>Profile/progress evidence</a:t>
+            </a:r>
+            <a:endParaRPr lang="en-US" altLang="zh-CN" sz="1400" dirty="0"/>
+          </a:p>
+        </p:txBody>
+      </p:sp>
       <p:pic>
         <p:nvPicPr>
           <p:cNvPr id="16" name="Image 4" descr="/mnt/data/work/template_media/image2.jpg"/>
@@ -9020,7 +12452,7 @@
           <p:nvPr/>
         </p:nvPicPr>
         <p:blipFill>
-          <a:blip r:embed="rId7"/>
+          <a:blip r:embed="rId3"/>
           <a:srcRect t="44800" b="44800"/>
           <a:stretch/>
         </p:blipFill>
@@ -9043,6 +12475,151 @@
           <p:nvPr/>
         </p:nvPicPr>
         <p:blipFill>
+          <a:blip r:embed="rId4"/>
+          <a:stretch>
+            <a:fillRect/>
+          </a:stretch>
+        </p:blipFill>
+        <p:spPr>
+          <a:xfrm>
+            <a:off x="580644" y="6236208"/>
+            <a:ext cx="1389888" cy="438912"/>
+          </a:xfrm>
+          <a:prstGeom prst="rect">
+            <a:avLst/>
+          </a:prstGeom>
+        </p:spPr>
+      </p:pic>
+      <p:sp>
+        <p:nvSpPr>
+          <p:cNvPr id="18" name="Text 10"/>
+          <p:cNvSpPr/>
+          <p:nvPr/>
+        </p:nvSpPr>
+        <p:spPr>
+          <a:xfrm>
+            <a:off x="11688775" y="6309360"/>
+            <a:ext cx="228600" cy="201168"/>
+          </a:xfrm>
+          <a:prstGeom prst="rect">
+            <a:avLst/>
+          </a:prstGeom>
+          <a:noFill/>
+          <a:ln/>
+        </p:spPr>
+        <p:txBody>
+          <a:bodyPr wrap="square" lIns="0" tIns="0" rIns="0" bIns="0" rtlCol="0" anchor="ctr"/>
+          <a:lstStyle/>
+          <a:p>
+            <a:pPr marL="0" indent="0" algn="r">
+              <a:buNone/>
+            </a:pPr>
+            <a:r>
+              <a:rPr lang="en-US" sz="1100" dirty="0">
+                <a:solidFill>
+                  <a:srgbClr val="FFFFFF"/>
+                </a:solidFill>
+                <a:latin typeface="Arial" pitchFamily="34" charset="0"/>
+                <a:cs typeface="Arial" pitchFamily="34" charset="-120"/>
+              </a:rPr>
+              <a:t>9</a:t>
+            </a:r>
+            <a:endParaRPr lang="en-US" sz="1100" dirty="0"/>
+          </a:p>
+        </p:txBody>
+      </p:sp>
+      <p:pic>
+        <p:nvPicPr>
+          <p:cNvPr id="19" name="Picture 12" descr="8a7c0663-f7b2-4937-9eb5-b4aeb9d07c89_no_bg.png">
+            <a:extLst>
+              <a:ext uri="{FF2B5EF4-FFF2-40B4-BE49-F238E27FC236}">
+                <a16:creationId xmlns:a16="http://schemas.microsoft.com/office/drawing/2014/main" id="{5D1F385F-AC28-4745-B997-B80C1721D69A}"/>
+              </a:ext>
+            </a:extLst>
+          </p:cNvPr>
+          <p:cNvPicPr>
+            <a:picLocks noChangeAspect="1"/>
+          </p:cNvPicPr>
+          <p:nvPr/>
+        </p:nvPicPr>
+        <p:blipFill>
+          <a:blip r:embed="rId5">
+            <a:extLst>
+              <a:ext uri="{BEBA8EAE-BF5A-486C-A8C5-ECC9F3942E4B}">
+                <a14:imgProps xmlns:a14="http://schemas.microsoft.com/office/drawing/2010/main">
+                  <a14:imgLayer r:embed="rId6">
+                    <a14:imgEffect>
+                      <a14:backgroundRemoval t="9961" b="89941" l="9961" r="91211">
+                        <a14:foregroundMark x1="31055" y1="44043" x2="34180" y2="35938"/>
+                        <a14:foregroundMark x1="51465" y1="40918" x2="54590" y2="44629"/>
+                        <a14:foregroundMark x1="23633" y1="40918" x2="30371" y2="47168"/>
+                        <a14:foregroundMark x1="28516" y1="44043" x2="27344" y2="40332"/>
+                        <a14:foregroundMark x1="90527" y1="63184" x2="91211" y2="67578"/>
+                      </a14:backgroundRemoval>
+                    </a14:imgEffect>
+                  </a14:imgLayer>
+                </a14:imgProps>
+              </a:ext>
+            </a:extLst>
+          </a:blip>
+          <a:stretch>
+            <a:fillRect/>
+          </a:stretch>
+        </p:blipFill>
+        <p:spPr>
+          <a:xfrm>
+            <a:off x="10609783" y="5504688"/>
+            <a:ext cx="1143000" cy="1143000"/>
+          </a:xfrm>
+          <a:prstGeom prst="rect">
+            <a:avLst/>
+          </a:prstGeom>
+        </p:spPr>
+      </p:pic>
+      <p:pic>
+        <p:nvPicPr>
+          <p:cNvPr id="20" name="Image 0" descr="/mnt/data/work/crops3/profile_single.png">
+            <a:extLst>
+              <a:ext uri="{FF2B5EF4-FFF2-40B4-BE49-F238E27FC236}">
+                <a16:creationId xmlns:a16="http://schemas.microsoft.com/office/drawing/2014/main" id="{F9A30FC1-40BE-48ED-AA10-593670DB21D7}"/>
+              </a:ext>
+            </a:extLst>
+          </p:cNvPr>
+          <p:cNvPicPr>
+            <a:picLocks noChangeAspect="1"/>
+          </p:cNvPicPr>
+          <p:nvPr/>
+        </p:nvPicPr>
+        <p:blipFill rotWithShape="1">
+          <a:blip r:embed="rId7"/>
+          <a:srcRect l="9754"/>
+          <a:stretch/>
+        </p:blipFill>
+        <p:spPr>
+          <a:xfrm>
+            <a:off x="1796395" y="1196629"/>
+            <a:ext cx="2640338" cy="4802611"/>
+          </a:xfrm>
+          <a:prstGeom prst="rect">
+            <a:avLst/>
+          </a:prstGeom>
+        </p:spPr>
+      </p:pic>
+      <p:pic>
+        <p:nvPicPr>
+          <p:cNvPr id="21" name="图片 20">
+            <a:extLst>
+              <a:ext uri="{FF2B5EF4-FFF2-40B4-BE49-F238E27FC236}">
+                <a16:creationId xmlns:a16="http://schemas.microsoft.com/office/drawing/2014/main" id="{0A07F080-2D4D-42AB-852B-2C31E6AD2967}"/>
+              </a:ext>
+            </a:extLst>
+          </p:cNvPr>
+          <p:cNvPicPr>
+            <a:picLocks noChangeAspect="1"/>
+          </p:cNvPicPr>
+          <p:nvPr/>
+        </p:nvPicPr>
+        <p:blipFill>
           <a:blip r:embed="rId8"/>
           <a:stretch>
             <a:fillRect/>
@@ -9050,2341 +12627,50 @@
         </p:blipFill>
         <p:spPr>
           <a:xfrm>
-            <a:off x="580644" y="6236208"/>
-            <a:ext cx="1389888" cy="438912"/>
+            <a:off x="4601325" y="1196629"/>
+            <a:ext cx="2596486" cy="4802104"/>
           </a:xfrm>
           <a:prstGeom prst="rect">
             <a:avLst/>
           </a:prstGeom>
         </p:spPr>
       </p:pic>
-      <p:sp>
-        <p:nvSpPr>
-          <p:cNvPr id="18" name="Text 10"/>
-          <p:cNvSpPr/>
-          <p:nvPr/>
-        </p:nvSpPr>
-        <p:spPr>
-          <a:xfrm>
-            <a:off x="11688775" y="6309360"/>
-            <a:ext cx="228600" cy="201168"/>
-          </a:xfrm>
-          <a:prstGeom prst="rect">
-            <a:avLst/>
-          </a:prstGeom>
-          <a:noFill/>
-          <a:ln/>
-        </p:spPr>
-        <p:txBody>
-          <a:bodyPr wrap="square" lIns="0" tIns="0" rIns="0" bIns="0" rtlCol="0" anchor="ctr"/>
-          <a:lstStyle/>
-          <a:p>
-            <a:pPr marL="0" indent="0" algn="r">
-              <a:buNone/>
-            </a:pPr>
-            <a:r>
-              <a:rPr lang="en-US" sz="1100" dirty="0">
-                <a:solidFill>
-                  <a:srgbClr val="FFFFFF"/>
-                </a:solidFill>
-                <a:latin typeface="Arial" pitchFamily="34" charset="0"/>
-                <a:ea typeface="Arial" pitchFamily="34" charset="-122"/>
-                <a:cs typeface="Arial" pitchFamily="34" charset="-120"/>
-              </a:rPr>
-              <a:t>7</a:t>
-            </a:r>
-            <a:endParaRPr lang="en-US" sz="1100" dirty="0"/>
-          </a:p>
-        </p:txBody>
-      </p:sp>
-    </p:spTree>
-  </p:cSld>
-  <p:clrMapOvr>
-    <a:masterClrMapping/>
-  </p:clrMapOvr>
-</p:sld>
-</file>
-
-<file path=ppt/slides/slide8.xml><?xml version="1.0" encoding="utf-8"?>
-<p:sld xmlns:a="http://schemas.openxmlformats.org/drawingml/2006/main" xmlns:r="http://schemas.openxmlformats.org/officeDocument/2006/relationships" xmlns:p="http://schemas.openxmlformats.org/presentationml/2006/main">
-  <p:cSld name="Slide 8">
-    <p:spTree>
-      <p:nvGrpSpPr>
-        <p:cNvPr id="1" name=""/>
-        <p:cNvGrpSpPr/>
-        <p:nvPr/>
-      </p:nvGrpSpPr>
-      <p:grpSpPr>
-        <a:xfrm>
-          <a:off x="0" y="0"/>
-          <a:ext cx="0" cy="0"/>
-          <a:chOff x="0" y="0"/>
-          <a:chExt cx="0" cy="0"/>
-        </a:xfrm>
-      </p:grpSpPr>
-      <p:sp>
-        <p:nvSpPr>
-          <p:cNvPr id="2" name="Text 0"/>
-          <p:cNvSpPr/>
-          <p:nvPr/>
-        </p:nvSpPr>
-        <p:spPr>
-          <a:xfrm>
-            <a:off x="640080" y="274320"/>
-            <a:ext cx="10881360" cy="384048"/>
-          </a:xfrm>
-          <a:prstGeom prst="rect">
-            <a:avLst/>
-          </a:prstGeom>
-          <a:noFill/>
-          <a:ln/>
-        </p:spPr>
-        <p:txBody>
-          <a:bodyPr wrap="square" lIns="0" tIns="0" rIns="0" bIns="0" rtlCol="0" anchor="ctr"/>
-          <a:lstStyle/>
-          <a:p>
-            <a:pPr marL="0" indent="0" algn="ctr">
-              <a:buNone/>
-            </a:pPr>
-            <a:r>
-              <a:rPr lang="en-US" sz="2500" b="1" dirty="0">
-                <a:solidFill>
-                  <a:srgbClr val="23488B"/>
-                </a:solidFill>
-                <a:latin typeface="Arial" pitchFamily="34" charset="0"/>
-                <a:ea typeface="Arial" pitchFamily="34" charset="-122"/>
-                <a:cs typeface="Arial" pitchFamily="34" charset="-120"/>
-              </a:rPr>
-              <a:t>Evaluation Against the Original Objectives</a:t>
-            </a:r>
-            <a:endParaRPr lang="en-US" sz="2500" dirty="0"/>
-          </a:p>
-        </p:txBody>
-      </p:sp>
-      <p:sp>
-        <p:nvSpPr>
-          <p:cNvPr id="3" name="Text 1"/>
-          <p:cNvSpPr/>
-          <p:nvPr/>
-        </p:nvSpPr>
-        <p:spPr>
-          <a:xfrm>
-            <a:off x="1005840" y="694944"/>
-            <a:ext cx="10149840" cy="219456"/>
-          </a:xfrm>
-          <a:prstGeom prst="rect">
-            <a:avLst/>
-          </a:prstGeom>
-          <a:noFill/>
-          <a:ln/>
-        </p:spPr>
-        <p:txBody>
-          <a:bodyPr wrap="square" lIns="0" tIns="0" rIns="0" bIns="0" rtlCol="0" anchor="ctr"/>
-          <a:lstStyle/>
-          <a:p>
-            <a:pPr marL="0" indent="0" algn="ctr">
-              <a:buNone/>
-            </a:pPr>
-            <a:r>
-              <a:rPr lang="en-US" sz="1050" i="1" dirty="0">
-                <a:solidFill>
-                  <a:srgbClr val="667A99"/>
-                </a:solidFill>
-                <a:latin typeface="Arial" pitchFamily="34" charset="0"/>
-                <a:ea typeface="Arial" pitchFamily="34" charset="-122"/>
-                <a:cs typeface="Arial" pitchFamily="34" charset="-120"/>
-              </a:rPr>
-              <a:t>Most core goals were achieved; full-scale user evaluation remains future work</a:t>
-            </a:r>
-            <a:endParaRPr lang="en-US" sz="1050" dirty="0"/>
-          </a:p>
-        </p:txBody>
-      </p:sp>
-      <p:sp>
-        <p:nvSpPr>
-          <p:cNvPr id="4" name="Shape 2"/>
-          <p:cNvSpPr/>
-          <p:nvPr/>
-        </p:nvSpPr>
-        <p:spPr>
-          <a:xfrm>
-            <a:off x="658368" y="1152144"/>
-            <a:ext cx="6629400" cy="4736592"/>
-          </a:xfrm>
-          <a:prstGeom prst="roundRect">
-            <a:avLst>
-              <a:gd name="adj" fmla="val 1544"/>
-            </a:avLst>
-          </a:prstGeom>
-          <a:solidFill>
-            <a:srgbClr val="F9FBFE"/>
-          </a:solidFill>
-          <a:ln w="13970">
-            <a:solidFill>
-              <a:srgbClr val="C8D9EA"/>
-            </a:solidFill>
-            <a:prstDash val="solid"/>
-          </a:ln>
-          <a:effectLst>
-            <a:outerShdw blurRad="15240" dist="12700" dir="2700000" algn="bl" rotWithShape="0">
-              <a:srgbClr val="000000">
-                <a:alpha val="12000"/>
-              </a:srgbClr>
-            </a:outerShdw>
-          </a:effectLst>
-        </p:spPr>
-      </p:sp>
-      <p:sp>
-        <p:nvSpPr>
-          <p:cNvPr id="5" name="Shape 3"/>
-          <p:cNvSpPr/>
-          <p:nvPr/>
-        </p:nvSpPr>
-        <p:spPr>
-          <a:xfrm>
-            <a:off x="877824" y="969264"/>
-            <a:ext cx="2359152" cy="310896"/>
-          </a:xfrm>
-          <a:prstGeom prst="roundRect">
-            <a:avLst>
-              <a:gd name="adj" fmla="val 35294"/>
-            </a:avLst>
-          </a:prstGeom>
-          <a:solidFill>
-            <a:srgbClr val="DFF5F8"/>
-          </a:solidFill>
-          <a:ln w="12700">
-            <a:solidFill>
-              <a:srgbClr val="DFF5F8"/>
-            </a:solidFill>
-            <a:prstDash val="solid"/>
-          </a:ln>
-        </p:spPr>
-      </p:sp>
-      <p:sp>
-        <p:nvSpPr>
-          <p:cNvPr id="6" name="Text 4"/>
-          <p:cNvSpPr/>
-          <p:nvPr/>
-        </p:nvSpPr>
-        <p:spPr>
-          <a:xfrm>
-            <a:off x="877824" y="1005840"/>
-            <a:ext cx="2359152" cy="256032"/>
-          </a:xfrm>
-          <a:prstGeom prst="rect">
-            <a:avLst/>
-          </a:prstGeom>
-          <a:noFill/>
-          <a:ln/>
-        </p:spPr>
-        <p:txBody>
-          <a:bodyPr wrap="square" lIns="0" tIns="0" rIns="0" bIns="0" rtlCol="0" anchor="ctr"/>
-          <a:lstStyle/>
-          <a:p>
-            <a:pPr marL="0" indent="0" algn="ctr">
-              <a:buNone/>
-            </a:pPr>
-            <a:r>
-              <a:rPr lang="en-US" sz="1250" b="1" dirty="0">
-                <a:solidFill>
-                  <a:srgbClr val="1E3F7A"/>
-                </a:solidFill>
-                <a:latin typeface="Arial" pitchFamily="34" charset="0"/>
-                <a:ea typeface="Arial" pitchFamily="34" charset="-122"/>
-                <a:cs typeface="Arial" pitchFamily="34" charset="-120"/>
-              </a:rPr>
-              <a:t>Objective status</a:t>
-            </a:r>
-            <a:endParaRPr lang="en-US" sz="1250" dirty="0"/>
-          </a:p>
-        </p:txBody>
-      </p:sp>
-      <p:sp>
-        <p:nvSpPr>
-          <p:cNvPr id="7" name="Shape 5"/>
-          <p:cNvSpPr/>
-          <p:nvPr/>
-        </p:nvSpPr>
-        <p:spPr>
-          <a:xfrm>
-            <a:off x="896112" y="1444752"/>
-            <a:ext cx="4553712" cy="384048"/>
-          </a:xfrm>
-          <a:prstGeom prst="roundRect">
-            <a:avLst>
-              <a:gd name="adj" fmla="val 9524"/>
-            </a:avLst>
-          </a:prstGeom>
-          <a:solidFill>
-            <a:srgbClr val="FFFFFF"/>
-          </a:solidFill>
-          <a:ln w="10160">
-            <a:solidFill>
-              <a:srgbClr val="D7E3EE"/>
-            </a:solidFill>
-            <a:prstDash val="solid"/>
-          </a:ln>
-        </p:spPr>
-      </p:sp>
-      <p:sp>
-        <p:nvSpPr>
-          <p:cNvPr id="8" name="Text 6"/>
-          <p:cNvSpPr/>
-          <p:nvPr/>
-        </p:nvSpPr>
-        <p:spPr>
-          <a:xfrm>
-            <a:off x="1051560" y="1554480"/>
-            <a:ext cx="3520440" cy="128016"/>
-          </a:xfrm>
-          <a:prstGeom prst="rect">
-            <a:avLst/>
-          </a:prstGeom>
-          <a:noFill/>
-          <a:ln/>
-        </p:spPr>
-        <p:txBody>
-          <a:bodyPr wrap="square" lIns="0" tIns="0" rIns="0" bIns="0" rtlCol="0" anchor="ctr">
-            <a:normAutofit/>
-          </a:bodyPr>
-          <a:lstStyle/>
-          <a:p>
-            <a:pPr marL="0" indent="0">
-              <a:buNone/>
-            </a:pPr>
-            <a:r>
-              <a:rPr lang="en-US" sz="1260" dirty="0">
-                <a:solidFill>
-                  <a:srgbClr val="274673"/>
-                </a:solidFill>
-                <a:latin typeface="Arial" pitchFamily="34" charset="0"/>
-                <a:ea typeface="Arial" pitchFamily="34" charset="-122"/>
-                <a:cs typeface="Arial" pitchFamily="34" charset="-120"/>
-              </a:rPr>
-              <a:t>Requirements and learner needs analysis</a:t>
-            </a:r>
-            <a:endParaRPr lang="en-US" sz="1260" dirty="0"/>
-          </a:p>
-        </p:txBody>
-      </p:sp>
-      <p:sp>
-        <p:nvSpPr>
-          <p:cNvPr id="9" name="Shape 7"/>
-          <p:cNvSpPr/>
-          <p:nvPr/>
-        </p:nvSpPr>
-        <p:spPr>
-          <a:xfrm>
-            <a:off x="4681728" y="1499616"/>
-            <a:ext cx="640080" cy="256032"/>
-          </a:xfrm>
-          <a:prstGeom prst="roundRect">
-            <a:avLst>
-              <a:gd name="adj" fmla="val 14286"/>
-            </a:avLst>
-          </a:prstGeom>
-          <a:solidFill>
-            <a:srgbClr val="F1FAE8"/>
-          </a:solidFill>
-          <a:ln w="10160">
-            <a:solidFill>
-              <a:srgbClr val="A5D28A"/>
-            </a:solidFill>
-            <a:prstDash val="solid"/>
-          </a:ln>
-        </p:spPr>
-      </p:sp>
-      <p:sp>
-        <p:nvSpPr>
-          <p:cNvPr id="10" name="Text 8"/>
-          <p:cNvSpPr/>
-          <p:nvPr/>
-        </p:nvSpPr>
-        <p:spPr>
-          <a:xfrm>
-            <a:off x="4754880" y="1531620"/>
-            <a:ext cx="128016" cy="91440"/>
-          </a:xfrm>
-          <a:prstGeom prst="rect">
-            <a:avLst/>
-          </a:prstGeom>
-          <a:noFill/>
-          <a:ln/>
-        </p:spPr>
-        <p:txBody>
-          <a:bodyPr wrap="square" lIns="0" tIns="0" rIns="0" bIns="0" rtlCol="0" anchor="ctr"/>
-          <a:lstStyle/>
-          <a:p>
-            <a:pPr marL="0" indent="0" algn="ctr">
-              <a:buNone/>
-            </a:pPr>
-            <a:r>
-              <a:rPr lang="en-US" sz="1250" b="1" dirty="0">
-                <a:solidFill>
-                  <a:srgbClr val="4E9833"/>
-                </a:solidFill>
-                <a:latin typeface="Arial" pitchFamily="34" charset="0"/>
-                <a:ea typeface="Arial" pitchFamily="34" charset="-122"/>
-                <a:cs typeface="Arial" pitchFamily="34" charset="-120"/>
-              </a:rPr>
-              <a:t>✓</a:t>
-            </a:r>
-            <a:endParaRPr lang="en-US" sz="1250" dirty="0"/>
-          </a:p>
-        </p:txBody>
-      </p:sp>
-      <p:sp>
-        <p:nvSpPr>
-          <p:cNvPr id="11" name="Text 9"/>
-          <p:cNvSpPr/>
-          <p:nvPr/>
-        </p:nvSpPr>
-        <p:spPr>
-          <a:xfrm>
-            <a:off x="4901184" y="1536192"/>
-            <a:ext cx="365760" cy="91440"/>
-          </a:xfrm>
-          <a:prstGeom prst="rect">
-            <a:avLst/>
-          </a:prstGeom>
-          <a:noFill/>
-          <a:ln/>
-        </p:spPr>
-        <p:txBody>
-          <a:bodyPr wrap="square" lIns="0" tIns="0" rIns="0" bIns="0" rtlCol="0" anchor="ctr">
-            <a:normAutofit/>
-          </a:bodyPr>
-          <a:lstStyle/>
-          <a:p>
-            <a:pPr marL="0" indent="0" algn="l">
-              <a:buNone/>
-            </a:pPr>
-            <a:r>
-              <a:rPr lang="en-US" sz="1080" b="1" dirty="0">
-                <a:solidFill>
-                  <a:srgbClr val="4E9833"/>
-                </a:solidFill>
-                <a:latin typeface="Arial" pitchFamily="34" charset="0"/>
-                <a:ea typeface="Arial" pitchFamily="34" charset="-122"/>
-                <a:cs typeface="Arial" pitchFamily="34" charset="-120"/>
-              </a:rPr>
-              <a:t>Achieved</a:t>
-            </a:r>
-            <a:endParaRPr lang="en-US" sz="1080" dirty="0"/>
-          </a:p>
-        </p:txBody>
-      </p:sp>
-      <p:sp>
-        <p:nvSpPr>
-          <p:cNvPr id="12" name="Shape 10"/>
-          <p:cNvSpPr/>
-          <p:nvPr/>
-        </p:nvSpPr>
-        <p:spPr>
-          <a:xfrm>
-            <a:off x="896112" y="2039112"/>
-            <a:ext cx="4553712" cy="384048"/>
-          </a:xfrm>
-          <a:prstGeom prst="roundRect">
-            <a:avLst>
-              <a:gd name="adj" fmla="val 9524"/>
-            </a:avLst>
-          </a:prstGeom>
-          <a:solidFill>
-            <a:srgbClr val="F4F8FC"/>
-          </a:solidFill>
-          <a:ln w="10160">
-            <a:solidFill>
-              <a:srgbClr val="D7E3EE"/>
-            </a:solidFill>
-            <a:prstDash val="solid"/>
-          </a:ln>
-        </p:spPr>
-      </p:sp>
-      <p:sp>
-        <p:nvSpPr>
-          <p:cNvPr id="13" name="Text 11"/>
-          <p:cNvSpPr/>
-          <p:nvPr/>
-        </p:nvSpPr>
-        <p:spPr>
-          <a:xfrm>
-            <a:off x="1051560" y="2148840"/>
-            <a:ext cx="3520440" cy="128016"/>
-          </a:xfrm>
-          <a:prstGeom prst="rect">
-            <a:avLst/>
-          </a:prstGeom>
-          <a:noFill/>
-          <a:ln/>
-        </p:spPr>
-        <p:txBody>
-          <a:bodyPr wrap="square" lIns="0" tIns="0" rIns="0" bIns="0" rtlCol="0" anchor="ctr">
-            <a:normAutofit/>
-          </a:bodyPr>
-          <a:lstStyle/>
-          <a:p>
-            <a:pPr marL="0" indent="0">
-              <a:buNone/>
-            </a:pPr>
-            <a:r>
-              <a:rPr lang="en-US" sz="1260" dirty="0">
-                <a:solidFill>
-                  <a:srgbClr val="274673"/>
-                </a:solidFill>
-                <a:latin typeface="Arial" pitchFamily="34" charset="0"/>
-                <a:ea typeface="Arial" pitchFamily="34" charset="-122"/>
-                <a:cs typeface="Arial" pitchFamily="34" charset="-120"/>
-              </a:rPr>
-              <a:t>Modular native Android architecture</a:t>
-            </a:r>
-            <a:endParaRPr lang="en-US" sz="1260" dirty="0"/>
-          </a:p>
-        </p:txBody>
-      </p:sp>
-      <p:sp>
-        <p:nvSpPr>
-          <p:cNvPr id="14" name="Shape 12"/>
-          <p:cNvSpPr/>
-          <p:nvPr/>
-        </p:nvSpPr>
-        <p:spPr>
-          <a:xfrm>
-            <a:off x="4681728" y="2093976"/>
-            <a:ext cx="640080" cy="256032"/>
-          </a:xfrm>
-          <a:prstGeom prst="roundRect">
-            <a:avLst>
-              <a:gd name="adj" fmla="val 14286"/>
-            </a:avLst>
-          </a:prstGeom>
-          <a:solidFill>
-            <a:srgbClr val="F1FAE8"/>
-          </a:solidFill>
-          <a:ln w="10160">
-            <a:solidFill>
-              <a:srgbClr val="A5D28A"/>
-            </a:solidFill>
-            <a:prstDash val="solid"/>
-          </a:ln>
-        </p:spPr>
-      </p:sp>
-      <p:sp>
-        <p:nvSpPr>
-          <p:cNvPr id="15" name="Text 13"/>
-          <p:cNvSpPr/>
-          <p:nvPr/>
-        </p:nvSpPr>
-        <p:spPr>
-          <a:xfrm>
-            <a:off x="4754880" y="2125980"/>
-            <a:ext cx="128016" cy="91440"/>
-          </a:xfrm>
-          <a:prstGeom prst="rect">
-            <a:avLst/>
-          </a:prstGeom>
-          <a:noFill/>
-          <a:ln/>
-        </p:spPr>
-        <p:txBody>
-          <a:bodyPr wrap="square" lIns="0" tIns="0" rIns="0" bIns="0" rtlCol="0" anchor="ctr"/>
-          <a:lstStyle/>
-          <a:p>
-            <a:pPr marL="0" indent="0" algn="ctr">
-              <a:buNone/>
-            </a:pPr>
-            <a:r>
-              <a:rPr lang="en-US" sz="1250" b="1" dirty="0">
-                <a:solidFill>
-                  <a:srgbClr val="4E9833"/>
-                </a:solidFill>
-                <a:latin typeface="Arial" pitchFamily="34" charset="0"/>
-                <a:ea typeface="Arial" pitchFamily="34" charset="-122"/>
-                <a:cs typeface="Arial" pitchFamily="34" charset="-120"/>
-              </a:rPr>
-              <a:t>✓</a:t>
-            </a:r>
-            <a:endParaRPr lang="en-US" sz="1250" dirty="0"/>
-          </a:p>
-        </p:txBody>
-      </p:sp>
-      <p:sp>
-        <p:nvSpPr>
-          <p:cNvPr id="16" name="Text 14"/>
-          <p:cNvSpPr/>
-          <p:nvPr/>
-        </p:nvSpPr>
-        <p:spPr>
-          <a:xfrm>
-            <a:off x="4901184" y="2130552"/>
-            <a:ext cx="365760" cy="91440"/>
-          </a:xfrm>
-          <a:prstGeom prst="rect">
-            <a:avLst/>
-          </a:prstGeom>
-          <a:noFill/>
-          <a:ln/>
-        </p:spPr>
-        <p:txBody>
-          <a:bodyPr wrap="square" lIns="0" tIns="0" rIns="0" bIns="0" rtlCol="0" anchor="ctr">
-            <a:normAutofit/>
-          </a:bodyPr>
-          <a:lstStyle/>
-          <a:p>
-            <a:pPr marL="0" indent="0" algn="l">
-              <a:buNone/>
-            </a:pPr>
-            <a:r>
-              <a:rPr lang="en-US" sz="1080" b="1" dirty="0">
-                <a:solidFill>
-                  <a:srgbClr val="4E9833"/>
-                </a:solidFill>
-                <a:latin typeface="Arial" pitchFamily="34" charset="0"/>
-                <a:ea typeface="Arial" pitchFamily="34" charset="-122"/>
-                <a:cs typeface="Arial" pitchFamily="34" charset="-120"/>
-              </a:rPr>
-              <a:t>Achieved</a:t>
-            </a:r>
-            <a:endParaRPr lang="en-US" sz="1080" dirty="0"/>
-          </a:p>
-        </p:txBody>
-      </p:sp>
-      <p:sp>
-        <p:nvSpPr>
-          <p:cNvPr id="17" name="Shape 15"/>
-          <p:cNvSpPr/>
-          <p:nvPr/>
-        </p:nvSpPr>
-        <p:spPr>
-          <a:xfrm>
-            <a:off x="896112" y="2633472"/>
-            <a:ext cx="4553712" cy="384048"/>
-          </a:xfrm>
-          <a:prstGeom prst="roundRect">
-            <a:avLst>
-              <a:gd name="adj" fmla="val 9524"/>
-            </a:avLst>
-          </a:prstGeom>
-          <a:solidFill>
-            <a:srgbClr val="FFFFFF"/>
-          </a:solidFill>
-          <a:ln w="10160">
-            <a:solidFill>
-              <a:srgbClr val="D7E3EE"/>
-            </a:solidFill>
-            <a:prstDash val="solid"/>
-          </a:ln>
-        </p:spPr>
-      </p:sp>
-      <p:sp>
-        <p:nvSpPr>
-          <p:cNvPr id="18" name="Text 16"/>
-          <p:cNvSpPr/>
-          <p:nvPr/>
-        </p:nvSpPr>
-        <p:spPr>
-          <a:xfrm>
-            <a:off x="1051560" y="2743200"/>
-            <a:ext cx="3520440" cy="128016"/>
-          </a:xfrm>
-          <a:prstGeom prst="rect">
-            <a:avLst/>
-          </a:prstGeom>
-          <a:noFill/>
-          <a:ln/>
-        </p:spPr>
-        <p:txBody>
-          <a:bodyPr wrap="square" lIns="0" tIns="0" rIns="0" bIns="0" rtlCol="0" anchor="ctr">
-            <a:normAutofit/>
-          </a:bodyPr>
-          <a:lstStyle/>
-          <a:p>
-            <a:pPr marL="0" indent="0">
-              <a:buNone/>
-            </a:pPr>
-            <a:r>
-              <a:rPr lang="en-US" sz="1260" dirty="0">
-                <a:solidFill>
-                  <a:srgbClr val="274673"/>
-                </a:solidFill>
-                <a:latin typeface="Arial" pitchFamily="34" charset="0"/>
-                <a:ea typeface="Arial" pitchFamily="34" charset="-122"/>
-                <a:cs typeface="Arial" pitchFamily="34" charset="-120"/>
-              </a:rPr>
-              <a:t>Three educational mini-games</a:t>
-            </a:r>
-            <a:endParaRPr lang="en-US" sz="1260" dirty="0"/>
-          </a:p>
-        </p:txBody>
-      </p:sp>
-      <p:sp>
-        <p:nvSpPr>
-          <p:cNvPr id="19" name="Shape 17"/>
-          <p:cNvSpPr/>
-          <p:nvPr/>
-        </p:nvSpPr>
-        <p:spPr>
-          <a:xfrm>
-            <a:off x="4681728" y="2688336"/>
-            <a:ext cx="640080" cy="256032"/>
-          </a:xfrm>
-          <a:prstGeom prst="roundRect">
-            <a:avLst>
-              <a:gd name="adj" fmla="val 14286"/>
-            </a:avLst>
-          </a:prstGeom>
-          <a:solidFill>
-            <a:srgbClr val="F1FAE8"/>
-          </a:solidFill>
-          <a:ln w="10160">
-            <a:solidFill>
-              <a:srgbClr val="A5D28A"/>
-            </a:solidFill>
-            <a:prstDash val="solid"/>
-          </a:ln>
-        </p:spPr>
-      </p:sp>
-      <p:sp>
-        <p:nvSpPr>
-          <p:cNvPr id="20" name="Text 18"/>
-          <p:cNvSpPr/>
-          <p:nvPr/>
-        </p:nvSpPr>
-        <p:spPr>
-          <a:xfrm>
-            <a:off x="4754880" y="2720340"/>
-            <a:ext cx="128016" cy="91440"/>
-          </a:xfrm>
-          <a:prstGeom prst="rect">
-            <a:avLst/>
-          </a:prstGeom>
-          <a:noFill/>
-          <a:ln/>
-        </p:spPr>
-        <p:txBody>
-          <a:bodyPr wrap="square" lIns="0" tIns="0" rIns="0" bIns="0" rtlCol="0" anchor="ctr"/>
-          <a:lstStyle/>
-          <a:p>
-            <a:pPr marL="0" indent="0" algn="ctr">
-              <a:buNone/>
-            </a:pPr>
-            <a:r>
-              <a:rPr lang="en-US" sz="1250" b="1" dirty="0">
-                <a:solidFill>
-                  <a:srgbClr val="4E9833"/>
-                </a:solidFill>
-                <a:latin typeface="Arial" pitchFamily="34" charset="0"/>
-                <a:ea typeface="Arial" pitchFamily="34" charset="-122"/>
-                <a:cs typeface="Arial" pitchFamily="34" charset="-120"/>
-              </a:rPr>
-              <a:t>✓</a:t>
-            </a:r>
-            <a:endParaRPr lang="en-US" sz="1250" dirty="0"/>
-          </a:p>
-        </p:txBody>
-      </p:sp>
-      <p:sp>
-        <p:nvSpPr>
-          <p:cNvPr id="21" name="Text 19"/>
-          <p:cNvSpPr/>
-          <p:nvPr/>
-        </p:nvSpPr>
-        <p:spPr>
-          <a:xfrm>
-            <a:off x="4901184" y="2724912"/>
-            <a:ext cx="365760" cy="91440"/>
-          </a:xfrm>
-          <a:prstGeom prst="rect">
-            <a:avLst/>
-          </a:prstGeom>
-          <a:noFill/>
-          <a:ln/>
-        </p:spPr>
-        <p:txBody>
-          <a:bodyPr wrap="square" lIns="0" tIns="0" rIns="0" bIns="0" rtlCol="0" anchor="ctr">
-            <a:normAutofit/>
-          </a:bodyPr>
-          <a:lstStyle/>
-          <a:p>
-            <a:pPr marL="0" indent="0" algn="l">
-              <a:buNone/>
-            </a:pPr>
-            <a:r>
-              <a:rPr lang="en-US" sz="1080" b="1" dirty="0">
-                <a:solidFill>
-                  <a:srgbClr val="4E9833"/>
-                </a:solidFill>
-                <a:latin typeface="Arial" pitchFamily="34" charset="0"/>
-                <a:ea typeface="Arial" pitchFamily="34" charset="-122"/>
-                <a:cs typeface="Arial" pitchFamily="34" charset="-120"/>
-              </a:rPr>
-              <a:t>Achieved</a:t>
-            </a:r>
-            <a:endParaRPr lang="en-US" sz="1080" dirty="0"/>
-          </a:p>
-        </p:txBody>
-      </p:sp>
-      <p:sp>
-        <p:nvSpPr>
-          <p:cNvPr id="22" name="Shape 20"/>
-          <p:cNvSpPr/>
-          <p:nvPr/>
-        </p:nvSpPr>
-        <p:spPr>
-          <a:xfrm>
-            <a:off x="896112" y="3227832"/>
-            <a:ext cx="4553712" cy="384048"/>
-          </a:xfrm>
-          <a:prstGeom prst="roundRect">
-            <a:avLst>
-              <a:gd name="adj" fmla="val 9524"/>
-            </a:avLst>
-          </a:prstGeom>
-          <a:solidFill>
-            <a:srgbClr val="F4F8FC"/>
-          </a:solidFill>
-          <a:ln w="10160">
-            <a:solidFill>
-              <a:srgbClr val="D7E3EE"/>
-            </a:solidFill>
-            <a:prstDash val="solid"/>
-          </a:ln>
-        </p:spPr>
-      </p:sp>
-      <p:sp>
-        <p:nvSpPr>
-          <p:cNvPr id="23" name="Text 21"/>
-          <p:cNvSpPr/>
-          <p:nvPr/>
-        </p:nvSpPr>
-        <p:spPr>
-          <a:xfrm>
-            <a:off x="1051560" y="3337560"/>
-            <a:ext cx="3520440" cy="128016"/>
-          </a:xfrm>
-          <a:prstGeom prst="rect">
-            <a:avLst/>
-          </a:prstGeom>
-          <a:noFill/>
-          <a:ln/>
-        </p:spPr>
-        <p:txBody>
-          <a:bodyPr wrap="square" lIns="0" tIns="0" rIns="0" bIns="0" rtlCol="0" anchor="ctr">
-            <a:normAutofit/>
-          </a:bodyPr>
-          <a:lstStyle/>
-          <a:p>
-            <a:pPr marL="0" indent="0">
-              <a:buNone/>
-            </a:pPr>
-            <a:r>
-              <a:rPr lang="en-US" sz="1260" dirty="0">
-                <a:solidFill>
-                  <a:srgbClr val="274673"/>
-                </a:solidFill>
-                <a:latin typeface="Arial" pitchFamily="34" charset="0"/>
-                <a:ea typeface="Arial" pitchFamily="34" charset="-122"/>
-                <a:cs typeface="Arial" pitchFamily="34" charset="-120"/>
-              </a:rPr>
-              <a:t>SQLite + JSON-backed content pipeline</a:t>
-            </a:r>
-            <a:endParaRPr lang="en-US" sz="1260" dirty="0"/>
-          </a:p>
-        </p:txBody>
-      </p:sp>
-      <p:sp>
-        <p:nvSpPr>
-          <p:cNvPr id="24" name="Shape 22"/>
-          <p:cNvSpPr/>
-          <p:nvPr/>
-        </p:nvSpPr>
-        <p:spPr>
-          <a:xfrm>
-            <a:off x="4681728" y="3282696"/>
-            <a:ext cx="640080" cy="256032"/>
-          </a:xfrm>
-          <a:prstGeom prst="roundRect">
-            <a:avLst>
-              <a:gd name="adj" fmla="val 14286"/>
-            </a:avLst>
-          </a:prstGeom>
-          <a:solidFill>
-            <a:srgbClr val="F1FAE8"/>
-          </a:solidFill>
-          <a:ln w="10160">
-            <a:solidFill>
-              <a:srgbClr val="A5D28A"/>
-            </a:solidFill>
-            <a:prstDash val="solid"/>
-          </a:ln>
-        </p:spPr>
-      </p:sp>
-      <p:sp>
-        <p:nvSpPr>
-          <p:cNvPr id="25" name="Text 23"/>
-          <p:cNvSpPr/>
-          <p:nvPr/>
-        </p:nvSpPr>
-        <p:spPr>
-          <a:xfrm>
-            <a:off x="4754880" y="3314700"/>
-            <a:ext cx="128016" cy="91440"/>
-          </a:xfrm>
-          <a:prstGeom prst="rect">
-            <a:avLst/>
-          </a:prstGeom>
-          <a:noFill/>
-          <a:ln/>
-        </p:spPr>
-        <p:txBody>
-          <a:bodyPr wrap="square" lIns="0" tIns="0" rIns="0" bIns="0" rtlCol="0" anchor="ctr"/>
-          <a:lstStyle/>
-          <a:p>
-            <a:pPr marL="0" indent="0" algn="ctr">
-              <a:buNone/>
-            </a:pPr>
-            <a:r>
-              <a:rPr lang="en-US" sz="1250" b="1" dirty="0">
-                <a:solidFill>
-                  <a:srgbClr val="4E9833"/>
-                </a:solidFill>
-                <a:latin typeface="Arial" pitchFamily="34" charset="0"/>
-                <a:ea typeface="Arial" pitchFamily="34" charset="-122"/>
-                <a:cs typeface="Arial" pitchFamily="34" charset="-120"/>
-              </a:rPr>
-              <a:t>✓</a:t>
-            </a:r>
-            <a:endParaRPr lang="en-US" sz="1250" dirty="0"/>
-          </a:p>
-        </p:txBody>
-      </p:sp>
-      <p:sp>
-        <p:nvSpPr>
-          <p:cNvPr id="26" name="Text 24"/>
-          <p:cNvSpPr/>
-          <p:nvPr/>
-        </p:nvSpPr>
-        <p:spPr>
-          <a:xfrm>
-            <a:off x="4901184" y="3319272"/>
-            <a:ext cx="365760" cy="91440"/>
-          </a:xfrm>
-          <a:prstGeom prst="rect">
-            <a:avLst/>
-          </a:prstGeom>
-          <a:noFill/>
-          <a:ln/>
-        </p:spPr>
-        <p:txBody>
-          <a:bodyPr wrap="square" lIns="0" tIns="0" rIns="0" bIns="0" rtlCol="0" anchor="ctr">
-            <a:normAutofit/>
-          </a:bodyPr>
-          <a:lstStyle/>
-          <a:p>
-            <a:pPr marL="0" indent="0" algn="l">
-              <a:buNone/>
-            </a:pPr>
-            <a:r>
-              <a:rPr lang="en-US" sz="1080" b="1" dirty="0">
-                <a:solidFill>
-                  <a:srgbClr val="4E9833"/>
-                </a:solidFill>
-                <a:latin typeface="Arial" pitchFamily="34" charset="0"/>
-                <a:ea typeface="Arial" pitchFamily="34" charset="-122"/>
-                <a:cs typeface="Arial" pitchFamily="34" charset="-120"/>
-              </a:rPr>
-              <a:t>Achieved</a:t>
-            </a:r>
-            <a:endParaRPr lang="en-US" sz="1080" dirty="0"/>
-          </a:p>
-        </p:txBody>
-      </p:sp>
-      <p:sp>
-        <p:nvSpPr>
-          <p:cNvPr id="27" name="Shape 25"/>
-          <p:cNvSpPr/>
-          <p:nvPr/>
-        </p:nvSpPr>
-        <p:spPr>
-          <a:xfrm>
-            <a:off x="896112" y="3822192"/>
-            <a:ext cx="4553712" cy="384048"/>
-          </a:xfrm>
-          <a:prstGeom prst="roundRect">
-            <a:avLst>
-              <a:gd name="adj" fmla="val 9524"/>
-            </a:avLst>
-          </a:prstGeom>
-          <a:solidFill>
-            <a:srgbClr val="FFFFFF"/>
-          </a:solidFill>
-          <a:ln w="10160">
-            <a:solidFill>
-              <a:srgbClr val="D7E3EE"/>
-            </a:solidFill>
-            <a:prstDash val="solid"/>
-          </a:ln>
-        </p:spPr>
-      </p:sp>
-      <p:sp>
-        <p:nvSpPr>
-          <p:cNvPr id="28" name="Text 26"/>
-          <p:cNvSpPr/>
-          <p:nvPr/>
-        </p:nvSpPr>
-        <p:spPr>
-          <a:xfrm>
-            <a:off x="1051560" y="3931920"/>
-            <a:ext cx="3520440" cy="128016"/>
-          </a:xfrm>
-          <a:prstGeom prst="rect">
-            <a:avLst/>
-          </a:prstGeom>
-          <a:noFill/>
-          <a:ln/>
-        </p:spPr>
-        <p:txBody>
-          <a:bodyPr wrap="square" lIns="0" tIns="0" rIns="0" bIns="0" rtlCol="0" anchor="ctr">
-            <a:normAutofit/>
-          </a:bodyPr>
-          <a:lstStyle/>
-          <a:p>
-            <a:pPr marL="0" indent="0">
-              <a:buNone/>
-            </a:pPr>
-            <a:r>
-              <a:rPr lang="en-US" sz="1260" dirty="0">
-                <a:solidFill>
-                  <a:srgbClr val="274673"/>
-                </a:solidFill>
-                <a:latin typeface="Arial" pitchFamily="34" charset="0"/>
-                <a:ea typeface="Arial" pitchFamily="34" charset="-122"/>
-                <a:cs typeface="Arial" pitchFamily="34" charset="-120"/>
-              </a:rPr>
-              <a:t>Progress tracking and achievements</a:t>
-            </a:r>
-            <a:endParaRPr lang="en-US" sz="1260" dirty="0"/>
-          </a:p>
-        </p:txBody>
-      </p:sp>
-      <p:sp>
-        <p:nvSpPr>
-          <p:cNvPr id="29" name="Shape 27"/>
-          <p:cNvSpPr/>
-          <p:nvPr/>
-        </p:nvSpPr>
-        <p:spPr>
-          <a:xfrm>
-            <a:off x="4681728" y="3877056"/>
-            <a:ext cx="640080" cy="256032"/>
-          </a:xfrm>
-          <a:prstGeom prst="roundRect">
-            <a:avLst>
-              <a:gd name="adj" fmla="val 14286"/>
-            </a:avLst>
-          </a:prstGeom>
-          <a:solidFill>
-            <a:srgbClr val="F1FAE8"/>
-          </a:solidFill>
-          <a:ln w="10160">
-            <a:solidFill>
-              <a:srgbClr val="A5D28A"/>
-            </a:solidFill>
-            <a:prstDash val="solid"/>
-          </a:ln>
-        </p:spPr>
-      </p:sp>
-      <p:sp>
-        <p:nvSpPr>
-          <p:cNvPr id="30" name="Text 28"/>
-          <p:cNvSpPr/>
-          <p:nvPr/>
-        </p:nvSpPr>
-        <p:spPr>
-          <a:xfrm>
-            <a:off x="4754880" y="3909060"/>
-            <a:ext cx="128016" cy="91440"/>
-          </a:xfrm>
-          <a:prstGeom prst="rect">
-            <a:avLst/>
-          </a:prstGeom>
-          <a:noFill/>
-          <a:ln/>
-        </p:spPr>
-        <p:txBody>
-          <a:bodyPr wrap="square" lIns="0" tIns="0" rIns="0" bIns="0" rtlCol="0" anchor="ctr"/>
-          <a:lstStyle/>
-          <a:p>
-            <a:pPr marL="0" indent="0" algn="ctr">
-              <a:buNone/>
-            </a:pPr>
-            <a:r>
-              <a:rPr lang="en-US" sz="1250" b="1" dirty="0">
-                <a:solidFill>
-                  <a:srgbClr val="4E9833"/>
-                </a:solidFill>
-                <a:latin typeface="Arial" pitchFamily="34" charset="0"/>
-                <a:ea typeface="Arial" pitchFamily="34" charset="-122"/>
-                <a:cs typeface="Arial" pitchFamily="34" charset="-120"/>
-              </a:rPr>
-              <a:t>✓</a:t>
-            </a:r>
-            <a:endParaRPr lang="en-US" sz="1250" dirty="0"/>
-          </a:p>
-        </p:txBody>
-      </p:sp>
-      <p:sp>
-        <p:nvSpPr>
-          <p:cNvPr id="31" name="Text 29"/>
-          <p:cNvSpPr/>
-          <p:nvPr/>
-        </p:nvSpPr>
-        <p:spPr>
-          <a:xfrm>
-            <a:off x="4901184" y="3913632"/>
-            <a:ext cx="365760" cy="91440"/>
-          </a:xfrm>
-          <a:prstGeom prst="rect">
-            <a:avLst/>
-          </a:prstGeom>
-          <a:noFill/>
-          <a:ln/>
-        </p:spPr>
-        <p:txBody>
-          <a:bodyPr wrap="square" lIns="0" tIns="0" rIns="0" bIns="0" rtlCol="0" anchor="ctr">
-            <a:normAutofit/>
-          </a:bodyPr>
-          <a:lstStyle/>
-          <a:p>
-            <a:pPr marL="0" indent="0" algn="l">
-              <a:buNone/>
-            </a:pPr>
-            <a:r>
-              <a:rPr lang="en-US" sz="1080" b="1" dirty="0">
-                <a:solidFill>
-                  <a:srgbClr val="4E9833"/>
-                </a:solidFill>
-                <a:latin typeface="Arial" pitchFamily="34" charset="0"/>
-                <a:ea typeface="Arial" pitchFamily="34" charset="-122"/>
-                <a:cs typeface="Arial" pitchFamily="34" charset="-120"/>
-              </a:rPr>
-              <a:t>Achieved</a:t>
-            </a:r>
-            <a:endParaRPr lang="en-US" sz="1080" dirty="0"/>
-          </a:p>
-        </p:txBody>
-      </p:sp>
-      <p:sp>
-        <p:nvSpPr>
-          <p:cNvPr id="32" name="Shape 30"/>
-          <p:cNvSpPr/>
-          <p:nvPr/>
-        </p:nvSpPr>
-        <p:spPr>
-          <a:xfrm>
-            <a:off x="896112" y="4416552"/>
-            <a:ext cx="4553712" cy="384048"/>
-          </a:xfrm>
-          <a:prstGeom prst="roundRect">
-            <a:avLst>
-              <a:gd name="adj" fmla="val 9524"/>
-            </a:avLst>
-          </a:prstGeom>
-          <a:solidFill>
-            <a:srgbClr val="F4F8FC"/>
-          </a:solidFill>
-          <a:ln w="10160">
-            <a:solidFill>
-              <a:srgbClr val="D7E3EE"/>
-            </a:solidFill>
-            <a:prstDash val="solid"/>
-          </a:ln>
-        </p:spPr>
-      </p:sp>
-      <p:sp>
-        <p:nvSpPr>
-          <p:cNvPr id="33" name="Text 31"/>
-          <p:cNvSpPr/>
-          <p:nvPr/>
-        </p:nvSpPr>
-        <p:spPr>
-          <a:xfrm>
-            <a:off x="1051560" y="4526280"/>
-            <a:ext cx="3520440" cy="128016"/>
-          </a:xfrm>
-          <a:prstGeom prst="rect">
-            <a:avLst/>
-          </a:prstGeom>
-          <a:noFill/>
-          <a:ln/>
-        </p:spPr>
-        <p:txBody>
-          <a:bodyPr wrap="square" lIns="0" tIns="0" rIns="0" bIns="0" rtlCol="0" anchor="ctr">
-            <a:normAutofit/>
-          </a:bodyPr>
-          <a:lstStyle/>
-          <a:p>
-            <a:pPr marL="0" indent="0">
-              <a:buNone/>
-            </a:pPr>
-            <a:r>
-              <a:rPr lang="en-US" sz="1260" dirty="0">
-                <a:solidFill>
-                  <a:srgbClr val="274673"/>
-                </a:solidFill>
-                <a:latin typeface="Arial" pitchFamily="34" charset="0"/>
-                <a:ea typeface="Arial" pitchFamily="34" charset="-122"/>
-                <a:cs typeface="Arial" pitchFamily="34" charset="-120"/>
-              </a:rPr>
-              <a:t>Large-scale user-study evaluation</a:t>
-            </a:r>
-            <a:endParaRPr lang="en-US" sz="1260" dirty="0"/>
-          </a:p>
-        </p:txBody>
-      </p:sp>
-      <p:sp>
-        <p:nvSpPr>
-          <p:cNvPr id="34" name="Shape 32"/>
-          <p:cNvSpPr/>
-          <p:nvPr/>
-        </p:nvSpPr>
-        <p:spPr>
-          <a:xfrm>
-            <a:off x="4681728" y="4471416"/>
-            <a:ext cx="640080" cy="256032"/>
-          </a:xfrm>
-          <a:prstGeom prst="roundRect">
-            <a:avLst>
-              <a:gd name="adj" fmla="val 14286"/>
-            </a:avLst>
-          </a:prstGeom>
-          <a:solidFill>
-            <a:srgbClr val="FFF5E8"/>
-          </a:solidFill>
-          <a:ln w="10160">
-            <a:solidFill>
-              <a:srgbClr val="F2C47F"/>
-            </a:solidFill>
-            <a:prstDash val="solid"/>
-          </a:ln>
-        </p:spPr>
-      </p:sp>
-      <p:sp>
-        <p:nvSpPr>
-          <p:cNvPr id="35" name="Text 33"/>
-          <p:cNvSpPr/>
-          <p:nvPr/>
-        </p:nvSpPr>
-        <p:spPr>
-          <a:xfrm>
-            <a:off x="4754880" y="4503420"/>
-            <a:ext cx="128016" cy="91440"/>
-          </a:xfrm>
-          <a:prstGeom prst="rect">
-            <a:avLst/>
-          </a:prstGeom>
-          <a:noFill/>
-          <a:ln/>
-        </p:spPr>
-        <p:txBody>
-          <a:bodyPr wrap="square" lIns="0" tIns="0" rIns="0" bIns="0" rtlCol="0" anchor="ctr"/>
-          <a:lstStyle/>
-          <a:p>
-            <a:pPr marL="0" indent="0" algn="ctr">
-              <a:buNone/>
-            </a:pPr>
-            <a:r>
-              <a:rPr lang="en-US" sz="1250" b="1" dirty="0">
-                <a:solidFill>
-                  <a:srgbClr val="F2A54A"/>
-                </a:solidFill>
-                <a:latin typeface="Arial" pitchFamily="34" charset="0"/>
-                <a:ea typeface="Arial" pitchFamily="34" charset="-122"/>
-                <a:cs typeface="Arial" pitchFamily="34" charset="-120"/>
-              </a:rPr>
-              <a:t>△</a:t>
-            </a:r>
-            <a:endParaRPr lang="en-US" sz="1250" dirty="0"/>
-          </a:p>
-        </p:txBody>
-      </p:sp>
-      <p:sp>
-        <p:nvSpPr>
-          <p:cNvPr id="36" name="Text 34"/>
-          <p:cNvSpPr/>
-          <p:nvPr/>
-        </p:nvSpPr>
-        <p:spPr>
-          <a:xfrm>
-            <a:off x="4901184" y="4507992"/>
-            <a:ext cx="365760" cy="91440"/>
-          </a:xfrm>
-          <a:prstGeom prst="rect">
-            <a:avLst/>
-          </a:prstGeom>
-          <a:noFill/>
-          <a:ln/>
-        </p:spPr>
-        <p:txBody>
-          <a:bodyPr wrap="square" lIns="0" tIns="0" rIns="0" bIns="0" rtlCol="0" anchor="ctr">
-            <a:normAutofit/>
-          </a:bodyPr>
-          <a:lstStyle/>
-          <a:p>
-            <a:pPr marL="0" indent="0" algn="l">
-              <a:buNone/>
-            </a:pPr>
-            <a:r>
-              <a:rPr lang="en-US" sz="1080" b="1" dirty="0">
-                <a:solidFill>
-                  <a:srgbClr val="F2A54A"/>
-                </a:solidFill>
-                <a:latin typeface="Arial" pitchFamily="34" charset="0"/>
-                <a:ea typeface="Arial" pitchFamily="34" charset="-122"/>
-                <a:cs typeface="Arial" pitchFamily="34" charset="-120"/>
-              </a:rPr>
-              <a:t>Partially achieved</a:t>
-            </a:r>
-            <a:endParaRPr lang="en-US" sz="1080" dirty="0"/>
-          </a:p>
-        </p:txBody>
-      </p:sp>
-      <p:sp>
-        <p:nvSpPr>
-          <p:cNvPr id="37" name="Shape 35"/>
-          <p:cNvSpPr/>
-          <p:nvPr/>
-        </p:nvSpPr>
-        <p:spPr>
-          <a:xfrm>
-            <a:off x="7479792" y="1152144"/>
-            <a:ext cx="4050792" cy="4736592"/>
-          </a:xfrm>
-          <a:prstGeom prst="roundRect">
-            <a:avLst>
-              <a:gd name="adj" fmla="val 1806"/>
-            </a:avLst>
-          </a:prstGeom>
-          <a:solidFill>
-            <a:srgbClr val="FFFFFF"/>
-          </a:solidFill>
-          <a:ln w="13970">
-            <a:solidFill>
-              <a:srgbClr val="C8D9EA"/>
-            </a:solidFill>
-            <a:prstDash val="solid"/>
-          </a:ln>
-          <a:effectLst>
-            <a:outerShdw blurRad="15240" dist="12700" dir="2700000" algn="bl" rotWithShape="0">
-              <a:srgbClr val="000000">
-                <a:alpha val="12000"/>
-              </a:srgbClr>
-            </a:outerShdw>
-          </a:effectLst>
-        </p:spPr>
-      </p:sp>
-      <p:sp>
-        <p:nvSpPr>
-          <p:cNvPr id="38" name="Shape 36"/>
-          <p:cNvSpPr/>
-          <p:nvPr/>
-        </p:nvSpPr>
-        <p:spPr>
-          <a:xfrm>
-            <a:off x="7717536" y="969264"/>
-            <a:ext cx="1737360" cy="310896"/>
-          </a:xfrm>
-          <a:prstGeom prst="roundRect">
-            <a:avLst>
-              <a:gd name="adj" fmla="val 35294"/>
-            </a:avLst>
-          </a:prstGeom>
-          <a:solidFill>
-            <a:srgbClr val="EAF0FF"/>
-          </a:solidFill>
-          <a:ln w="12700">
-            <a:solidFill>
-              <a:srgbClr val="EAF0FF"/>
-            </a:solidFill>
-            <a:prstDash val="solid"/>
-          </a:ln>
-        </p:spPr>
-      </p:sp>
-      <p:sp>
-        <p:nvSpPr>
-          <p:cNvPr id="39" name="Text 37"/>
-          <p:cNvSpPr/>
-          <p:nvPr/>
-        </p:nvSpPr>
-        <p:spPr>
-          <a:xfrm>
-            <a:off x="7717536" y="1005840"/>
-            <a:ext cx="1737360" cy="256032"/>
-          </a:xfrm>
-          <a:prstGeom prst="rect">
-            <a:avLst/>
-          </a:prstGeom>
-          <a:noFill/>
-          <a:ln/>
-        </p:spPr>
-        <p:txBody>
-          <a:bodyPr wrap="square" lIns="0" tIns="0" rIns="0" bIns="0" rtlCol="0" anchor="ctr"/>
-          <a:lstStyle/>
-          <a:p>
-            <a:pPr marL="0" indent="0" algn="ctr">
-              <a:buNone/>
-            </a:pPr>
-            <a:r>
-              <a:rPr lang="en-US" sz="1250" b="1" dirty="0">
-                <a:solidFill>
-                  <a:srgbClr val="1E3F7A"/>
-                </a:solidFill>
-                <a:latin typeface="Arial" pitchFamily="34" charset="0"/>
-                <a:ea typeface="Arial" pitchFamily="34" charset="-122"/>
-                <a:cs typeface="Arial" pitchFamily="34" charset="-120"/>
-              </a:rPr>
-              <a:t>Key takeaways</a:t>
-            </a:r>
-            <a:endParaRPr lang="en-US" sz="1250" dirty="0"/>
-          </a:p>
-        </p:txBody>
-      </p:sp>
-      <p:sp>
-        <p:nvSpPr>
-          <p:cNvPr id="40" name="Text 38"/>
-          <p:cNvSpPr/>
-          <p:nvPr/>
-        </p:nvSpPr>
-        <p:spPr>
-          <a:xfrm>
-            <a:off x="7735824" y="1481328"/>
-            <a:ext cx="3401568" cy="2011680"/>
-          </a:xfrm>
-          <a:prstGeom prst="rect">
-            <a:avLst/>
-          </a:prstGeom>
-          <a:noFill/>
-          <a:ln/>
-        </p:spPr>
-        <p:txBody>
-          <a:bodyPr wrap="square" lIns="254" tIns="254" rIns="254" bIns="254" rtlCol="0" anchor="t">
-            <a:normAutofit/>
-          </a:bodyPr>
-          <a:lstStyle/>
-          <a:p>
-            <a:pPr marL="0" indent="0">
-              <a:buNone/>
-            </a:pPr>
-            <a:r>
-              <a:rPr lang="en-US" sz="1480" dirty="0">
-                <a:solidFill>
-                  <a:srgbClr val="274673"/>
-                </a:solidFill>
-                <a:latin typeface="Arial" pitchFamily="34" charset="0"/>
-                <a:ea typeface="Arial" pitchFamily="34" charset="-122"/>
-                <a:cs typeface="Arial" pitchFamily="34" charset="-120"/>
-              </a:rPr>
-              <a:t>• CatLingo already supports a coherent learning workflow: login, game selection, interactive practice, and progress review.</a:t>
-            </a:r>
-            <a:endParaRPr lang="en-US" sz="1480" dirty="0"/>
-          </a:p>
-          <a:p>
-            <a:pPr marL="0" indent="0">
-              <a:buNone/>
-            </a:pPr>
-            <a:endParaRPr lang="en-US" sz="1480" dirty="0"/>
-          </a:p>
-          <a:p>
-            <a:pPr marL="0" indent="0">
-              <a:buNone/>
-            </a:pPr>
-            <a:r>
-              <a:rPr lang="en-US" sz="1480" dirty="0">
-                <a:solidFill>
-                  <a:srgbClr val="274673"/>
-                </a:solidFill>
-                <a:latin typeface="Arial" pitchFamily="34" charset="0"/>
-                <a:ea typeface="Arial" pitchFamily="34" charset="-122"/>
-                <a:cs typeface="Arial" pitchFamily="34" charset="-120"/>
-              </a:rPr>
-              <a:t>• The prototype is strongest in integrated structure, local persistence, and the technically grounded speaking workflow.</a:t>
-            </a:r>
-            <a:endParaRPr lang="en-US" sz="1480" dirty="0"/>
-          </a:p>
-          <a:p>
-            <a:pPr marL="0" indent="0">
-              <a:buNone/>
-            </a:pPr>
-            <a:endParaRPr lang="en-US" sz="1480" dirty="0"/>
-          </a:p>
-          <a:p>
-            <a:pPr marL="0" indent="0">
-              <a:buNone/>
-            </a:pPr>
-            <a:r>
-              <a:rPr lang="en-US" sz="1480" dirty="0">
-                <a:solidFill>
-                  <a:srgbClr val="274673"/>
-                </a:solidFill>
-                <a:latin typeface="Arial" pitchFamily="34" charset="0"/>
-                <a:ea typeface="Arial" pitchFamily="34" charset="-122"/>
-                <a:cs typeface="Arial" pitchFamily="34" charset="-120"/>
-              </a:rPr>
-              <a:t>• The current project demonstrates feasibility and internal coherence more strongly than long-term pedagogical impact at scale.</a:t>
-            </a:r>
-            <a:endParaRPr lang="en-US" sz="1480" dirty="0"/>
-          </a:p>
-        </p:txBody>
-      </p:sp>
       <p:pic>
         <p:nvPicPr>
-          <p:cNvPr id="41" name="Image 0" descr="/mnt/data/work/crops3/profile_single.png"/>
+          <p:cNvPr id="22" name="图片 21">
+            <a:extLst>
+              <a:ext uri="{FF2B5EF4-FFF2-40B4-BE49-F238E27FC236}">
+                <a16:creationId xmlns:a16="http://schemas.microsoft.com/office/drawing/2014/main" id="{8A6FE7C7-1BD2-4504-8BAB-A00612E6BDE5}"/>
+              </a:ext>
+            </a:extLst>
+          </p:cNvPr>
           <p:cNvPicPr>
             <a:picLocks noChangeAspect="1"/>
           </p:cNvPicPr>
           <p:nvPr/>
         </p:nvPicPr>
         <p:blipFill>
-          <a:blip r:embed="rId3"/>
+          <a:blip r:embed="rId9"/>
           <a:stretch>
             <a:fillRect/>
           </a:stretch>
         </p:blipFill>
         <p:spPr>
           <a:xfrm>
-            <a:off x="8789543" y="3557016"/>
-            <a:ext cx="1180942" cy="1938528"/>
+            <a:off x="7327458" y="1213687"/>
+            <a:ext cx="2549150" cy="4714556"/>
           </a:xfrm>
           <a:prstGeom prst="rect">
             <a:avLst/>
           </a:prstGeom>
         </p:spPr>
       </p:pic>
-      <p:sp>
-        <p:nvSpPr>
-          <p:cNvPr id="42" name="Text 39"/>
-          <p:cNvSpPr/>
-          <p:nvPr/>
-        </p:nvSpPr>
-        <p:spPr>
-          <a:xfrm>
-            <a:off x="7918704" y="3383280"/>
-            <a:ext cx="3200400" cy="164592"/>
-          </a:xfrm>
-          <a:prstGeom prst="rect">
-            <a:avLst/>
-          </a:prstGeom>
-          <a:noFill/>
-          <a:ln/>
-        </p:spPr>
-        <p:txBody>
-          <a:bodyPr wrap="square" lIns="0" tIns="0" rIns="0" bIns="0" rtlCol="0" anchor="ctr"/>
-          <a:lstStyle/>
-          <a:p>
-            <a:pPr marL="0" indent="0" algn="ctr">
-              <a:buNone/>
-            </a:pPr>
-            <a:r>
-              <a:rPr lang="en-US" sz="1260" b="1" dirty="0">
-                <a:solidFill>
-                  <a:srgbClr val="1E3F7A"/>
-                </a:solidFill>
-                <a:latin typeface="Arial" pitchFamily="34" charset="0"/>
-                <a:ea typeface="Arial" pitchFamily="34" charset="-122"/>
-                <a:cs typeface="Arial" pitchFamily="34" charset="-120"/>
-              </a:rPr>
-              <a:t>Profile/progress evidence</a:t>
-            </a:r>
-            <a:endParaRPr lang="en-US" sz="1260" dirty="0"/>
-          </a:p>
-        </p:txBody>
-      </p:sp>
-      <p:pic>
-        <p:nvPicPr>
-          <p:cNvPr id="43" name="Image 1" descr="/mnt/data/work/template_media/image2.jpg"/>
-          <p:cNvPicPr>
-            <a:picLocks noChangeAspect="1"/>
-          </p:cNvPicPr>
-          <p:nvPr/>
-        </p:nvPicPr>
-        <p:blipFill>
-          <a:blip r:embed="rId4"/>
-          <a:srcRect t="44800" b="44800"/>
-          <a:stretch/>
-        </p:blipFill>
-        <p:spPr>
-          <a:xfrm>
-            <a:off x="0" y="6144768"/>
-            <a:ext cx="12191695" cy="713232"/>
-          </a:xfrm>
-          <a:prstGeom prst="rect">
-            <a:avLst/>
-          </a:prstGeom>
-        </p:spPr>
-      </p:pic>
-      <p:pic>
-        <p:nvPicPr>
-          <p:cNvPr id="44" name="Image 2" descr="/mnt/data/work/qm_logo_transparent.png"/>
-          <p:cNvPicPr>
-            <a:picLocks noChangeAspect="1"/>
-          </p:cNvPicPr>
-          <p:nvPr/>
-        </p:nvPicPr>
-        <p:blipFill>
-          <a:blip r:embed="rId5"/>
-          <a:stretch>
-            <a:fillRect/>
-          </a:stretch>
-        </p:blipFill>
-        <p:spPr>
-          <a:xfrm>
-            <a:off x="580644" y="6236208"/>
-            <a:ext cx="1389888" cy="438912"/>
-          </a:xfrm>
-          <a:prstGeom prst="rect">
-            <a:avLst/>
-          </a:prstGeom>
-        </p:spPr>
-      </p:pic>
-      <p:sp>
-        <p:nvSpPr>
-          <p:cNvPr id="45" name="Text 40"/>
-          <p:cNvSpPr/>
-          <p:nvPr/>
-        </p:nvSpPr>
-        <p:spPr>
-          <a:xfrm>
-            <a:off x="11688775" y="6309360"/>
-            <a:ext cx="228600" cy="201168"/>
-          </a:xfrm>
-          <a:prstGeom prst="rect">
-            <a:avLst/>
-          </a:prstGeom>
-          <a:noFill/>
-          <a:ln/>
-        </p:spPr>
-        <p:txBody>
-          <a:bodyPr wrap="square" lIns="0" tIns="0" rIns="0" bIns="0" rtlCol="0" anchor="ctr"/>
-          <a:lstStyle/>
-          <a:p>
-            <a:pPr marL="0" indent="0" algn="r">
-              <a:buNone/>
-            </a:pPr>
-            <a:r>
-              <a:rPr lang="en-US" sz="1100" dirty="0">
-                <a:solidFill>
-                  <a:srgbClr val="FFFFFF"/>
-                </a:solidFill>
-                <a:latin typeface="Arial" pitchFamily="34" charset="0"/>
-                <a:ea typeface="Arial" pitchFamily="34" charset="-122"/>
-                <a:cs typeface="Arial" pitchFamily="34" charset="-120"/>
-              </a:rPr>
-              <a:t>8</a:t>
-            </a:r>
-            <a:endParaRPr lang="en-US" sz="1100" dirty="0"/>
-          </a:p>
-        </p:txBody>
-      </p:sp>
     </p:spTree>
-  </p:cSld>
-  <p:clrMapOvr>
-    <a:masterClrMapping/>
-  </p:clrMapOvr>
-</p:sld>
-</file>
-
-<file path=ppt/slides/slide9.xml><?xml version="1.0" encoding="utf-8"?>
-<p:sld xmlns:a="http://schemas.openxmlformats.org/drawingml/2006/main" xmlns:r="http://schemas.openxmlformats.org/officeDocument/2006/relationships" xmlns:p="http://schemas.openxmlformats.org/presentationml/2006/main">
-  <p:cSld name="Slide 9">
-    <p:spTree>
-      <p:nvGrpSpPr>
-        <p:cNvPr id="1" name=""/>
-        <p:cNvGrpSpPr/>
-        <p:nvPr/>
-      </p:nvGrpSpPr>
-      <p:grpSpPr>
-        <a:xfrm>
-          <a:off x="0" y="0"/>
-          <a:ext cx="0" cy="0"/>
-          <a:chOff x="0" y="0"/>
-          <a:chExt cx="0" cy="0"/>
-        </a:xfrm>
-      </p:grpSpPr>
-      <p:sp>
-        <p:nvSpPr>
-          <p:cNvPr id="2" name="Text 0"/>
-          <p:cNvSpPr/>
-          <p:nvPr/>
-        </p:nvSpPr>
-        <p:spPr>
-          <a:xfrm>
-            <a:off x="640080" y="274320"/>
-            <a:ext cx="10881360" cy="384048"/>
-          </a:xfrm>
-          <a:prstGeom prst="rect">
-            <a:avLst/>
-          </a:prstGeom>
-          <a:noFill/>
-          <a:ln/>
-        </p:spPr>
-        <p:txBody>
-          <a:bodyPr wrap="square" lIns="0" tIns="0" rIns="0" bIns="0" rtlCol="0" anchor="ctr"/>
-          <a:lstStyle/>
-          <a:p>
-            <a:pPr marL="0" indent="0" algn="ctr">
-              <a:buNone/>
-            </a:pPr>
-            <a:r>
-              <a:rPr lang="en-US" sz="2500" b="1" dirty="0">
-                <a:solidFill>
-                  <a:srgbClr val="23488B"/>
-                </a:solidFill>
-                <a:latin typeface="Arial" pitchFamily="34" charset="0"/>
-                <a:ea typeface="Arial" pitchFamily="34" charset="-122"/>
-                <a:cs typeface="Arial" pitchFamily="34" charset="-120"/>
-              </a:rPr>
-              <a:t>Limitations and Future Work</a:t>
-            </a:r>
-            <a:endParaRPr lang="en-US" sz="2500" dirty="0"/>
-          </a:p>
-        </p:txBody>
-      </p:sp>
-      <p:sp>
-        <p:nvSpPr>
-          <p:cNvPr id="3" name="Text 1"/>
-          <p:cNvSpPr/>
-          <p:nvPr/>
-        </p:nvSpPr>
-        <p:spPr>
-          <a:xfrm>
-            <a:off x="1005840" y="694944"/>
-            <a:ext cx="10149840" cy="219456"/>
-          </a:xfrm>
-          <a:prstGeom prst="rect">
-            <a:avLst/>
-          </a:prstGeom>
-          <a:noFill/>
-          <a:ln/>
-        </p:spPr>
-        <p:txBody>
-          <a:bodyPr wrap="square" lIns="0" tIns="0" rIns="0" bIns="0" rtlCol="0" anchor="ctr"/>
-          <a:lstStyle/>
-          <a:p>
-            <a:pPr marL="0" indent="0" algn="ctr">
-              <a:buNone/>
-            </a:pPr>
-            <a:r>
-              <a:rPr lang="en-US" sz="1050" i="1" dirty="0">
-                <a:solidFill>
-                  <a:srgbClr val="667A99"/>
-                </a:solidFill>
-                <a:latin typeface="Arial" pitchFamily="34" charset="0"/>
-                <a:ea typeface="Arial" pitchFamily="34" charset="-122"/>
-                <a:cs typeface="Arial" pitchFamily="34" charset="-120"/>
-              </a:rPr>
-              <a:t>The prototype establishes a solid foundation, but not the final endpoint</a:t>
-            </a:r>
-            <a:endParaRPr lang="en-US" sz="1050" dirty="0"/>
-          </a:p>
-        </p:txBody>
-      </p:sp>
-      <p:sp>
-        <p:nvSpPr>
-          <p:cNvPr id="4" name="Shape 2"/>
-          <p:cNvSpPr/>
-          <p:nvPr/>
-        </p:nvSpPr>
-        <p:spPr>
-          <a:xfrm>
-            <a:off x="658368" y="1207008"/>
-            <a:ext cx="5413248" cy="4526280"/>
-          </a:xfrm>
-          <a:prstGeom prst="roundRect">
-            <a:avLst>
-              <a:gd name="adj" fmla="val 1616"/>
-            </a:avLst>
-          </a:prstGeom>
-          <a:solidFill>
-            <a:srgbClr val="FFF1F1"/>
-          </a:solidFill>
-          <a:ln w="13970">
-            <a:solidFill>
-              <a:srgbClr val="F1C1C1"/>
-            </a:solidFill>
-            <a:prstDash val="solid"/>
-          </a:ln>
-          <a:effectLst>
-            <a:outerShdw blurRad="15240" dist="12700" dir="2700000" algn="bl" rotWithShape="0">
-              <a:srgbClr val="000000">
-                <a:alpha val="12000"/>
-              </a:srgbClr>
-            </a:outerShdw>
-          </a:effectLst>
-        </p:spPr>
-      </p:sp>
-      <p:sp>
-        <p:nvSpPr>
-          <p:cNvPr id="5" name="Shape 3"/>
-          <p:cNvSpPr/>
-          <p:nvPr/>
-        </p:nvSpPr>
-        <p:spPr>
-          <a:xfrm>
-            <a:off x="6117336" y="1207008"/>
-            <a:ext cx="5413248" cy="4526280"/>
-          </a:xfrm>
-          <a:prstGeom prst="roundRect">
-            <a:avLst>
-              <a:gd name="adj" fmla="val 1616"/>
-            </a:avLst>
-          </a:prstGeom>
-          <a:solidFill>
-            <a:srgbClr val="F2FAEE"/>
-          </a:solidFill>
-          <a:ln w="13970">
-            <a:solidFill>
-              <a:srgbClr val="CFE3B9"/>
-            </a:solidFill>
-            <a:prstDash val="solid"/>
-          </a:ln>
-          <a:effectLst>
-            <a:outerShdw blurRad="15240" dist="12700" dir="2700000" algn="bl" rotWithShape="0">
-              <a:srgbClr val="000000">
-                <a:alpha val="12000"/>
-              </a:srgbClr>
-            </a:outerShdw>
-          </a:effectLst>
-        </p:spPr>
-      </p:sp>
-      <p:sp>
-        <p:nvSpPr>
-          <p:cNvPr id="6" name="Shape 4"/>
-          <p:cNvSpPr/>
-          <p:nvPr/>
-        </p:nvSpPr>
-        <p:spPr>
-          <a:xfrm>
-            <a:off x="896112" y="1024128"/>
-            <a:ext cx="1691640" cy="310896"/>
-          </a:xfrm>
-          <a:prstGeom prst="roundRect">
-            <a:avLst>
-              <a:gd name="adj" fmla="val 35294"/>
-            </a:avLst>
-          </a:prstGeom>
-          <a:solidFill>
-            <a:srgbClr val="FFE7E7"/>
-          </a:solidFill>
-          <a:ln w="12700">
-            <a:solidFill>
-              <a:srgbClr val="FFE7E7"/>
-            </a:solidFill>
-            <a:prstDash val="solid"/>
-          </a:ln>
-        </p:spPr>
-      </p:sp>
-      <p:sp>
-        <p:nvSpPr>
-          <p:cNvPr id="7" name="Text 5"/>
-          <p:cNvSpPr/>
-          <p:nvPr/>
-        </p:nvSpPr>
-        <p:spPr>
-          <a:xfrm>
-            <a:off x="896112" y="1060704"/>
-            <a:ext cx="1691640" cy="256032"/>
-          </a:xfrm>
-          <a:prstGeom prst="rect">
-            <a:avLst/>
-          </a:prstGeom>
-          <a:noFill/>
-          <a:ln/>
-        </p:spPr>
-        <p:txBody>
-          <a:bodyPr wrap="square" lIns="0" tIns="0" rIns="0" bIns="0" rtlCol="0" anchor="ctr"/>
-          <a:lstStyle/>
-          <a:p>
-            <a:pPr marL="0" indent="0" algn="ctr">
-              <a:buNone/>
-            </a:pPr>
-            <a:r>
-              <a:rPr lang="en-US" sz="1250" b="1" dirty="0">
-                <a:solidFill>
-                  <a:srgbClr val="D95858"/>
-                </a:solidFill>
-                <a:latin typeface="Arial" pitchFamily="34" charset="0"/>
-                <a:ea typeface="Arial" pitchFamily="34" charset="-122"/>
-                <a:cs typeface="Arial" pitchFamily="34" charset="-120"/>
-              </a:rPr>
-              <a:t>Limitations</a:t>
-            </a:r>
-            <a:endParaRPr lang="en-US" sz="1250" dirty="0"/>
-          </a:p>
-        </p:txBody>
-      </p:sp>
-      <p:sp>
-        <p:nvSpPr>
-          <p:cNvPr id="8" name="Shape 6"/>
-          <p:cNvSpPr/>
-          <p:nvPr/>
-        </p:nvSpPr>
-        <p:spPr>
-          <a:xfrm>
-            <a:off x="6355080" y="1024128"/>
-            <a:ext cx="1783080" cy="310896"/>
-          </a:xfrm>
-          <a:prstGeom prst="roundRect">
-            <a:avLst>
-              <a:gd name="adj" fmla="val 35294"/>
-            </a:avLst>
-          </a:prstGeom>
-          <a:solidFill>
-            <a:srgbClr val="EAF7E0"/>
-          </a:solidFill>
-          <a:ln w="12700">
-            <a:solidFill>
-              <a:srgbClr val="EAF7E0"/>
-            </a:solidFill>
-            <a:prstDash val="solid"/>
-          </a:ln>
-        </p:spPr>
-      </p:sp>
-      <p:sp>
-        <p:nvSpPr>
-          <p:cNvPr id="9" name="Text 7"/>
-          <p:cNvSpPr/>
-          <p:nvPr/>
-        </p:nvSpPr>
-        <p:spPr>
-          <a:xfrm>
-            <a:off x="6355080" y="1060704"/>
-            <a:ext cx="1783080" cy="256032"/>
-          </a:xfrm>
-          <a:prstGeom prst="rect">
-            <a:avLst/>
-          </a:prstGeom>
-          <a:noFill/>
-          <a:ln/>
-        </p:spPr>
-        <p:txBody>
-          <a:bodyPr wrap="square" lIns="0" tIns="0" rIns="0" bIns="0" rtlCol="0" anchor="ctr"/>
-          <a:lstStyle/>
-          <a:p>
-            <a:pPr marL="0" indent="0" algn="ctr">
-              <a:buNone/>
-            </a:pPr>
-            <a:r>
-              <a:rPr lang="en-US" sz="1250" b="1" dirty="0">
-                <a:solidFill>
-                  <a:srgbClr val="4B8B2B"/>
-                </a:solidFill>
-                <a:latin typeface="Arial" pitchFamily="34" charset="0"/>
-                <a:ea typeface="Arial" pitchFamily="34" charset="-122"/>
-                <a:cs typeface="Arial" pitchFamily="34" charset="-120"/>
-              </a:rPr>
-              <a:t>Future work</a:t>
-            </a:r>
-            <a:endParaRPr lang="en-US" sz="1250" dirty="0"/>
-          </a:p>
-        </p:txBody>
-      </p:sp>
-      <p:sp>
-        <p:nvSpPr>
-          <p:cNvPr id="10" name="Text 8"/>
-          <p:cNvSpPr/>
-          <p:nvPr/>
-        </p:nvSpPr>
-        <p:spPr>
-          <a:xfrm>
-            <a:off x="932688" y="1536192"/>
-            <a:ext cx="4663440" cy="3611880"/>
-          </a:xfrm>
-          <a:prstGeom prst="rect">
-            <a:avLst/>
-          </a:prstGeom>
-          <a:noFill/>
-          <a:ln/>
-        </p:spPr>
-        <p:txBody>
-          <a:bodyPr wrap="square" lIns="254" tIns="254" rIns="254" bIns="254" rtlCol="0" anchor="t">
-            <a:normAutofit/>
-          </a:bodyPr>
-          <a:lstStyle/>
-          <a:p>
-            <a:pPr marL="0" indent="0">
-              <a:buNone/>
-            </a:pPr>
-            <a:r>
-              <a:rPr lang="en-US" sz="1500" dirty="0">
-                <a:solidFill>
-                  <a:srgbClr val="8C3B3B"/>
-                </a:solidFill>
-                <a:latin typeface="Arial" pitchFamily="34" charset="0"/>
-                <a:ea typeface="Arial" pitchFamily="34" charset="-122"/>
-                <a:cs typeface="Arial" pitchFamily="34" charset="-120"/>
-              </a:rPr>
-              <a:t>• Data are stored locally only, which suits a student prototype but limits broader deployment.</a:t>
-            </a:r>
-            <a:endParaRPr lang="en-US" sz="1500" dirty="0"/>
-          </a:p>
-          <a:p>
-            <a:pPr marL="0" indent="0">
-              <a:buNone/>
-            </a:pPr>
-            <a:endParaRPr lang="en-US" sz="1500" dirty="0"/>
-          </a:p>
-          <a:p>
-            <a:pPr marL="0" indent="0">
-              <a:buNone/>
-            </a:pPr>
-            <a:r>
-              <a:rPr lang="en-US" sz="1500" dirty="0">
-                <a:solidFill>
-                  <a:srgbClr val="8C3B3B"/>
-                </a:solidFill>
-                <a:latin typeface="Arial" pitchFamily="34" charset="0"/>
-                <a:ea typeface="Arial" pitchFamily="34" charset="-122"/>
-                <a:cs typeface="Arial" pitchFamily="34" charset="-120"/>
-              </a:rPr>
-              <a:t>• Pronunciation outcomes can vary with device conditions, background noise, and external service behaviour.</a:t>
-            </a:r>
-            <a:endParaRPr lang="en-US" sz="1500" dirty="0"/>
-          </a:p>
-          <a:p>
-            <a:pPr marL="0" indent="0">
-              <a:buNone/>
-            </a:pPr>
-            <a:endParaRPr lang="en-US" sz="1500" dirty="0"/>
-          </a:p>
-          <a:p>
-            <a:pPr marL="0" indent="0">
-              <a:buNone/>
-            </a:pPr>
-            <a:r>
-              <a:rPr lang="en-US" sz="1500" dirty="0">
-                <a:solidFill>
-                  <a:srgbClr val="8C3B3B"/>
-                </a:solidFill>
-                <a:latin typeface="Arial" pitchFamily="34" charset="0"/>
-                <a:ea typeface="Arial" pitchFamily="34" charset="-122"/>
-                <a:cs typeface="Arial" pitchFamily="34" charset="-120"/>
-              </a:rPr>
-              <a:t>• Question quality still depends on dataset balance, preprocessing quality, and distractor design.</a:t>
-            </a:r>
-            <a:endParaRPr lang="en-US" sz="1500" dirty="0"/>
-          </a:p>
-          <a:p>
-            <a:pPr marL="0" indent="0">
-              <a:buNone/>
-            </a:pPr>
-            <a:endParaRPr lang="en-US" sz="1500" dirty="0"/>
-          </a:p>
-          <a:p>
-            <a:pPr marL="0" indent="0">
-              <a:buNone/>
-            </a:pPr>
-            <a:r>
-              <a:rPr lang="en-US" sz="1500" dirty="0">
-                <a:solidFill>
-                  <a:srgbClr val="8C3B3B"/>
-                </a:solidFill>
-                <a:latin typeface="Arial" pitchFamily="34" charset="0"/>
-                <a:ea typeface="Arial" pitchFamily="34" charset="-122"/>
-                <a:cs typeface="Arial" pitchFamily="34" charset="-120"/>
-              </a:rPr>
-              <a:t>• A broader user study is still needed to validate long-term learning impact.</a:t>
-            </a:r>
-            <a:endParaRPr lang="en-US" sz="1500" dirty="0"/>
-          </a:p>
-        </p:txBody>
-      </p:sp>
-      <p:sp>
-        <p:nvSpPr>
-          <p:cNvPr id="11" name="Text 9"/>
-          <p:cNvSpPr/>
-          <p:nvPr/>
-        </p:nvSpPr>
-        <p:spPr>
-          <a:xfrm>
-            <a:off x="6391656" y="1536192"/>
-            <a:ext cx="4663440" cy="3703320"/>
-          </a:xfrm>
-          <a:prstGeom prst="rect">
-            <a:avLst/>
-          </a:prstGeom>
-          <a:noFill/>
-          <a:ln/>
-        </p:spPr>
-        <p:txBody>
-          <a:bodyPr wrap="square" lIns="254" tIns="254" rIns="254" bIns="254" rtlCol="0" anchor="t">
-            <a:normAutofit/>
-          </a:bodyPr>
-          <a:lstStyle/>
-          <a:p>
-            <a:pPr marL="0" indent="0">
-              <a:buNone/>
-            </a:pPr>
-            <a:r>
-              <a:rPr lang="en-US" sz="1500" dirty="0">
-                <a:solidFill>
-                  <a:srgbClr val="3E6F28"/>
-                </a:solidFill>
-                <a:latin typeface="Arial" pitchFamily="34" charset="0"/>
-                <a:ea typeface="Arial" pitchFamily="34" charset="-122"/>
-                <a:cs typeface="Arial" pitchFamily="34" charset="-120"/>
-              </a:rPr>
-              <a:t>• Add cloud-backed accounts and cross-device synchronisation.</a:t>
-            </a:r>
-            <a:endParaRPr lang="en-US" sz="1500" dirty="0"/>
-          </a:p>
-          <a:p>
-            <a:pPr marL="0" indent="0">
-              <a:buNone/>
-            </a:pPr>
-            <a:endParaRPr lang="en-US" sz="1500" dirty="0"/>
-          </a:p>
-          <a:p>
-            <a:pPr marL="0" indent="0">
-              <a:buNone/>
-            </a:pPr>
-            <a:r>
-              <a:rPr lang="en-US" sz="1500" dirty="0">
-                <a:solidFill>
-                  <a:srgbClr val="3E6F28"/>
-                </a:solidFill>
-                <a:latin typeface="Arial" pitchFamily="34" charset="0"/>
-                <a:ea typeface="Arial" pitchFamily="34" charset="-122"/>
-                <a:cs typeface="Arial" pitchFamily="34" charset="-120"/>
-              </a:rPr>
-              <a:t>• Expand achievement logic and richer progress analytics.</a:t>
-            </a:r>
-            <a:endParaRPr lang="en-US" sz="1500" dirty="0"/>
-          </a:p>
-          <a:p>
-            <a:pPr marL="0" indent="0">
-              <a:buNone/>
-            </a:pPr>
-            <a:endParaRPr lang="en-US" sz="1500" dirty="0"/>
-          </a:p>
-          <a:p>
-            <a:pPr marL="0" indent="0">
-              <a:buNone/>
-            </a:pPr>
-            <a:r>
-              <a:rPr lang="en-US" sz="1500" dirty="0">
-                <a:solidFill>
-                  <a:srgbClr val="3E6F28"/>
-                </a:solidFill>
-                <a:latin typeface="Arial" pitchFamily="34" charset="0"/>
-                <a:ea typeface="Arial" pitchFamily="34" charset="-122"/>
-                <a:cs typeface="Arial" pitchFamily="34" charset="-120"/>
-              </a:rPr>
-              <a:t>• Improve Word Puzzle curation and difficulty modelling.</a:t>
-            </a:r>
-            <a:endParaRPr lang="en-US" sz="1500" dirty="0"/>
-          </a:p>
-          <a:p>
-            <a:pPr marL="0" indent="0">
-              <a:buNone/>
-            </a:pPr>
-            <a:endParaRPr lang="en-US" sz="1500" dirty="0"/>
-          </a:p>
-          <a:p>
-            <a:pPr marL="0" indent="0">
-              <a:buNone/>
-            </a:pPr>
-            <a:r>
-              <a:rPr lang="en-US" sz="1500" dirty="0">
-                <a:solidFill>
-                  <a:srgbClr val="3E6F28"/>
-                </a:solidFill>
-                <a:latin typeface="Arial" pitchFamily="34" charset="0"/>
-                <a:ea typeface="Arial" pitchFamily="34" charset="-122"/>
-                <a:cs typeface="Arial" pitchFamily="34" charset="-120"/>
-              </a:rPr>
-              <a:t>• Provide more detailed pronunciation feedback and test under wider conditions.</a:t>
-            </a:r>
-            <a:endParaRPr lang="en-US" sz="1500" dirty="0"/>
-          </a:p>
-          <a:p>
-            <a:pPr marL="0" indent="0">
-              <a:buNone/>
-            </a:pPr>
-            <a:endParaRPr lang="en-US" sz="1500" dirty="0"/>
-          </a:p>
-          <a:p>
-            <a:pPr marL="0" indent="0">
-              <a:buNone/>
-            </a:pPr>
-            <a:r>
-              <a:rPr lang="en-US" sz="1500" dirty="0">
-                <a:solidFill>
-                  <a:srgbClr val="3E6F28"/>
-                </a:solidFill>
-                <a:latin typeface="Arial" pitchFamily="34" charset="0"/>
-                <a:ea typeface="Arial" pitchFamily="34" charset="-122"/>
-                <a:cs typeface="Arial" pitchFamily="34" charset="-120"/>
-              </a:rPr>
-              <a:t>• Conduct a larger formal user evaluation study.</a:t>
-            </a:r>
-            <a:endParaRPr lang="en-US" sz="1500" dirty="0"/>
-          </a:p>
-        </p:txBody>
-      </p:sp>
-      <p:sp>
-        <p:nvSpPr>
-          <p:cNvPr id="12" name="Shape 10"/>
-          <p:cNvSpPr/>
-          <p:nvPr/>
-        </p:nvSpPr>
-        <p:spPr>
-          <a:xfrm>
-            <a:off x="3794760" y="5486400"/>
-            <a:ext cx="4590288" cy="256032"/>
-          </a:xfrm>
-          <a:prstGeom prst="roundRect">
-            <a:avLst>
-              <a:gd name="adj" fmla="val 17857"/>
-            </a:avLst>
-          </a:prstGeom>
-          <a:solidFill>
-            <a:srgbClr val="FFFFFF"/>
-          </a:solidFill>
-          <a:ln w="12700">
-            <a:solidFill>
-              <a:srgbClr val="38B7C9"/>
-            </a:solidFill>
-            <a:prstDash val="solid"/>
-          </a:ln>
-        </p:spPr>
-      </p:sp>
-      <p:sp>
-        <p:nvSpPr>
-          <p:cNvPr id="13" name="Text 11"/>
-          <p:cNvSpPr/>
-          <p:nvPr/>
-        </p:nvSpPr>
-        <p:spPr>
-          <a:xfrm>
-            <a:off x="3913632" y="5559552"/>
-            <a:ext cx="4343400" cy="91440"/>
-          </a:xfrm>
-          <a:prstGeom prst="rect">
-            <a:avLst/>
-          </a:prstGeom>
-          <a:noFill/>
-          <a:ln/>
-        </p:spPr>
-        <p:txBody>
-          <a:bodyPr wrap="square" lIns="0" tIns="0" rIns="0" bIns="0" rtlCol="0" anchor="ctr"/>
-          <a:lstStyle/>
-          <a:p>
-            <a:pPr marL="0" indent="0" algn="ctr">
-              <a:buNone/>
-            </a:pPr>
-            <a:r>
-              <a:rPr lang="en-US" sz="1180" b="1" dirty="0">
-                <a:solidFill>
-                  <a:srgbClr val="1E3F7A"/>
-                </a:solidFill>
-                <a:latin typeface="Arial" pitchFamily="34" charset="0"/>
-                <a:ea typeface="Arial" pitchFamily="34" charset="-122"/>
-                <a:cs typeface="Arial" pitchFamily="34" charset="-120"/>
-              </a:rPr>
-              <a:t>Positioning: a credible and integrated prototype for future expansion</a:t>
-            </a:r>
-            <a:endParaRPr lang="en-US" sz="1180" dirty="0"/>
-          </a:p>
-        </p:txBody>
-      </p:sp>
-      <p:pic>
-        <p:nvPicPr>
-          <p:cNvPr id="14" name="Image 0" descr="/mnt/data/work/template_media/image2.jpg"/>
-          <p:cNvPicPr>
-            <a:picLocks noChangeAspect="1"/>
-          </p:cNvPicPr>
-          <p:nvPr/>
-        </p:nvPicPr>
-        <p:blipFill>
-          <a:blip r:embed="rId3"/>
-          <a:srcRect t="44800" b="44800"/>
-          <a:stretch/>
-        </p:blipFill>
-        <p:spPr>
-          <a:xfrm>
-            <a:off x="0" y="6144768"/>
-            <a:ext cx="12191695" cy="713232"/>
-          </a:xfrm>
-          <a:prstGeom prst="rect">
-            <a:avLst/>
-          </a:prstGeom>
-        </p:spPr>
-      </p:pic>
-      <p:pic>
-        <p:nvPicPr>
-          <p:cNvPr id="15" name="Image 1" descr="/mnt/data/work/qm_logo_transparent.png"/>
-          <p:cNvPicPr>
-            <a:picLocks noChangeAspect="1"/>
-          </p:cNvPicPr>
-          <p:nvPr/>
-        </p:nvPicPr>
-        <p:blipFill>
-          <a:blip r:embed="rId4"/>
-          <a:stretch>
-            <a:fillRect/>
-          </a:stretch>
-        </p:blipFill>
-        <p:spPr>
-          <a:xfrm>
-            <a:off x="580644" y="6236208"/>
-            <a:ext cx="1389888" cy="438912"/>
-          </a:xfrm>
-          <a:prstGeom prst="rect">
-            <a:avLst/>
-          </a:prstGeom>
-        </p:spPr>
-      </p:pic>
-      <p:sp>
-        <p:nvSpPr>
-          <p:cNvPr id="16" name="Text 12"/>
-          <p:cNvSpPr/>
-          <p:nvPr/>
-        </p:nvSpPr>
-        <p:spPr>
-          <a:xfrm>
-            <a:off x="11688775" y="6309360"/>
-            <a:ext cx="228600" cy="201168"/>
-          </a:xfrm>
-          <a:prstGeom prst="rect">
-            <a:avLst/>
-          </a:prstGeom>
-          <a:noFill/>
-          <a:ln/>
-        </p:spPr>
-        <p:txBody>
-          <a:bodyPr wrap="square" lIns="0" tIns="0" rIns="0" bIns="0" rtlCol="0" anchor="ctr"/>
-          <a:lstStyle/>
-          <a:p>
-            <a:pPr marL="0" indent="0" algn="r">
-              <a:buNone/>
-            </a:pPr>
-            <a:r>
-              <a:rPr lang="en-US" sz="1100" dirty="0">
-                <a:solidFill>
-                  <a:srgbClr val="FFFFFF"/>
-                </a:solidFill>
-                <a:latin typeface="Arial" pitchFamily="34" charset="0"/>
-                <a:ea typeface="Arial" pitchFamily="34" charset="-122"/>
-                <a:cs typeface="Arial" pitchFamily="34" charset="-120"/>
-              </a:rPr>
-              <a:t>9</a:t>
-            </a:r>
-            <a:endParaRPr lang="en-US" sz="1100" dirty="0"/>
-          </a:p>
-        </p:txBody>
-      </p:sp>
-    </p:spTree>
+    <p:extLst>
+      <p:ext uri="{BB962C8B-B14F-4D97-AF65-F5344CB8AC3E}">
+        <p14:creationId xmlns:p14="http://schemas.microsoft.com/office/powerpoint/2010/main" val="2993154966"/>
+      </p:ext>
+    </p:extLst>
   </p:cSld>
   <p:clrMapOvr>
     <a:masterClrMapping/>

--- a/CatLingo_Defense_Template_Style.pptx
+++ b/CatLingo_Defense_Template_Style.pptx
@@ -12578,35 +12578,6 @@
       </p:pic>
       <p:pic>
         <p:nvPicPr>
-          <p:cNvPr id="20" name="Image 0" descr="/mnt/data/work/crops3/profile_single.png">
-            <a:extLst>
-              <a:ext uri="{FF2B5EF4-FFF2-40B4-BE49-F238E27FC236}">
-                <a16:creationId xmlns:a16="http://schemas.microsoft.com/office/drawing/2014/main" id="{F9A30FC1-40BE-48ED-AA10-593670DB21D7}"/>
-              </a:ext>
-            </a:extLst>
-          </p:cNvPr>
-          <p:cNvPicPr>
-            <a:picLocks noChangeAspect="1"/>
-          </p:cNvPicPr>
-          <p:nvPr/>
-        </p:nvPicPr>
-        <p:blipFill rotWithShape="1">
-          <a:blip r:embed="rId7"/>
-          <a:srcRect l="9754"/>
-          <a:stretch/>
-        </p:blipFill>
-        <p:spPr>
-          <a:xfrm>
-            <a:off x="1796395" y="1196629"/>
-            <a:ext cx="2640338" cy="4802611"/>
-          </a:xfrm>
-          <a:prstGeom prst="rect">
-            <a:avLst/>
-          </a:prstGeom>
-        </p:spPr>
-      </p:pic>
-      <p:pic>
-        <p:nvPicPr>
           <p:cNvPr id="21" name="图片 20">
             <a:extLst>
               <a:ext uri="{FF2B5EF4-FFF2-40B4-BE49-F238E27FC236}">
@@ -12620,7 +12591,7 @@
           <p:nvPr/>
         </p:nvPicPr>
         <p:blipFill>
-          <a:blip r:embed="rId8"/>
+          <a:blip r:embed="rId7"/>
           <a:stretch>
             <a:fillRect/>
           </a:stretch>
@@ -12650,6 +12621,36 @@
           <p:nvPr/>
         </p:nvPicPr>
         <p:blipFill>
+          <a:blip r:embed="rId8"/>
+          <a:stretch>
+            <a:fillRect/>
+          </a:stretch>
+        </p:blipFill>
+        <p:spPr>
+          <a:xfrm>
+            <a:off x="7327458" y="1213687"/>
+            <a:ext cx="2549150" cy="4714556"/>
+          </a:xfrm>
+          <a:prstGeom prst="rect">
+            <a:avLst/>
+          </a:prstGeom>
+        </p:spPr>
+      </p:pic>
+      <p:pic>
+        <p:nvPicPr>
+          <p:cNvPr id="5" name="图片 4">
+            <a:extLst>
+              <a:ext uri="{FF2B5EF4-FFF2-40B4-BE49-F238E27FC236}">
+                <a16:creationId xmlns:a16="http://schemas.microsoft.com/office/drawing/2014/main" id="{28F796AB-C5A7-4D83-8A90-DD0637384642}"/>
+              </a:ext>
+            </a:extLst>
+          </p:cNvPr>
+          <p:cNvPicPr>
+            <a:picLocks noChangeAspect="1"/>
+          </p:cNvPicPr>
+          <p:nvPr/>
+        </p:nvPicPr>
+        <p:blipFill>
           <a:blip r:embed="rId9"/>
           <a:stretch>
             <a:fillRect/>
@@ -12657,8 +12658,8 @@
         </p:blipFill>
         <p:spPr>
           <a:xfrm>
-            <a:off x="7327458" y="1213687"/>
-            <a:ext cx="2549150" cy="4714556"/>
+            <a:off x="1868408" y="1196629"/>
+            <a:ext cx="2603270" cy="4802104"/>
           </a:xfrm>
           <a:prstGeom prst="rect">
             <a:avLst/>
